--- a/presentation/Sentiment_Midterms_Summary.pptx
+++ b/presentation/Sentiment_Midterms_Summary.pptx
@@ -18,9 +18,14 @@
     <p:sldId id="266" r:id="rId12"/>
     <p:sldId id="267" r:id="rId13"/>
     <p:sldId id="268" r:id="rId14"/>
+    <p:sldId id="269" r:id="rId15"/>
+    <p:sldId id="270" r:id="rId16"/>
+    <p:sldId id="271" r:id="rId17"/>
+    <p:sldId id="272" r:id="rId18"/>
+    <p:sldId id="273" r:id="rId19"/>
   </p:sldIdLst>
   <p:notesMasterIdLst>
-    <p:notesMasterId r:id="rId15"/>
+    <p:notesMasterId r:id="rId20"/>
   </p:notesMasterIdLst>
   <p:sldSz cx="12192000" cy="6858000"/>
   <p:notesSz cx="6858000" cy="12192000"/>
@@ -119,41 +124,50 @@
   <p:extLst>
     <p:ext uri="{521415D9-36F7-43E2-AB2F-B90AF26B5E84}">
       <p14:sectionLst xmlns:p14="http://schemas.microsoft.com/office/powerpoint/2010/main">
-        <p14:section name="Question" id="{b3ffec61-248a-0852-d528-766ec7013c07}">
+        <p14:section name="Question" id="{a921950d-5b00-f043-f4db-1dc3c42b499c}">
           <p14:sldIdLst>
             <p14:sldId id="256"/>
             <p14:sldId id="257"/>
           </p14:sldIdLst>
         </p14:section>
-        <p14:section name="Approach" id="{11726657-4cf6-2e18-5973-4c526655cfe9}">
+        <p14:section name="Approach" id="{4577d273-ab55-177f-2221-76f9a86dace1}">
           <p14:sldIdLst>
             <p14:sldId id="258"/>
             <p14:sldId id="259"/>
           </p14:sldIdLst>
         </p14:section>
-        <p14:section name="Who" id="{77b4f08b-d2fa-0e13-f511-bc132b72e80f}">
+        <p14:section name="Who" id="{acfe78a5-6545-e3a7-2854-288f04aa42b4}">
           <p14:sldIdLst>
             <p14:sldId id="260"/>
             <p14:sldId id="261"/>
           </p14:sldIdLst>
         </p14:section>
-        <p14:section name="Why" id="{45143286-8c93-343f-4888-48416789db5b}">
+        <p14:section name="Why" id="{890d6445-3554-14d1-c2e1-6175ed3575d6}">
           <p14:sldIdLst>
             <p14:sldId id="262"/>
             <p14:sldId id="263"/>
             <p14:sldId id="264"/>
-          </p14:sldIdLst>
-        </p14:section>
-        <p14:section name="Media" id="{cff31e75-7127-1973-3b0e-d7fffef20fa8}">
-          <p14:sldIdLst>
             <p14:sldId id="265"/>
             <p14:sldId id="266"/>
           </p14:sldIdLst>
         </p14:section>
-        <p14:section name="So what" id="{7cda559b-1736-7a97-6878-647fd0bb3144}">
+        <p14:section name="Media" id="{9a02d32f-fa5b-05f3-3153-88314ee6538f}">
           <p14:sldIdLst>
             <p14:sldId id="267"/>
             <p14:sldId id="268"/>
+          </p14:sldIdLst>
+        </p14:section>
+        <p14:section name="So what" id="{373b5f86-1532-b554-a66a-9b0f7b0f09a2}">
+          <p14:sldIdLst>
+            <p14:sldId id="269"/>
+            <p14:sldId id="270"/>
+            <p14:sldId id="271"/>
+          </p14:sldIdLst>
+        </p14:section>
+        <p14:section name="Backup" id="{e238ce31-07b2-1049-4eb2-ca45cf44465c}">
+          <p14:sldIdLst>
+            <p14:sldId id="272"/>
+            <p14:sldId id="273"/>
           </p14:sldIdLst>
         </p14:section>
       </p14:sectionLst>
@@ -191,7 +205,7 @@
                 </a:solidFill>
                 <a:latin typeface="+mn-lt"/>
               </a:rPr>
-              <a:t>Consumer sentiment score, 2015–2026 (100 = how people felt in 1966; 50s = very gloomy)</a:t>
+              <a:t>Sentiment score, 2015–2026 (100 = how people felt in 1966; 50s = very gloomy)</a:t>
             </a:r>
           </a:p>
         </c:rich>
@@ -1014,7 +1028,7 @@
           <a:lstStyle/>
           <a:p>
             <a:pPr>
-              <a:defRPr sz="1000" b="0" i="0" u="none" strike="noStrike">
+              <a:defRPr sz="900" b="0" i="0" u="none" strike="noStrike">
                 <a:solidFill>
                   <a:srgbClr val="7A8392"/>
                 </a:solidFill>
@@ -1069,7 +1083,7 @@
           <a:lstStyle/>
           <a:p>
             <a:pPr>
-              <a:defRPr sz="1000" b="0" i="0" u="none" strike="noStrike">
+              <a:defRPr sz="900" b="0" i="0" u="none" strike="noStrike">
                 <a:solidFill>
                   <a:srgbClr val="7A8392"/>
                 </a:solidFill>
@@ -1111,6 +1125,572 @@
         </a:p>
       </c:txPr>
     </c:legend>
+    <c:plotVisOnly val="1"/>
+    <c:dispBlanksAs val="span"/>
+  </c:chart>
+  <c:spPr>
+    <a:noFill/>
+    <a:ln>
+      <a:noFill/>
+    </a:ln>
+    <a:effectLst/>
+  </c:spPr>
+  <c:externalData r:id="rId1">
+    <c:autoUpdate val="0"/>
+  </c:externalData>
+</c:chartSpace>
+</file>
+
+<file path=ppt/charts/chart10.xml><?xml version="1.0" encoding="utf-8"?>
+<c:chartSpace xmlns:c="http://schemas.openxmlformats.org/drawingml/2006/chart" xmlns:a="http://schemas.openxmlformats.org/drawingml/2006/main" xmlns:r="http://schemas.openxmlformats.org/officeDocument/2006/relationships">
+  <c:date1904 val="0"/>
+  <c:roundedCorners val="1"/>
+  <c:chart>
+    <c:title>
+      <c:tx>
+        <c:rich>
+          <a:bodyPr/>
+          <a:lstStyle/>
+          <a:p>
+            <a:pPr>
+              <a:defRPr sz="1200" b="0" i="0" u="none" strike="noStrike">
+                <a:solidFill>
+                  <a:srgbClr val="3A4150"/>
+                </a:solidFill>
+                <a:latin typeface="+mn-lt"/>
+              </a:defRPr>
+            </a:pPr>
+            <a:r>
+              <a:rPr sz="1200" b="0" i="0" u="none" strike="noStrike">
+                <a:solidFill>
+                  <a:srgbClr val="3A4150"/>
+                </a:solidFill>
+                <a:latin typeface="+mn-lt"/>
+              </a:rPr>
+              <a:t>Average sentiment score under each president</a:t>
+            </a:r>
+          </a:p>
+        </c:rich>
+      </c:tx>
+      <c:layout/>
+      <c:overlay val="0"/>
+    </c:title>
+    <c:autoTitleDeleted val="0"/>
+    <c:plotArea>
+      <c:layout/>
+      <c:barChart>
+        <c:barDir val="col"/>
+        <c:grouping val="clustered"/>
+        <c:varyColors val="0"/>
+        <c:ser>
+          <c:idx val="0"/>
+          <c:order val="0"/>
+          <c:tx>
+            <c:strRef>
+              <c:f>Sheet1!$B$1</c:f>
+              <c:strCache>
+                <c:ptCount val="1"/>
+                <c:pt idx="0">
+                  <c:v>Average sentiment score</c:v>
+                </c:pt>
+              </c:strCache>
+            </c:strRef>
+          </c:tx>
+          <c:spPr>
+            <a:solidFill>
+              <a:srgbClr val="C8433F"/>
+            </a:solidFill>
+            <a:effectLst/>
+          </c:spPr>
+          <c:invertIfNegative val="0"/>
+          <c:dLbls>
+            <c:numFmt formatCode="0" sourceLinked="0"/>
+            <c:txPr>
+              <a:bodyPr/>
+              <a:lstStyle/>
+              <a:p>
+                <a:pPr>
+                  <a:defRPr b="0" i="0" strike="noStrike" sz="1200" u="none">
+                    <a:solidFill>
+                      <a:srgbClr val="1B1F27"/>
+                    </a:solidFill>
+                    <a:latin typeface="+mn-lt"/>
+                  </a:defRPr>
+                </a:pPr>
+              </a:p>
+            </c:txPr>
+            <c:showLegendKey val="0"/>
+            <c:showVal val="1"/>
+            <c:showCatName val="0"/>
+            <c:showSerName val="0"/>
+            <c:showPercent val="0"/>
+            <c:showBubbleSize val="0"/>
+            <c:showLeaderLines val="0"/>
+          </c:dLbls>
+          <c:cat>
+            <c:multiLvlStrRef>
+              <c:f>Sheet1!$A$2:$A$4</c:f>
+              <c:multiLvlStrCache>
+                <c:ptCount val="3"/>
+                <c:lvl>
+                  <c:pt idx="0">
+                    <c:v>Trump-1</c:v>
+                  </c:pt>
+                  <c:pt idx="1">
+                    <c:v>Biden</c:v>
+                  </c:pt>
+                  <c:pt idx="2">
+                    <c:v>Trump-2</c:v>
+                  </c:pt>
+                </c:lvl>
+              </c:multiLvlStrCache>
+            </c:multiLvlStrRef>
+          </c:cat>
+          <c:val>
+            <c:numRef>
+              <c:f>Sheet1!$B$2:$B$4</c:f>
+              <c:numCache>
+                <c:formatCode>General</c:formatCode>
+                <c:ptCount val="3"/>
+                <c:pt idx="0">
+                  <c:v>93.1</c:v>
+                </c:pt>
+                <c:pt idx="1">
+                  <c:v>68.4</c:v>
+                </c:pt>
+                <c:pt idx="2">
+                  <c:v>53.9</c:v>
+                </c:pt>
+              </c:numCache>
+            </c:numRef>
+          </c:val>
+        </c:ser>
+        <c:dLbls>
+          <c:numFmt formatCode="0" sourceLinked="0"/>
+          <c:txPr>
+            <a:bodyPr/>
+            <a:lstStyle/>
+            <a:p>
+              <a:pPr>
+                <a:defRPr b="0" i="0" strike="noStrike" sz="1200" u="none">
+                  <a:solidFill>
+                    <a:srgbClr val="1B1F27"/>
+                  </a:solidFill>
+                  <a:latin typeface="+mn-lt"/>
+                </a:defRPr>
+              </a:pPr>
+            </a:p>
+          </c:txPr>
+          <c:showLegendKey val="0"/>
+          <c:showVal val="1"/>
+          <c:showCatName val="0"/>
+          <c:showSerName val="0"/>
+          <c:showPercent val="0"/>
+          <c:showBubbleSize val="0"/>
+          <c:showLeaderLines val="0"/>
+        </c:dLbls>
+        <c:gapWidth val="55"/>
+        <c:overlap val="0"/>
+        <c:axId val="2094734554"/>
+        <c:axId val="2094734552"/>
+        <c:axId val="2094734556"/>
+      </c:barChart>
+      <c:catAx>
+        <c:axId val="2094734554"/>
+        <c:scaling>
+          <c:orientation val="minMax"/>
+        </c:scaling>
+        <c:delete val="0"/>
+        <c:axPos val="b"/>
+        <c:numFmt formatCode="General" sourceLinked="1"/>
+        <c:majorTickMark val="out"/>
+        <c:minorTickMark val="none"/>
+        <c:tickLblPos val="low"/>
+        <c:spPr>
+          <a:ln w="12700" cap="flat">
+            <a:solidFill>
+              <a:srgbClr val="888888"/>
+            </a:solidFill>
+            <a:prstDash val="solid"/>
+            <a:round/>
+          </a:ln>
+        </c:spPr>
+        <c:txPr>
+          <a:bodyPr/>
+          <a:lstStyle/>
+          <a:p>
+            <a:pPr>
+              <a:defRPr sz="1200" b="0" i="0" u="none" strike="noStrike">
+                <a:solidFill>
+                  <a:srgbClr val="3A4150"/>
+                </a:solidFill>
+                <a:latin typeface="+mn-lt"/>
+              </a:defRPr>
+            </a:pPr>
+            <a:endParaRPr lang="en-US"/>
+          </a:p>
+        </c:txPr>
+        <c:crossAx val="2094734552"/>
+        <c:crosses val="autoZero"/>
+        <c:auto val="1"/>
+        <c:lblAlgn val="ctr"/>
+        <c:noMultiLvlLbl val="1"/>
+      </c:catAx>
+      <c:valAx>
+        <c:axId val="2094734552"/>
+        <c:scaling>
+          <c:orientation val="minMax"/>
+        </c:scaling>
+        <c:delete val="1"/>
+        <c:axPos val="l"/>
+        <c:numFmt formatCode="General" sourceLinked="0"/>
+        <c:majorTickMark val="out"/>
+        <c:minorTickMark val="none"/>
+        <c:tickLblPos val="nextTo"/>
+        <c:spPr>
+          <a:ln w="12700" cap="flat">
+            <a:solidFill>
+              <a:srgbClr val="888888"/>
+            </a:solidFill>
+            <a:prstDash val="solid"/>
+            <a:round/>
+          </a:ln>
+        </c:spPr>
+        <c:txPr>
+          <a:bodyPr/>
+          <a:lstStyle/>
+          <a:p>
+            <a:pPr>
+              <a:defRPr sz="1200" b="0" i="0" u="none" strike="noStrike">
+                <a:solidFill>
+                  <a:srgbClr val="000000"/>
+                </a:solidFill>
+                <a:latin typeface="Arial"/>
+              </a:defRPr>
+            </a:pPr>
+            <a:endParaRPr lang="en-US"/>
+          </a:p>
+        </c:txPr>
+        <c:crossAx val="2094734554"/>
+        <c:crosses val="autoZero"/>
+        <c:crossBetween val="between"/>
+      </c:valAx>
+      <c:spPr>
+        <a:noFill/>
+        <a:ln>
+          <a:noFill/>
+        </a:ln>
+        <a:effectLst/>
+      </c:spPr>
+    </c:plotArea>
+    <c:plotVisOnly val="1"/>
+    <c:dispBlanksAs val="span"/>
+  </c:chart>
+  <c:spPr>
+    <a:noFill/>
+    <a:ln>
+      <a:noFill/>
+    </a:ln>
+    <a:effectLst/>
+  </c:spPr>
+  <c:externalData r:id="rId1">
+    <c:autoUpdate val="0"/>
+  </c:externalData>
+</c:chartSpace>
+</file>
+
+<file path=ppt/charts/chart11.xml><?xml version="1.0" encoding="utf-8"?>
+<c:chartSpace xmlns:c="http://schemas.openxmlformats.org/drawingml/2006/chart" xmlns:a="http://schemas.openxmlformats.org/drawingml/2006/main" xmlns:r="http://schemas.openxmlformats.org/officeDocument/2006/relationships">
+  <c:date1904 val="0"/>
+  <c:roundedCorners val="1"/>
+  <c:chart>
+    <c:title>
+      <c:tx>
+        <c:rich>
+          <a:bodyPr/>
+          <a:lstStyle/>
+          <a:p>
+            <a:pPr>
+              <a:defRPr sz="1200" b="0" i="0" u="none" strike="noStrike">
+                <a:solidFill>
+                  <a:srgbClr val="3A4150"/>
+                </a:solidFill>
+                <a:latin typeface="+mn-lt"/>
+              </a:defRPr>
+            </a:pPr>
+            <a:r>
+              <a:rPr sz="1200" b="0" i="0" u="none" strike="noStrike">
+                <a:solidFill>
+                  <a:srgbClr val="3A4150"/>
+                </a:solidFill>
+                <a:latin typeface="+mn-lt"/>
+              </a:rPr>
+              <a:t>Error when predicting consumer spending, 2022–26 (shorter bar = better forecast)</a:t>
+            </a:r>
+          </a:p>
+        </c:rich>
+      </c:tx>
+      <c:layout/>
+      <c:overlay val="0"/>
+    </c:title>
+    <c:autoTitleDeleted val="0"/>
+    <c:plotArea>
+      <c:layout/>
+      <c:barChart>
+        <c:barDir val="bar"/>
+        <c:grouping val="clustered"/>
+        <c:varyColors val="0"/>
+        <c:ser>
+          <c:idx val="0"/>
+          <c:order val="0"/>
+          <c:tx>
+            <c:strRef>
+              <c:f>Sheet1!$B$1</c:f>
+              <c:strCache>
+                <c:ptCount val="1"/>
+                <c:pt idx="0">
+                  <c:v>Forecast error</c:v>
+                </c:pt>
+              </c:strCache>
+            </c:strRef>
+          </c:tx>
+          <c:spPr>
+            <a:solidFill>
+              <a:srgbClr val="7A8392"/>
+            </a:solidFill>
+            <a:effectLst/>
+          </c:spPr>
+          <c:invertIfNegative val="0"/>
+          <c:dLbls>
+            <c:numFmt formatCode="0.00" sourceLinked="0"/>
+            <c:txPr>
+              <a:bodyPr/>
+              <a:lstStyle/>
+              <a:p>
+                <a:pPr>
+                  <a:defRPr b="0" i="0" strike="noStrike" sz="1200" u="none">
+                    <a:solidFill>
+                      <a:srgbClr val="1B1F27"/>
+                    </a:solidFill>
+                    <a:latin typeface="+mn-lt"/>
+                  </a:defRPr>
+                </a:pPr>
+              </a:p>
+            </c:txPr>
+            <c:showLegendKey val="0"/>
+            <c:showVal val="1"/>
+            <c:showCatName val="0"/>
+            <c:showSerName val="0"/>
+            <c:showPercent val="0"/>
+            <c:showBubbleSize val="0"/>
+            <c:showLeaderLines val="0"/>
+          </c:dLbls>
+          <c:dPt>
+            <c:idx val="0"/>
+            <c:invertIfNegative val="0"/>
+            <c:bubble3D val="0"/>
+            <c:spPr>
+              <a:solidFill>
+                <a:srgbClr val="7A8392"/>
+              </a:solidFill>
+              <a:effectLst/>
+            </c:spPr>
+          </c:dPt>
+          <c:dPt>
+            <c:idx val="1"/>
+            <c:invertIfNegative val="0"/>
+            <c:bubble3D val="0"/>
+            <c:spPr>
+              <a:solidFill>
+                <a:srgbClr val="C8433F"/>
+              </a:solidFill>
+              <a:effectLst/>
+            </c:spPr>
+          </c:dPt>
+          <c:dPt>
+            <c:idx val="2"/>
+            <c:invertIfNegative val="0"/>
+            <c:bubble3D val="0"/>
+            <c:spPr>
+              <a:solidFill>
+                <a:srgbClr val="1F8A5B"/>
+              </a:solidFill>
+              <a:effectLst/>
+            </c:spPr>
+          </c:dPt>
+          <c:dPt>
+            <c:idx val="3"/>
+            <c:invertIfNegative val="0"/>
+            <c:bubble3D val="0"/>
+            <c:spPr>
+              <a:solidFill>
+                <a:srgbClr val="C8433F"/>
+              </a:solidFill>
+              <a:effectLst/>
+            </c:spPr>
+          </c:dPt>
+          <c:cat>
+            <c:multiLvlStrRef>
+              <c:f>Sheet1!$A$2:$A$5</c:f>
+              <c:multiLvlStrCache>
+                <c:ptCount val="4"/>
+                <c:lvl>
+                  <c:pt idx="0">
+                    <c:v>Economy data only</c:v>
+                  </c:pt>
+                  <c:pt idx="1">
+                    <c:v>+ how people say they feel</c:v>
+                  </c:pt>
+                  <c:pt idx="2">
+                    <c:v>+ only the 'economy part' of feelings</c:v>
+                  </c:pt>
+                  <c:pt idx="3">
+                    <c:v>+ only the 'gloom gap'</c:v>
+                  </c:pt>
+                </c:lvl>
+              </c:multiLvlStrCache>
+            </c:multiLvlStrRef>
+          </c:cat>
+          <c:val>
+            <c:numRef>
+              <c:f>Sheet1!$B$2:$B$5</c:f>
+              <c:numCache>
+                <c:formatCode>General</c:formatCode>
+                <c:ptCount val="4"/>
+                <c:pt idx="0">
+                  <c:v>1.45</c:v>
+                </c:pt>
+                <c:pt idx="1">
+                  <c:v>1.74</c:v>
+                </c:pt>
+                <c:pt idx="2">
+                  <c:v>1.21</c:v>
+                </c:pt>
+                <c:pt idx="3">
+                  <c:v>1.92</c:v>
+                </c:pt>
+              </c:numCache>
+            </c:numRef>
+          </c:val>
+        </c:ser>
+        <c:dLbls>
+          <c:numFmt formatCode="0.00" sourceLinked="0"/>
+          <c:txPr>
+            <a:bodyPr/>
+            <a:lstStyle/>
+            <a:p>
+              <a:pPr>
+                <a:defRPr b="0" i="0" strike="noStrike" sz="1200" u="none">
+                  <a:solidFill>
+                    <a:srgbClr val="1B1F27"/>
+                  </a:solidFill>
+                  <a:latin typeface="+mn-lt"/>
+                </a:defRPr>
+              </a:pPr>
+            </a:p>
+          </c:txPr>
+          <c:showLegendKey val="0"/>
+          <c:showVal val="1"/>
+          <c:showCatName val="0"/>
+          <c:showSerName val="0"/>
+          <c:showPercent val="0"/>
+          <c:showBubbleSize val="0"/>
+          <c:showLeaderLines val="0"/>
+        </c:dLbls>
+        <c:gapWidth val="45"/>
+        <c:overlap val="0"/>
+        <c:axId val="2094734554"/>
+        <c:axId val="2094734552"/>
+        <c:axId val="2094734556"/>
+      </c:barChart>
+      <c:catAx>
+        <c:axId val="2094734554"/>
+        <c:scaling>
+          <c:orientation val="maxMin"/>
+        </c:scaling>
+        <c:delete val="0"/>
+        <c:axPos val="l"/>
+        <c:numFmt formatCode="General" sourceLinked="1"/>
+        <c:majorTickMark val="out"/>
+        <c:minorTickMark val="none"/>
+        <c:tickLblPos val="nextTo"/>
+        <c:spPr>
+          <a:ln w="12700" cap="flat">
+            <a:solidFill>
+              <a:srgbClr val="888888"/>
+            </a:solidFill>
+            <a:prstDash val="solid"/>
+            <a:round/>
+          </a:ln>
+        </c:spPr>
+        <c:txPr>
+          <a:bodyPr/>
+          <a:lstStyle/>
+          <a:p>
+            <a:pPr>
+              <a:defRPr sz="1200" b="0" i="0" u="none" strike="noStrike">
+                <a:solidFill>
+                  <a:srgbClr val="3A4150"/>
+                </a:solidFill>
+                <a:latin typeface="+mn-lt"/>
+              </a:defRPr>
+            </a:pPr>
+            <a:endParaRPr lang="en-US"/>
+          </a:p>
+        </c:txPr>
+        <c:crossAx val="2094734552"/>
+        <c:crosses val="autoZero"/>
+        <c:auto val="1"/>
+        <c:lblAlgn val="ctr"/>
+        <c:noMultiLvlLbl val="1"/>
+      </c:catAx>
+      <c:valAx>
+        <c:axId val="2094734552"/>
+        <c:scaling>
+          <c:orientation val="minMax"/>
+        </c:scaling>
+        <c:delete val="1"/>
+        <c:axPos val="b"/>
+        <c:numFmt formatCode="General" sourceLinked="0"/>
+        <c:majorTickMark val="out"/>
+        <c:minorTickMark val="none"/>
+        <c:tickLblPos val="low"/>
+        <c:spPr>
+          <a:ln w="12700" cap="flat">
+            <a:solidFill>
+              <a:srgbClr val="888888"/>
+            </a:solidFill>
+            <a:prstDash val="solid"/>
+            <a:round/>
+          </a:ln>
+        </c:spPr>
+        <c:txPr>
+          <a:bodyPr/>
+          <a:lstStyle/>
+          <a:p>
+            <a:pPr>
+              <a:defRPr sz="1200" b="0" i="0" u="none" strike="noStrike">
+                <a:solidFill>
+                  <a:srgbClr val="000000"/>
+                </a:solidFill>
+                <a:latin typeface="Arial"/>
+              </a:defRPr>
+            </a:pPr>
+            <a:endParaRPr lang="en-US"/>
+          </a:p>
+        </c:txPr>
+        <c:crossAx val="2094734554"/>
+        <c:crosses val="autoZero"/>
+        <c:crossBetween val="between"/>
+      </c:valAx>
+      <c:spPr>
+        <a:noFill/>
+        <a:ln>
+          <a:noFill/>
+        </a:ln>
+        <a:effectLst/>
+      </c:spPr>
+    </c:plotArea>
     <c:plotVisOnly val="1"/>
     <c:dispBlanksAs val="span"/>
   </c:chart>
@@ -2226,6 +2806,450 @@
 </file>
 
 <file path=ppt/charts/chart5.xml><?xml version="1.0" encoding="utf-8"?>
+<c:chartSpace xmlns:c="http://schemas.openxmlformats.org/drawingml/2006/chart" xmlns:a="http://schemas.openxmlformats.org/drawingml/2006/main" xmlns:r="http://schemas.openxmlformats.org/officeDocument/2006/relationships">
+  <c:date1904 val="0"/>
+  <c:roundedCorners val="1"/>
+  <c:chart>
+    <c:title>
+      <c:tx>
+        <c:rich>
+          <a:bodyPr/>
+          <a:lstStyle/>
+          <a:p>
+            <a:pPr>
+              <a:defRPr sz="1200" b="0" i="0" u="none" strike="noStrike">
+                <a:solidFill>
+                  <a:srgbClr val="3A4150"/>
+                </a:solidFill>
+                <a:latin typeface="+mn-lt"/>
+              </a:defRPr>
+            </a:pPr>
+            <a:r>
+              <a:rPr sz="1200" b="0" i="0" u="none" strike="noStrike">
+                <a:solidFill>
+                  <a:srgbClr val="3A4150"/>
+                </a:solidFill>
+                <a:latin typeface="+mn-lt"/>
+              </a:rPr>
+              <a:t>% of Michigan respondents giving each reason (they answer in their own words)</a:t>
+            </a:r>
+          </a:p>
+        </c:rich>
+      </c:tx>
+      <c:layout/>
+      <c:overlay val="0"/>
+    </c:title>
+    <c:autoTitleDeleted val="0"/>
+    <c:plotArea>
+      <c:layout/>
+      <c:barChart>
+        <c:barDir val="col"/>
+        <c:grouping val="clustered"/>
+        <c:varyColors val="0"/>
+        <c:ser>
+          <c:idx val="0"/>
+          <c:order val="0"/>
+          <c:tx>
+            <c:strRef>
+              <c:f>Sheet1!$B$1</c:f>
+              <c:strCache>
+                <c:ptCount val="1"/>
+                <c:pt idx="0">
+                  <c:v>2019</c:v>
+                </c:pt>
+              </c:strCache>
+            </c:strRef>
+          </c:tx>
+          <c:spPr>
+            <a:solidFill>
+              <a:srgbClr val="C9D3E0"/>
+            </a:solidFill>
+            <a:effectLst/>
+          </c:spPr>
+          <c:invertIfNegative val="0"/>
+          <c:dLbls>
+            <c:numFmt formatCode="0&quot;%&quot;" sourceLinked="0"/>
+            <c:txPr>
+              <a:bodyPr/>
+              <a:lstStyle/>
+              <a:p>
+                <a:pPr>
+                  <a:defRPr b="0" i="0" strike="noStrike" sz="1100" u="none">
+                    <a:solidFill>
+                      <a:srgbClr val="1B1F27"/>
+                    </a:solidFill>
+                    <a:latin typeface="+mn-lt"/>
+                  </a:defRPr>
+                </a:pPr>
+              </a:p>
+            </c:txPr>
+            <c:showLegendKey val="0"/>
+            <c:showVal val="1"/>
+            <c:showCatName val="0"/>
+            <c:showSerName val="0"/>
+            <c:showPercent val="0"/>
+            <c:showBubbleSize val="0"/>
+            <c:showLeaderLines val="0"/>
+          </c:dLbls>
+          <c:cat>
+            <c:multiLvlStrRef>
+              <c:f>Sheet1!$A$2:$A$4</c:f>
+              <c:multiLvlStrCache>
+                <c:ptCount val="3"/>
+                <c:lvl>
+                  <c:pt idx="0">
+                    <c:v>Worse off because of higher prices</c:v>
+                  </c:pt>
+                  <c:pt idx="1">
+                    <c:v>Bad time to buy a home: interest rates</c:v>
+                  </c:pt>
+                  <c:pt idx="2">
+                    <c:v>Bad time to buy big items: prices high</c:v>
+                  </c:pt>
+                </c:lvl>
+              </c:multiLvlStrCache>
+            </c:multiLvlStrRef>
+          </c:cat>
+          <c:val>
+            <c:numRef>
+              <c:f>Sheet1!$B$2:$B$4</c:f>
+              <c:numCache>
+                <c:formatCode>General</c:formatCode>
+                <c:ptCount val="3"/>
+                <c:pt idx="0">
+                  <c:v>7.3</c:v>
+                </c:pt>
+                <c:pt idx="1">
+                  <c:v>8.3</c:v>
+                </c:pt>
+                <c:pt idx="2">
+                  <c:v>11.2</c:v>
+                </c:pt>
+              </c:numCache>
+            </c:numRef>
+          </c:val>
+        </c:ser>
+        <c:ser>
+          <c:idx val="1"/>
+          <c:order val="1"/>
+          <c:tx>
+            <c:strRef>
+              <c:f>Sheet1!$C$1</c:f>
+              <c:strCache>
+                <c:ptCount val="1"/>
+                <c:pt idx="0">
+                  <c:v>2022 (inflation peak)</c:v>
+                </c:pt>
+              </c:strCache>
+            </c:strRef>
+          </c:tx>
+          <c:spPr>
+            <a:solidFill>
+              <a:srgbClr val="F2B8B5"/>
+            </a:solidFill>
+            <a:effectLst/>
+          </c:spPr>
+          <c:invertIfNegative val="0"/>
+          <c:dLbls>
+            <c:numFmt formatCode="0&quot;%&quot;" sourceLinked="0"/>
+            <c:txPr>
+              <a:bodyPr/>
+              <a:lstStyle/>
+              <a:p>
+                <a:pPr>
+                  <a:defRPr b="0" i="0" strike="noStrike" sz="1100" u="none">
+                    <a:solidFill>
+                      <a:srgbClr val="1B1F27"/>
+                    </a:solidFill>
+                    <a:latin typeface="+mn-lt"/>
+                  </a:defRPr>
+                </a:pPr>
+              </a:p>
+            </c:txPr>
+            <c:showLegendKey val="0"/>
+            <c:showVal val="1"/>
+            <c:showCatName val="0"/>
+            <c:showSerName val="0"/>
+            <c:showPercent val="0"/>
+            <c:showBubbleSize val="0"/>
+            <c:showLeaderLines val="0"/>
+          </c:dLbls>
+          <c:cat>
+            <c:multiLvlStrRef>
+              <c:f>Sheet1!$A$2:$A$4</c:f>
+              <c:multiLvlStrCache>
+                <c:ptCount val="3"/>
+                <c:lvl>
+                  <c:pt idx="0">
+                    <c:v>Worse off because of higher prices</c:v>
+                  </c:pt>
+                  <c:pt idx="1">
+                    <c:v>Bad time to buy a home: interest rates</c:v>
+                  </c:pt>
+                  <c:pt idx="2">
+                    <c:v>Bad time to buy big items: prices high</c:v>
+                  </c:pt>
+                </c:lvl>
+              </c:multiLvlStrCache>
+            </c:multiLvlStrRef>
+          </c:cat>
+          <c:val>
+            <c:numRef>
+              <c:f>Sheet1!$C$2:$C$4</c:f>
+              <c:numCache>
+                <c:formatCode>General</c:formatCode>
+                <c:ptCount val="3"/>
+                <c:pt idx="0">
+                  <c:v>39.8</c:v>
+                </c:pt>
+                <c:pt idx="1">
+                  <c:v>37.1</c:v>
+                </c:pt>
+                <c:pt idx="2">
+                  <c:v>42.4</c:v>
+                </c:pt>
+              </c:numCache>
+            </c:numRef>
+          </c:val>
+        </c:ser>
+        <c:ser>
+          <c:idx val="2"/>
+          <c:order val="2"/>
+          <c:tx>
+            <c:strRef>
+              <c:f>Sheet1!$D$1</c:f>
+              <c:strCache>
+                <c:ptCount val="1"/>
+                <c:pt idx="0">
+                  <c:v>2025–26</c:v>
+                </c:pt>
+              </c:strCache>
+            </c:strRef>
+          </c:tx>
+          <c:spPr>
+            <a:solidFill>
+              <a:srgbClr val="C8433F"/>
+            </a:solidFill>
+            <a:effectLst/>
+          </c:spPr>
+          <c:invertIfNegative val="0"/>
+          <c:dLbls>
+            <c:numFmt formatCode="0&quot;%&quot;" sourceLinked="0"/>
+            <c:txPr>
+              <a:bodyPr/>
+              <a:lstStyle/>
+              <a:p>
+                <a:pPr>
+                  <a:defRPr b="0" i="0" strike="noStrike" sz="1100" u="none">
+                    <a:solidFill>
+                      <a:srgbClr val="1B1F27"/>
+                    </a:solidFill>
+                    <a:latin typeface="+mn-lt"/>
+                  </a:defRPr>
+                </a:pPr>
+              </a:p>
+            </c:txPr>
+            <c:showLegendKey val="0"/>
+            <c:showVal val="1"/>
+            <c:showCatName val="0"/>
+            <c:showSerName val="0"/>
+            <c:showPercent val="0"/>
+            <c:showBubbleSize val="0"/>
+            <c:showLeaderLines val="0"/>
+          </c:dLbls>
+          <c:cat>
+            <c:multiLvlStrRef>
+              <c:f>Sheet1!$A$2:$A$4</c:f>
+              <c:multiLvlStrCache>
+                <c:ptCount val="3"/>
+                <c:lvl>
+                  <c:pt idx="0">
+                    <c:v>Worse off because of higher prices</c:v>
+                  </c:pt>
+                  <c:pt idx="1">
+                    <c:v>Bad time to buy a home: interest rates</c:v>
+                  </c:pt>
+                  <c:pt idx="2">
+                    <c:v>Bad time to buy big items: prices high</c:v>
+                  </c:pt>
+                </c:lvl>
+              </c:multiLvlStrCache>
+            </c:multiLvlStrRef>
+          </c:cat>
+          <c:val>
+            <c:numRef>
+              <c:f>Sheet1!$D$2:$D$4</c:f>
+              <c:numCache>
+                <c:formatCode>General</c:formatCode>
+                <c:ptCount val="3"/>
+                <c:pt idx="0">
+                  <c:v>44.8</c:v>
+                </c:pt>
+                <c:pt idx="1">
+                  <c:v>44</c:v>
+                </c:pt>
+                <c:pt idx="2">
+                  <c:v>33.4</c:v>
+                </c:pt>
+              </c:numCache>
+            </c:numRef>
+          </c:val>
+        </c:ser>
+        <c:dLbls>
+          <c:numFmt formatCode="0&quot;%&quot;" sourceLinked="0"/>
+          <c:txPr>
+            <a:bodyPr/>
+            <a:lstStyle/>
+            <a:p>
+              <a:pPr>
+                <a:defRPr b="0" i="0" strike="noStrike" sz="1100" u="none">
+                  <a:solidFill>
+                    <a:srgbClr val="1B1F27"/>
+                  </a:solidFill>
+                  <a:latin typeface="+mn-lt"/>
+                </a:defRPr>
+              </a:pPr>
+            </a:p>
+          </c:txPr>
+          <c:showLegendKey val="0"/>
+          <c:showVal val="1"/>
+          <c:showCatName val="0"/>
+          <c:showSerName val="0"/>
+          <c:showPercent val="0"/>
+          <c:showBubbleSize val="0"/>
+          <c:showLeaderLines val="0"/>
+        </c:dLbls>
+        <c:gapWidth val="50"/>
+        <c:overlap val="0"/>
+        <c:axId val="2094734554"/>
+        <c:axId val="2094734552"/>
+        <c:axId val="2094734556"/>
+      </c:barChart>
+      <c:catAx>
+        <c:axId val="2094734554"/>
+        <c:scaling>
+          <c:orientation val="minMax"/>
+        </c:scaling>
+        <c:delete val="0"/>
+        <c:axPos val="b"/>
+        <c:numFmt formatCode="General" sourceLinked="1"/>
+        <c:majorTickMark val="out"/>
+        <c:minorTickMark val="none"/>
+        <c:tickLblPos val="low"/>
+        <c:spPr>
+          <a:ln w="12700" cap="flat">
+            <a:solidFill>
+              <a:srgbClr val="888888"/>
+            </a:solidFill>
+            <a:prstDash val="solid"/>
+            <a:round/>
+          </a:ln>
+        </c:spPr>
+        <c:txPr>
+          <a:bodyPr/>
+          <a:lstStyle/>
+          <a:p>
+            <a:pPr>
+              <a:defRPr sz="1150" b="0" i="0" u="none" strike="noStrike">
+                <a:solidFill>
+                  <a:srgbClr val="3A4150"/>
+                </a:solidFill>
+                <a:latin typeface="+mn-lt"/>
+              </a:defRPr>
+            </a:pPr>
+            <a:endParaRPr lang="en-US"/>
+          </a:p>
+        </c:txPr>
+        <c:crossAx val="2094734552"/>
+        <c:crosses val="autoZero"/>
+        <c:auto val="1"/>
+        <c:lblAlgn val="ctr"/>
+        <c:noMultiLvlLbl val="1"/>
+      </c:catAx>
+      <c:valAx>
+        <c:axId val="2094734552"/>
+        <c:scaling>
+          <c:orientation val="minMax"/>
+        </c:scaling>
+        <c:delete val="1"/>
+        <c:axPos val="l"/>
+        <c:numFmt formatCode="General" sourceLinked="0"/>
+        <c:majorTickMark val="out"/>
+        <c:minorTickMark val="none"/>
+        <c:tickLblPos val="nextTo"/>
+        <c:spPr>
+          <a:ln w="12700" cap="flat">
+            <a:solidFill>
+              <a:srgbClr val="888888"/>
+            </a:solidFill>
+            <a:prstDash val="solid"/>
+            <a:round/>
+          </a:ln>
+        </c:spPr>
+        <c:txPr>
+          <a:bodyPr/>
+          <a:lstStyle/>
+          <a:p>
+            <a:pPr>
+              <a:defRPr sz="1200" b="0" i="0" u="none" strike="noStrike">
+                <a:solidFill>
+                  <a:srgbClr val="000000"/>
+                </a:solidFill>
+                <a:latin typeface="Arial"/>
+              </a:defRPr>
+            </a:pPr>
+            <a:endParaRPr lang="en-US"/>
+          </a:p>
+        </c:txPr>
+        <c:crossAx val="2094734554"/>
+        <c:crosses val="autoZero"/>
+        <c:crossBetween val="between"/>
+      </c:valAx>
+      <c:spPr>
+        <a:noFill/>
+        <a:ln>
+          <a:noFill/>
+        </a:ln>
+        <a:effectLst/>
+      </c:spPr>
+    </c:plotArea>
+    <c:legend>
+      <c:legendPos val="b"/>
+      <c:overlay val="0"/>
+      <c:txPr>
+        <a:bodyPr/>
+        <a:lstStyle/>
+        <a:p>
+          <a:pPr>
+            <a:defRPr sz="1100">
+              <a:solidFill>
+                <a:srgbClr val="3A4150"/>
+              </a:solidFill>
+              <a:latin typeface="+mn-lt"/>
+              <a:cs typeface="+mn-lt"/>
+            </a:defRPr>
+          </a:pPr>
+          <a:endParaRPr lang="en-US"/>
+        </a:p>
+      </c:txPr>
+    </c:legend>
+    <c:plotVisOnly val="1"/>
+    <c:dispBlanksAs val="span"/>
+  </c:chart>
+  <c:spPr>
+    <a:noFill/>
+    <a:ln>
+      <a:noFill/>
+    </a:ln>
+    <a:effectLst/>
+  </c:spPr>
+  <c:externalData r:id="rId1">
+    <c:autoUpdate val="0"/>
+  </c:externalData>
+</c:chartSpace>
+</file>
+
+<file path=ppt/charts/chart6.xml><?xml version="1.0" encoding="utf-8"?>
 <c:chartSpace xmlns:c="http://schemas.openxmlformats.org/drawingml/2006/chart" xmlns:a="http://schemas.openxmlformats.org/drawingml/2006/main" xmlns:r="http://schemas.openxmlformats.org/officeDocument/2006/relationships">
   <c:date1904 val="0"/>
   <c:roundedCorners val="1"/>
@@ -2550,7 +3574,7 @@
 </c:chartSpace>
 </file>
 
-<file path=ppt/charts/chart6.xml><?xml version="1.0" encoding="utf-8"?>
+<file path=ppt/charts/chart7.xml><?xml version="1.0" encoding="utf-8"?>
 <c:chartSpace xmlns:c="http://schemas.openxmlformats.org/drawingml/2006/chart" xmlns:a="http://schemas.openxmlformats.org/drawingml/2006/main" xmlns:r="http://schemas.openxmlformats.org/officeDocument/2006/relationships">
   <c:date1904 val="0"/>
   <c:roundedCorners val="1"/>
@@ -2576,7 +3600,7 @@
                 </a:solidFill>
                 <a:latin typeface="+mn-lt"/>
               </a:rPr>
-              <a:t>How many of the 41 points each cause explains</a:t>
+              <a:t>Points of the 41-point drop since 2019 explained by each cause</a:t>
             </a:r>
           </a:p>
         </c:rich>
@@ -2607,13 +3631,13 @@
           </c:tx>
           <c:spPr>
             <a:solidFill>
-              <a:srgbClr val="7A8392"/>
+              <a:srgbClr val="C8433F"/>
             </a:solidFill>
             <a:effectLst/>
           </c:spPr>
           <c:invertIfNegative val="0"/>
           <c:dLbls>
-            <c:numFmt formatCode="0" sourceLinked="0"/>
+            <c:numFmt formatCode="0.0" sourceLinked="0"/>
             <c:txPr>
               <a:bodyPr/>
               <a:lstStyle/>
@@ -2642,7 +3666,7 @@
             <c:bubble3D val="0"/>
             <c:spPr>
               <a:solidFill>
-                <a:srgbClr val="7A8392"/>
+                <a:srgbClr val="C8433F"/>
               </a:solidFill>
               <a:effectLst/>
             </c:spPr>
@@ -2653,7 +3677,7 @@
             <c:bubble3D val="0"/>
             <c:spPr>
               <a:solidFill>
-                <a:srgbClr val="C8433F"/>
+                <a:srgbClr val="2A78D6"/>
               </a:solidFill>
               <a:effectLst/>
             </c:spPr>
@@ -2664,7 +3688,7 @@
             <c:bubble3D val="0"/>
             <c:spPr>
               <a:solidFill>
-                <a:srgbClr val="2A78D6"/>
+                <a:srgbClr val="D99A1E"/>
               </a:solidFill>
               <a:effectLst/>
             </c:spPr>
@@ -2686,31 +3710,45 @@
             <c:bubble3D val="0"/>
             <c:spPr>
               <a:solidFill>
-                <a:srgbClr val="B8BEC8"/>
+                <a:srgbClr val="7A8392"/>
+              </a:solidFill>
+              <a:effectLst/>
+            </c:spPr>
+          </c:dPt>
+          <c:dPt>
+            <c:idx val="5"/>
+            <c:invertIfNegative val="0"/>
+            <c:bubble3D val="0"/>
+            <c:spPr>
+              <a:solidFill>
+                <a:srgbClr val="C9CED6"/>
               </a:solidFill>
               <a:effectLst/>
             </c:spPr>
           </c:dPt>
           <c:cat>
             <c:multiLvlStrRef>
-              <c:f>Sheet1!$A$2:$A$6</c:f>
+              <c:f>Sheet1!$A$2:$A$7</c:f>
               <c:multiLvlStrCache>
-                <c:ptCount val="5"/>
+                <c:ptCount val="6"/>
                 <c:lvl>
                   <c:pt idx="0">
-                    <c:v>Jobs, inflation, growth (official numbers)</c:v>
+                    <c:v>High prices &amp; cost of living</c:v>
                   </c:pt>
                   <c:pt idx="1">
-                    <c:v>Everyday costs: high prices, food, loans, job worries</c:v>
+                    <c:v>Survey moved online</c:v>
                   </c:pt>
                   <c:pt idx="2">
-                    <c:v>Survey moved online</c:v>
+                    <c:v>Policy uncertainty (tariffs, shutdown)</c:v>
                   </c:pt>
                   <c:pt idx="3">
-                    <c:v>Fewer Republicans answering (estimate)</c:v>
+                    <c:v>Jobs, income, growth &amp; mortgage rates</c:v>
                   </c:pt>
                   <c:pt idx="4">
-                    <c:v>Not explained</c:v>
+                    <c:v>Partisan mix of who answers</c:v>
+                  </c:pt>
+                  <c:pt idx="5">
+                    <c:v>Not explained by any measure</c:v>
                   </c:pt>
                 </c:lvl>
               </c:multiLvlStrCache>
@@ -2718,23 +3756,26 @@
           </c:cat>
           <c:val>
             <c:numRef>
-              <c:f>Sheet1!$B$2:$B$6</c:f>
+              <c:f>Sheet1!$B$2:$B$7</c:f>
               <c:numCache>
                 <c:formatCode>General</c:formatCode>
-                <c:ptCount val="5"/>
+                <c:ptCount val="6"/>
                 <c:pt idx="0">
-                  <c:v>5.2</c:v>
+                  <c:v>11.4</c:v>
                 </c:pt>
                 <c:pt idx="1">
-                  <c:v>14.7</c:v>
+                  <c:v>6.6</c:v>
                 </c:pt>
                 <c:pt idx="2">
-                  <c:v>6.6</c:v>
+                  <c:v>6.1</c:v>
                 </c:pt>
                 <c:pt idx="3">
+                  <c:v>2.5</c:v>
+                </c:pt>
+                <c:pt idx="4">
                   <c:v>2.4</c:v>
                 </c:pt>
-                <c:pt idx="4">
+                <c:pt idx="5">
                   <c:v>12.4</c:v>
                 </c:pt>
               </c:numCache>
@@ -2742,7 +3783,7 @@
           </c:val>
         </c:ser>
         <c:dLbls>
-          <c:numFmt formatCode="0" sourceLinked="0"/>
+          <c:numFmt formatCode="0.0" sourceLinked="0"/>
           <c:txPr>
             <a:bodyPr/>
             <a:lstStyle/>
@@ -2765,7 +3806,7 @@
           <c:showBubbleSize val="0"/>
           <c:showLeaderLines val="0"/>
         </c:dLbls>
-        <c:gapWidth val="45"/>
+        <c:gapWidth val="40"/>
         <c:overlap val="0"/>
         <c:axId val="2094734554"/>
         <c:axId val="2094734552"/>
@@ -2875,7 +3916,7 @@
 </c:chartSpace>
 </file>
 
-<file path=ppt/charts/chart7.xml><?xml version="1.0" encoding="utf-8"?>
+<file path=ppt/charts/chart8.xml><?xml version="1.0" encoding="utf-8"?>
 <c:chartSpace xmlns:c="http://schemas.openxmlformats.org/drawingml/2006/chart" xmlns:a="http://schemas.openxmlformats.org/drawingml/2006/main" xmlns:r="http://schemas.openxmlformats.org/officeDocument/2006/relationships">
   <c:date1904 val="0"/>
   <c:roundedCorners val="1"/>
@@ -3149,7 +4190,7 @@
 </c:chartSpace>
 </file>
 
-<file path=ppt/charts/chart8.xml><?xml version="1.0" encoding="utf-8"?>
+<file path=ppt/charts/chart9.xml><?xml version="1.0" encoding="utf-8"?>
 <c:chartSpace xmlns:c="http://schemas.openxmlformats.org/drawingml/2006/chart" xmlns:a="http://schemas.openxmlformats.org/drawingml/2006/main" xmlns:r="http://schemas.openxmlformats.org/officeDocument/2006/relationships">
   <c:date1904 val="0"/>
   <c:roundedCorners val="1"/>
@@ -3175,7 +4216,7 @@
                 </a:solidFill>
                 <a:latin typeface="+mn-lt"/>
               </a:rPr>
-              <a:t>Average sentiment score under each president</a:t>
+              <a:t>Sentiment by party at the two lowest points (University of Michigan reports)</a:t>
             </a:r>
           </a:p>
         </c:rich>
@@ -3199,7 +4240,90 @@
               <c:strCache>
                 <c:ptCount val="1"/>
                 <c:pt idx="0">
-                  <c:v>Average sentiment score</c:v>
+                  <c:v>June 2022 (Biden)</c:v>
+                </c:pt>
+              </c:strCache>
+            </c:strRef>
+          </c:tx>
+          <c:spPr>
+            <a:solidFill>
+              <a:srgbClr val="9EC5F4"/>
+            </a:solidFill>
+            <a:effectLst/>
+          </c:spPr>
+          <c:invertIfNegative val="0"/>
+          <c:dLbls>
+            <c:numFmt formatCode="0" sourceLinked="0"/>
+            <c:txPr>
+              <a:bodyPr/>
+              <a:lstStyle/>
+              <a:p>
+                <a:pPr>
+                  <a:defRPr b="0" i="0" strike="noStrike" sz="1200" u="none">
+                    <a:solidFill>
+                      <a:srgbClr val="1B1F27"/>
+                    </a:solidFill>
+                    <a:latin typeface="+mn-lt"/>
+                  </a:defRPr>
+                </a:pPr>
+              </a:p>
+            </c:txPr>
+            <c:showLegendKey val="0"/>
+            <c:showVal val="1"/>
+            <c:showCatName val="0"/>
+            <c:showSerName val="0"/>
+            <c:showPercent val="0"/>
+            <c:showBubbleSize val="0"/>
+            <c:showLeaderLines val="0"/>
+          </c:dLbls>
+          <c:cat>
+            <c:multiLvlStrRef>
+              <c:f>Sheet1!$A$2:$A$4</c:f>
+              <c:multiLvlStrCache>
+                <c:ptCount val="3"/>
+                <c:lvl>
+                  <c:pt idx="0">
+                    <c:v>Democrats</c:v>
+                  </c:pt>
+                  <c:pt idx="1">
+                    <c:v>Independents</c:v>
+                  </c:pt>
+                  <c:pt idx="2">
+                    <c:v>Republicans</c:v>
+                  </c:pt>
+                </c:lvl>
+              </c:multiLvlStrCache>
+            </c:multiLvlStrRef>
+          </c:cat>
+          <c:val>
+            <c:numRef>
+              <c:f>Sheet1!$B$2:$B$4</c:f>
+              <c:numCache>
+                <c:formatCode>General</c:formatCode>
+                <c:ptCount val="3"/>
+                <c:pt idx="0">
+                  <c:v>66.4</c:v>
+                </c:pt>
+                <c:pt idx="1">
+                  <c:v>48.5</c:v>
+                </c:pt>
+                <c:pt idx="2">
+                  <c:v>33</c:v>
+                </c:pt>
+              </c:numCache>
+            </c:numRef>
+          </c:val>
+        </c:ser>
+        <c:ser>
+          <c:idx val="1"/>
+          <c:order val="1"/>
+          <c:tx>
+            <c:strRef>
+              <c:f>Sheet1!$C$1</c:f>
+              <c:strCache>
+                <c:ptCount val="1"/>
+                <c:pt idx="0">
+                  <c:v>May 2026 (Trump)</c:v>
                 </c:pt>
               </c:strCache>
             </c:strRef>
@@ -3242,13 +4366,13 @@
                 <c:ptCount val="3"/>
                 <c:lvl>
                   <c:pt idx="0">
-                    <c:v>Trump-1</c:v>
+                    <c:v>Democrats</c:v>
                   </c:pt>
                   <c:pt idx="1">
-                    <c:v>Biden</c:v>
+                    <c:v>Independents</c:v>
                   </c:pt>
                   <c:pt idx="2">
-                    <c:v>Trump-2</c:v>
+                    <c:v>Republicans</c:v>
                   </c:pt>
                 </c:lvl>
               </c:multiLvlStrCache>
@@ -3256,18 +4380,18 @@
           </c:cat>
           <c:val>
             <c:numRef>
-              <c:f>Sheet1!$B$2:$B$4</c:f>
+              <c:f>Sheet1!$C$2:$C$4</c:f>
               <c:numCache>
                 <c:formatCode>General</c:formatCode>
                 <c:ptCount val="3"/>
                 <c:pt idx="0">
-                  <c:v>93.1</c:v>
+                  <c:v>32.8</c:v>
                 </c:pt>
                 <c:pt idx="1">
-                  <c:v>68.4</c:v>
+                  <c:v>40.6</c:v>
                 </c:pt>
                 <c:pt idx="2">
-                  <c:v>53.9</c:v>
+                  <c:v>84.6</c:v>
                 </c:pt>
               </c:numCache>
             </c:numRef>
@@ -3297,7 +4421,7 @@
           <c:showBubbleSize val="0"/>
           <c:showLeaderLines val="0"/>
         </c:dLbls>
-        <c:gapWidth val="55"/>
+        <c:gapWidth val="50"/>
         <c:overlap val="0"/>
         <c:axId val="2094734554"/>
         <c:axId val="2094734552"/>
@@ -3391,314 +4515,26 @@
         <a:effectLst/>
       </c:spPr>
     </c:plotArea>
-    <c:plotVisOnly val="1"/>
-    <c:dispBlanksAs val="span"/>
-  </c:chart>
-  <c:spPr>
-    <a:noFill/>
-    <a:ln>
-      <a:noFill/>
-    </a:ln>
-    <a:effectLst/>
-  </c:spPr>
-  <c:externalData r:id="rId1">
-    <c:autoUpdate val="0"/>
-  </c:externalData>
-</c:chartSpace>
-</file>
-
-<file path=ppt/charts/chart9.xml><?xml version="1.0" encoding="utf-8"?>
-<c:chartSpace xmlns:c="http://schemas.openxmlformats.org/drawingml/2006/chart" xmlns:a="http://schemas.openxmlformats.org/drawingml/2006/main" xmlns:r="http://schemas.openxmlformats.org/officeDocument/2006/relationships">
-  <c:date1904 val="0"/>
-  <c:roundedCorners val="1"/>
-  <c:chart>
-    <c:title>
-      <c:tx>
-        <c:rich>
-          <a:bodyPr/>
-          <a:lstStyle/>
-          <a:p>
-            <a:pPr>
-              <a:defRPr sz="1200" b="0" i="0" u="none" strike="noStrike">
-                <a:solidFill>
-                  <a:srgbClr val="3A4150"/>
-                </a:solidFill>
-                <a:latin typeface="+mn-lt"/>
-              </a:defRPr>
-            </a:pPr>
-            <a:r>
-              <a:rPr sz="1200" b="0" i="0" u="none" strike="noStrike">
-                <a:solidFill>
-                  <a:srgbClr val="3A4150"/>
-                </a:solidFill>
-                <a:latin typeface="+mn-lt"/>
-              </a:rPr>
-              <a:t>Error when predicting consumer spending, 2022–26 (shorter bar = better forecast)</a:t>
-            </a:r>
-          </a:p>
-        </c:rich>
-      </c:tx>
-      <c:layout/>
+    <c:legend>
+      <c:legendPos val="b"/>
       <c:overlay val="0"/>
-    </c:title>
-    <c:autoTitleDeleted val="0"/>
-    <c:plotArea>
-      <c:layout/>
-      <c:barChart>
-        <c:barDir val="bar"/>
-        <c:grouping val="clustered"/>
-        <c:varyColors val="0"/>
-        <c:ser>
-          <c:idx val="0"/>
-          <c:order val="0"/>
-          <c:tx>
-            <c:strRef>
-              <c:f>Sheet1!$B$1</c:f>
-              <c:strCache>
-                <c:ptCount val="1"/>
-                <c:pt idx="0">
-                  <c:v>Forecast error</c:v>
-                </c:pt>
-              </c:strCache>
-            </c:strRef>
-          </c:tx>
-          <c:spPr>
-            <a:solidFill>
-              <a:srgbClr val="7A8392"/>
-            </a:solidFill>
-            <a:effectLst/>
-          </c:spPr>
-          <c:invertIfNegative val="0"/>
-          <c:dLbls>
-            <c:numFmt formatCode="0.00" sourceLinked="0"/>
-            <c:txPr>
-              <a:bodyPr/>
-              <a:lstStyle/>
-              <a:p>
-                <a:pPr>
-                  <a:defRPr b="0" i="0" strike="noStrike" sz="1200" u="none">
-                    <a:solidFill>
-                      <a:srgbClr val="1B1F27"/>
-                    </a:solidFill>
-                    <a:latin typeface="+mn-lt"/>
-                  </a:defRPr>
-                </a:pPr>
-              </a:p>
-            </c:txPr>
-            <c:showLegendKey val="0"/>
-            <c:showVal val="1"/>
-            <c:showCatName val="0"/>
-            <c:showSerName val="0"/>
-            <c:showPercent val="0"/>
-            <c:showBubbleSize val="0"/>
-            <c:showLeaderLines val="0"/>
-          </c:dLbls>
-          <c:dPt>
-            <c:idx val="0"/>
-            <c:invertIfNegative val="0"/>
-            <c:bubble3D val="0"/>
-            <c:spPr>
+      <c:txPr>
+        <a:bodyPr/>
+        <a:lstStyle/>
+        <a:p>
+          <a:pPr>
+            <a:defRPr sz="1100">
               <a:solidFill>
-                <a:srgbClr val="7A8392"/>
+                <a:srgbClr val="3A4150"/>
               </a:solidFill>
-              <a:effectLst/>
-            </c:spPr>
-          </c:dPt>
-          <c:dPt>
-            <c:idx val="1"/>
-            <c:invertIfNegative val="0"/>
-            <c:bubble3D val="0"/>
-            <c:spPr>
-              <a:solidFill>
-                <a:srgbClr val="C8433F"/>
-              </a:solidFill>
-              <a:effectLst/>
-            </c:spPr>
-          </c:dPt>
-          <c:dPt>
-            <c:idx val="2"/>
-            <c:invertIfNegative val="0"/>
-            <c:bubble3D val="0"/>
-            <c:spPr>
-              <a:solidFill>
-                <a:srgbClr val="1F8A5B"/>
-              </a:solidFill>
-              <a:effectLst/>
-            </c:spPr>
-          </c:dPt>
-          <c:dPt>
-            <c:idx val="3"/>
-            <c:invertIfNegative val="0"/>
-            <c:bubble3D val="0"/>
-            <c:spPr>
-              <a:solidFill>
-                <a:srgbClr val="C8433F"/>
-              </a:solidFill>
-              <a:effectLst/>
-            </c:spPr>
-          </c:dPt>
-          <c:cat>
-            <c:multiLvlStrRef>
-              <c:f>Sheet1!$A$2:$A$5</c:f>
-              <c:multiLvlStrCache>
-                <c:ptCount val="4"/>
-                <c:lvl>
-                  <c:pt idx="0">
-                    <c:v>Economy data only</c:v>
-                  </c:pt>
-                  <c:pt idx="1">
-                    <c:v>+ how people say they feel</c:v>
-                  </c:pt>
-                  <c:pt idx="2">
-                    <c:v>+ only the 'economy part' of feelings</c:v>
-                  </c:pt>
-                  <c:pt idx="3">
-                    <c:v>+ only the 'gloom gap'</c:v>
-                  </c:pt>
-                </c:lvl>
-              </c:multiLvlStrCache>
-            </c:multiLvlStrRef>
-          </c:cat>
-          <c:val>
-            <c:numRef>
-              <c:f>Sheet1!$B$2:$B$5</c:f>
-              <c:numCache>
-                <c:formatCode>General</c:formatCode>
-                <c:ptCount val="4"/>
-                <c:pt idx="0">
-                  <c:v>1.45</c:v>
-                </c:pt>
-                <c:pt idx="1">
-                  <c:v>1.74</c:v>
-                </c:pt>
-                <c:pt idx="2">
-                  <c:v>1.21</c:v>
-                </c:pt>
-                <c:pt idx="3">
-                  <c:v>1.92</c:v>
-                </c:pt>
-              </c:numCache>
-            </c:numRef>
-          </c:val>
-        </c:ser>
-        <c:dLbls>
-          <c:numFmt formatCode="0.00" sourceLinked="0"/>
-          <c:txPr>
-            <a:bodyPr/>
-            <a:lstStyle/>
-            <a:p>
-              <a:pPr>
-                <a:defRPr b="0" i="0" strike="noStrike" sz="1200" u="none">
-                  <a:solidFill>
-                    <a:srgbClr val="1B1F27"/>
-                  </a:solidFill>
-                  <a:latin typeface="+mn-lt"/>
-                </a:defRPr>
-              </a:pPr>
-            </a:p>
-          </c:txPr>
-          <c:showLegendKey val="0"/>
-          <c:showVal val="1"/>
-          <c:showCatName val="0"/>
-          <c:showSerName val="0"/>
-          <c:showPercent val="0"/>
-          <c:showBubbleSize val="0"/>
-          <c:showLeaderLines val="0"/>
-        </c:dLbls>
-        <c:gapWidth val="45"/>
-        <c:overlap val="0"/>
-        <c:axId val="2094734554"/>
-        <c:axId val="2094734552"/>
-        <c:axId val="2094734556"/>
-      </c:barChart>
-      <c:catAx>
-        <c:axId val="2094734554"/>
-        <c:scaling>
-          <c:orientation val="maxMin"/>
-        </c:scaling>
-        <c:delete val="0"/>
-        <c:axPos val="l"/>
-        <c:numFmt formatCode="General" sourceLinked="1"/>
-        <c:majorTickMark val="out"/>
-        <c:minorTickMark val="none"/>
-        <c:tickLblPos val="nextTo"/>
-        <c:spPr>
-          <a:ln w="12700" cap="flat">
-            <a:solidFill>
-              <a:srgbClr val="888888"/>
-            </a:solidFill>
-            <a:prstDash val="solid"/>
-            <a:round/>
-          </a:ln>
-        </c:spPr>
-        <c:txPr>
-          <a:bodyPr/>
-          <a:lstStyle/>
-          <a:p>
-            <a:pPr>
-              <a:defRPr sz="1200" b="0" i="0" u="none" strike="noStrike">
-                <a:solidFill>
-                  <a:srgbClr val="3A4150"/>
-                </a:solidFill>
-                <a:latin typeface="+mn-lt"/>
-              </a:defRPr>
-            </a:pPr>
-            <a:endParaRPr lang="en-US"/>
-          </a:p>
-        </c:txPr>
-        <c:crossAx val="2094734552"/>
-        <c:crosses val="autoZero"/>
-        <c:auto val="1"/>
-        <c:lblAlgn val="ctr"/>
-        <c:noMultiLvlLbl val="1"/>
-      </c:catAx>
-      <c:valAx>
-        <c:axId val="2094734552"/>
-        <c:scaling>
-          <c:orientation val="minMax"/>
-        </c:scaling>
-        <c:delete val="1"/>
-        <c:axPos val="b"/>
-        <c:numFmt formatCode="General" sourceLinked="0"/>
-        <c:majorTickMark val="out"/>
-        <c:minorTickMark val="none"/>
-        <c:tickLblPos val="low"/>
-        <c:spPr>
-          <a:ln w="12700" cap="flat">
-            <a:solidFill>
-              <a:srgbClr val="888888"/>
-            </a:solidFill>
-            <a:prstDash val="solid"/>
-            <a:round/>
-          </a:ln>
-        </c:spPr>
-        <c:txPr>
-          <a:bodyPr/>
-          <a:lstStyle/>
-          <a:p>
-            <a:pPr>
-              <a:defRPr sz="1200" b="0" i="0" u="none" strike="noStrike">
-                <a:solidFill>
-                  <a:srgbClr val="000000"/>
-                </a:solidFill>
-                <a:latin typeface="Arial"/>
-              </a:defRPr>
-            </a:pPr>
-            <a:endParaRPr lang="en-US"/>
-          </a:p>
-        </c:txPr>
-        <c:crossAx val="2094734554"/>
-        <c:crosses val="autoZero"/>
-        <c:crossBetween val="between"/>
-      </c:valAx>
-      <c:spPr>
-        <a:noFill/>
-        <a:ln>
-          <a:noFill/>
-        </a:ln>
-        <a:effectLst/>
-      </c:spPr>
-    </c:plotArea>
+              <a:latin typeface="+mn-lt"/>
+              <a:cs typeface="+mn-lt"/>
+            </a:defRPr>
+          </a:pPr>
+          <a:endParaRPr lang="en-US"/>
+        </a:p>
+      </c:txPr>
+    </c:legend>
     <c:plotVisOnly val="1"/>
     <c:dispBlanksAs val="span"/>
   </c:chart>
@@ -4198,7 +5034,7 @@
           <a:p>
             <a:r>
               <a:rPr lang="en-US" dirty="0"/>
-              <a:t>(45 s) To test the media explanation we collected about 247,000 headlines and posts, wrote rules first, and had an AI read every one. A human checked 300 of them; the AI matched the human 70% of the time, better than simpler tools. Then we ran fair tests — negative news isn't biased if the news really is bad. Findings: yes, there's political slant. But coverage isn't overly negative, and adding news data actually made our sentiment forecasts worse, while adding everyday-cost data made them better.</a:t>
+              <a:t>(45 s) Why did young adults fall furthest? Economists have shown that people learn about inflation from what they've lived through. For a 26-year-old, two years of high inflation is a big chunk of their life; for a 66-year-old who remembers the 1970s, it's a blip. We measured this: the recent shock raised young adults' inflation memory about ten times more than older adults'. Young adults fell about 10 points more than people over 55 — and this effect explains about 8 of those 10 points, comparing groups in the same month so the news is identical for everyone.</a:t>
             </a:r>
             <a:endParaRPr lang="en-US" dirty="0"/>
           </a:p>
@@ -4286,7 +5122,7 @@
           <a:p>
             <a:r>
               <a:rPr lang="en-US" dirty="0"/>
-              <a:t>(45 s) This is our own test. When the presidency changed in January 2025, sentiment fell another 14 and a half points. If the media were causing that, the news should have turned much more negative. It didn't: overall news tone barely moved — even in the worst case, that explains about one point of the fourteen-and-a-half. Right-leaning outlets did turn more positive, as they always do when their side is in power, but the total news mood stayed flat. So the news may amplify the mood, but it didn't cause the collapse.</a:t>
+              <a:t>(35 s) Politics matters, as the brief warned. Michigan's own reports show that people whose party is in power feel much better — Democrats were at 66 in 2022 and are at 33 now; Republicans went from 33 to 85. That flips every election. But independents — the middle — track the national number, and they're at 41, very gloomy. And fewer people now identify as Republican in the survey, which lowers the headline by about 2 points. So politics changes who feels bad, but it doesn't make the gloom fake.</a:t>
             </a:r>
             <a:endParaRPr lang="en-US" dirty="0"/>
           </a:p>
@@ -4374,7 +5210,7 @@
           <a:p>
             <a:r>
               <a:rPr lang="en-US" dirty="0"/>
-              <a:t>(40 s) Why this matters for finance. Since 2022 people said they felt terrible but kept spending — about 2.5% more each year. When we tried to predict spending, using the survey as-is made forecasts about 20% worse. Using only the part of sentiment that matches the economy made them about 17% better. So investors and risk managers should separate real economic worry from the gloom gap before betting on a recession. Bottom line: high prices, the survey change and lived experience — not media bias — explain the gloom.</a:t>
+              <a:t>(45 s) To test the media explanation we collected about 247,000 headlines and posts, wrote rules first, and had an AI read every one. A human checked 300 of them; the AI matched the human 70% of the time, better than simpler tools. Then we ran fair tests — negative news isn't biased if the news really is bad. Findings: yes, there's political slant. But coverage isn't overly negative, and adding news data actually made our sentiment forecasts worse, while adding everyday-cost data made them better.</a:t>
             </a:r>
             <a:endParaRPr lang="en-US" dirty="0"/>
           </a:p>
@@ -4462,7 +5298,7 @@
           <a:p>
             <a:r>
               <a:rPr lang="en-US" dirty="0"/>
-              <a:t>(10 s) Thank you. The key takeaway: Americans aren't gloomy because of biased news — prices stayed high, the survey changed, and young people lived through their first big inflation. Happy to take questions.</a:t>
+              <a:t>(45 s) This is our own test. When the presidency changed in January 2025, sentiment fell another 14 and a half points. If the media were causing that, the news should have turned much more negative. It didn't: overall news tone barely moved — even in the worst case, that explains about one point of the fourteen-and-a-half. Right-leaning outlets did turn more positive, as they always do when their side is in power, but the total news mood stayed flat. So the news may amplify the mood, but it didn't cause the collapse.</a:t>
             </a:r>
             <a:endParaRPr lang="en-US" dirty="0"/>
           </a:p>
@@ -4486,6 +5322,446 @@
             <a:fld id="{F7021451-1387-4CA6-816F-3879F97B5CBC}" type="slidenum">
               <a:rPr lang="en-US"/>
               <a:t>13</a:t>
+            </a:fld>
+            <a:endParaRPr lang="en-US"/>
+          </a:p>
+        </p:txBody>
+      </p:sp>
+    </p:spTree>
+    <p:extLst>
+      <p:ext uri="{BB962C8B-B14F-4D97-AF65-F5344CB8AC3E}">
+        <p14:creationId xmlns:p14="http://schemas.microsoft.com/office/powerpoint/2010/main" val="1024086991"/>
+      </p:ext>
+    </p:extLst>
+  </p:cSld>
+  <p:clrMapOvr>
+    <a:masterClrMapping/>
+  </p:clrMapOvr>
+</p:notes>
+</file>
+
+<file path=ppt/notesSlides/notesSlide14.xml><?xml version="1.0" encoding="utf-8"?>
+<p:notes xmlns:a="http://schemas.openxmlformats.org/drawingml/2006/main" xmlns:r="http://schemas.openxmlformats.org/officeDocument/2006/relationships" xmlns:p="http://schemas.openxmlformats.org/presentationml/2006/main">
+  <p:cSld>
+    <p:spTree>
+      <p:nvGrpSpPr>
+        <p:cNvPr id="1" name=""/>
+        <p:cNvGrpSpPr/>
+        <p:nvPr/>
+      </p:nvGrpSpPr>
+      <p:grpSpPr>
+        <a:xfrm>
+          <a:off x="0" y="0"/>
+          <a:ext cx="0" cy="0"/>
+          <a:chOff x="0" y="0"/>
+          <a:chExt cx="0" cy="0"/>
+        </a:xfrm>
+      </p:grpSpPr>
+      <p:sp>
+        <p:nvSpPr>
+          <p:cNvPr id="2" name="Slide Image Placeholder 1"/>
+          <p:cNvSpPr>
+            <a:spLocks noGrp="1" noRot="1" noChangeAspect="1"/>
+          </p:cNvSpPr>
+          <p:nvPr>
+            <p:ph type="sldImg"/>
+          </p:nvPr>
+        </p:nvSpPr>
+        <p:spPr/>
+      </p:sp>
+      <p:sp>
+        <p:nvSpPr>
+          <p:cNvPr id="3" name="Notes Placeholder 2"/>
+          <p:cNvSpPr>
+            <a:spLocks noGrp="1"/>
+          </p:cNvSpPr>
+          <p:nvPr>
+            <p:ph type="body" idx="1"/>
+          </p:nvPr>
+        </p:nvSpPr>
+        <p:spPr/>
+        <p:txBody>
+          <a:bodyPr/>
+          <a:lstStyle/>
+          <a:p>
+            <a:r>
+              <a:rPr lang="en-US" dirty="0"/>
+              <a:t>(35 s) Putting it all together. About 20 of the 41 points are real costs the headline numbers miss — prices, borrowing costs and policy uncertainty. About 9 points are how it's measured — the online survey and who answers. Then interpretation shapes who is hit hardest: young adults living through their first big inflation, and partisanship. The media explains about one point. Roughly 12 points remain unexplained, which we report rather than hide.</a:t>
+            </a:r>
+            <a:endParaRPr lang="en-US" dirty="0"/>
+          </a:p>
+        </p:txBody>
+      </p:sp>
+      <p:sp>
+        <p:nvSpPr>
+          <p:cNvPr id="4" name="Slide Number Placeholder 3"/>
+          <p:cNvSpPr>
+            <a:spLocks noGrp="1"/>
+          </p:cNvSpPr>
+          <p:nvPr>
+            <p:ph type="sldNum" sz="quarter" idx="10"/>
+          </p:nvPr>
+        </p:nvSpPr>
+        <p:spPr/>
+        <p:txBody>
+          <a:bodyPr/>
+          <a:lstStyle/>
+          <a:p>
+            <a:fld id="{F7021451-1387-4CA6-816F-3879F97B5CBC}" type="slidenum">
+              <a:rPr lang="en-US"/>
+              <a:t>14</a:t>
+            </a:fld>
+            <a:endParaRPr lang="en-US"/>
+          </a:p>
+        </p:txBody>
+      </p:sp>
+    </p:spTree>
+    <p:extLst>
+      <p:ext uri="{BB962C8B-B14F-4D97-AF65-F5344CB8AC3E}">
+        <p14:creationId xmlns:p14="http://schemas.microsoft.com/office/powerpoint/2010/main" val="1024086991"/>
+      </p:ext>
+    </p:extLst>
+  </p:cSld>
+  <p:clrMapOvr>
+    <a:masterClrMapping/>
+  </p:clrMapOvr>
+</p:notes>
+</file>
+
+<file path=ppt/notesSlides/notesSlide15.xml><?xml version="1.0" encoding="utf-8"?>
+<p:notes xmlns:a="http://schemas.openxmlformats.org/drawingml/2006/main" xmlns:r="http://schemas.openxmlformats.org/officeDocument/2006/relationships" xmlns:p="http://schemas.openxmlformats.org/presentationml/2006/main">
+  <p:cSld>
+    <p:spTree>
+      <p:nvGrpSpPr>
+        <p:cNvPr id="1" name=""/>
+        <p:cNvGrpSpPr/>
+        <p:nvPr/>
+      </p:nvGrpSpPr>
+      <p:grpSpPr>
+        <a:xfrm>
+          <a:off x="0" y="0"/>
+          <a:ext cx="0" cy="0"/>
+          <a:chOff x="0" y="0"/>
+          <a:chExt cx="0" cy="0"/>
+        </a:xfrm>
+      </p:grpSpPr>
+      <p:sp>
+        <p:nvSpPr>
+          <p:cNvPr id="2" name="Slide Image Placeholder 1"/>
+          <p:cNvSpPr>
+            <a:spLocks noGrp="1" noRot="1" noChangeAspect="1"/>
+          </p:cNvSpPr>
+          <p:nvPr>
+            <p:ph type="sldImg"/>
+          </p:nvPr>
+        </p:nvSpPr>
+        <p:spPr/>
+      </p:sp>
+      <p:sp>
+        <p:nvSpPr>
+          <p:cNvPr id="3" name="Notes Placeholder 2"/>
+          <p:cNvSpPr>
+            <a:spLocks noGrp="1"/>
+          </p:cNvSpPr>
+          <p:nvPr>
+            <p:ph type="body" idx="1"/>
+          </p:nvPr>
+        </p:nvSpPr>
+        <p:spPr/>
+        <p:txBody>
+          <a:bodyPr/>
+          <a:lstStyle/>
+          <a:p>
+            <a:r>
+              <a:rPr lang="en-US" dirty="0"/>
+              <a:t>(40 s) Why this matters for finance. Since 2022 people said they felt terrible but kept spending — about 2.5% more each year. When we tried to predict spending, using the survey as-is made forecasts about 20% worse. Using only the part of sentiment that matches the economy made them about 17% better. So investors and risk managers should separate real economic worry from the gloom gap before betting on a recession. Bottom line: high prices, the survey change and lived experience — not media bias — explain the gloom.</a:t>
+            </a:r>
+            <a:endParaRPr lang="en-US" dirty="0"/>
+          </a:p>
+        </p:txBody>
+      </p:sp>
+      <p:sp>
+        <p:nvSpPr>
+          <p:cNvPr id="4" name="Slide Number Placeholder 3"/>
+          <p:cNvSpPr>
+            <a:spLocks noGrp="1"/>
+          </p:cNvSpPr>
+          <p:nvPr>
+            <p:ph type="sldNum" sz="quarter" idx="10"/>
+          </p:nvPr>
+        </p:nvSpPr>
+        <p:spPr/>
+        <p:txBody>
+          <a:bodyPr/>
+          <a:lstStyle/>
+          <a:p>
+            <a:fld id="{F7021451-1387-4CA6-816F-3879F97B5CBC}" type="slidenum">
+              <a:rPr lang="en-US"/>
+              <a:t>15</a:t>
+            </a:fld>
+            <a:endParaRPr lang="en-US"/>
+          </a:p>
+        </p:txBody>
+      </p:sp>
+    </p:spTree>
+    <p:extLst>
+      <p:ext uri="{BB962C8B-B14F-4D97-AF65-F5344CB8AC3E}">
+        <p14:creationId xmlns:p14="http://schemas.microsoft.com/office/powerpoint/2010/main" val="1024086991"/>
+      </p:ext>
+    </p:extLst>
+  </p:cSld>
+  <p:clrMapOvr>
+    <a:masterClrMapping/>
+  </p:clrMapOvr>
+</p:notes>
+</file>
+
+<file path=ppt/notesSlides/notesSlide16.xml><?xml version="1.0" encoding="utf-8"?>
+<p:notes xmlns:a="http://schemas.openxmlformats.org/drawingml/2006/main" xmlns:r="http://schemas.openxmlformats.org/officeDocument/2006/relationships" xmlns:p="http://schemas.openxmlformats.org/presentationml/2006/main">
+  <p:cSld>
+    <p:spTree>
+      <p:nvGrpSpPr>
+        <p:cNvPr id="1" name=""/>
+        <p:cNvGrpSpPr/>
+        <p:nvPr/>
+      </p:nvGrpSpPr>
+      <p:grpSpPr>
+        <a:xfrm>
+          <a:off x="0" y="0"/>
+          <a:ext cx="0" cy="0"/>
+          <a:chOff x="0" y="0"/>
+          <a:chExt cx="0" cy="0"/>
+        </a:xfrm>
+      </p:grpSpPr>
+      <p:sp>
+        <p:nvSpPr>
+          <p:cNvPr id="2" name="Slide Image Placeholder 1"/>
+          <p:cNvSpPr>
+            <a:spLocks noGrp="1" noRot="1" noChangeAspect="1"/>
+          </p:cNvSpPr>
+          <p:nvPr>
+            <p:ph type="sldImg"/>
+          </p:nvPr>
+        </p:nvSpPr>
+        <p:spPr/>
+      </p:sp>
+      <p:sp>
+        <p:nvSpPr>
+          <p:cNvPr id="3" name="Notes Placeholder 2"/>
+          <p:cNvSpPr>
+            <a:spLocks noGrp="1"/>
+          </p:cNvSpPr>
+          <p:nvPr>
+            <p:ph type="body" idx="1"/>
+          </p:nvPr>
+        </p:nvSpPr>
+        <p:spPr/>
+        <p:txBody>
+          <a:bodyPr/>
+          <a:lstStyle/>
+          <a:p>
+            <a:r>
+              <a:rPr lang="en-US" dirty="0"/>
+              <a:t>(10 s) Thank you. The key takeaway: Americans aren't gloomy because of biased news — prices stayed high, the survey changed, and young people lived through their first big inflation. Happy to take questions.</a:t>
+            </a:r>
+            <a:endParaRPr lang="en-US" dirty="0"/>
+          </a:p>
+        </p:txBody>
+      </p:sp>
+      <p:sp>
+        <p:nvSpPr>
+          <p:cNvPr id="4" name="Slide Number Placeholder 3"/>
+          <p:cNvSpPr>
+            <a:spLocks noGrp="1"/>
+          </p:cNvSpPr>
+          <p:nvPr>
+            <p:ph type="sldNum" sz="quarter" idx="10"/>
+          </p:nvPr>
+        </p:nvSpPr>
+        <p:spPr/>
+        <p:txBody>
+          <a:bodyPr/>
+          <a:lstStyle/>
+          <a:p>
+            <a:fld id="{F7021451-1387-4CA6-816F-3879F97B5CBC}" type="slidenum">
+              <a:rPr lang="en-US"/>
+              <a:t>16</a:t>
+            </a:fld>
+            <a:endParaRPr lang="en-US"/>
+          </a:p>
+        </p:txBody>
+      </p:sp>
+    </p:spTree>
+    <p:extLst>
+      <p:ext uri="{BB962C8B-B14F-4D97-AF65-F5344CB8AC3E}">
+        <p14:creationId xmlns:p14="http://schemas.microsoft.com/office/powerpoint/2010/main" val="1024086991"/>
+      </p:ext>
+    </p:extLst>
+  </p:cSld>
+  <p:clrMapOvr>
+    <a:masterClrMapping/>
+  </p:clrMapOvr>
+</p:notes>
+</file>
+
+<file path=ppt/notesSlides/notesSlide17.xml><?xml version="1.0" encoding="utf-8"?>
+<p:notes xmlns:a="http://schemas.openxmlformats.org/drawingml/2006/main" xmlns:r="http://schemas.openxmlformats.org/officeDocument/2006/relationships" xmlns:p="http://schemas.openxmlformats.org/presentationml/2006/main">
+  <p:cSld>
+    <p:spTree>
+      <p:nvGrpSpPr>
+        <p:cNvPr id="1" name=""/>
+        <p:cNvGrpSpPr/>
+        <p:nvPr/>
+      </p:nvGrpSpPr>
+      <p:grpSpPr>
+        <a:xfrm>
+          <a:off x="0" y="0"/>
+          <a:ext cx="0" cy="0"/>
+          <a:chOff x="0" y="0"/>
+          <a:chExt cx="0" cy="0"/>
+        </a:xfrm>
+      </p:grpSpPr>
+      <p:sp>
+        <p:nvSpPr>
+          <p:cNvPr id="2" name="Slide Image Placeholder 1"/>
+          <p:cNvSpPr>
+            <a:spLocks noGrp="1" noRot="1" noChangeAspect="1"/>
+          </p:cNvSpPr>
+          <p:nvPr>
+            <p:ph type="sldImg"/>
+          </p:nvPr>
+        </p:nvSpPr>
+        <p:spPr/>
+      </p:sp>
+      <p:sp>
+        <p:nvSpPr>
+          <p:cNvPr id="3" name="Notes Placeholder 2"/>
+          <p:cNvSpPr>
+            <a:spLocks noGrp="1"/>
+          </p:cNvSpPr>
+          <p:nvPr>
+            <p:ph type="body" idx="1"/>
+          </p:nvPr>
+        </p:nvSpPr>
+        <p:spPr/>
+        <p:txBody>
+          <a:bodyPr/>
+          <a:lstStyle/>
+          <a:p>
+            <a:r>
+              <a:rPr lang="en-US" dirty="0"/>
+              <a:t>Backup for questions: one-line answers to the six research questions the brief requires.</a:t>
+            </a:r>
+            <a:endParaRPr lang="en-US" dirty="0"/>
+          </a:p>
+        </p:txBody>
+      </p:sp>
+      <p:sp>
+        <p:nvSpPr>
+          <p:cNvPr id="4" name="Slide Number Placeholder 3"/>
+          <p:cNvSpPr>
+            <a:spLocks noGrp="1"/>
+          </p:cNvSpPr>
+          <p:nvPr>
+            <p:ph type="sldNum" sz="quarter" idx="10"/>
+          </p:nvPr>
+        </p:nvSpPr>
+        <p:spPr/>
+        <p:txBody>
+          <a:bodyPr/>
+          <a:lstStyle/>
+          <a:p>
+            <a:fld id="{F7021451-1387-4CA6-816F-3879F97B5CBC}" type="slidenum">
+              <a:rPr lang="en-US"/>
+              <a:t>17</a:t>
+            </a:fld>
+            <a:endParaRPr lang="en-US"/>
+          </a:p>
+        </p:txBody>
+      </p:sp>
+    </p:spTree>
+    <p:extLst>
+      <p:ext uri="{BB962C8B-B14F-4D97-AF65-F5344CB8AC3E}">
+        <p14:creationId xmlns:p14="http://schemas.microsoft.com/office/powerpoint/2010/main" val="1024086991"/>
+      </p:ext>
+    </p:extLst>
+  </p:cSld>
+  <p:clrMapOvr>
+    <a:masterClrMapping/>
+  </p:clrMapOvr>
+</p:notes>
+</file>
+
+<file path=ppt/notesSlides/notesSlide18.xml><?xml version="1.0" encoding="utf-8"?>
+<p:notes xmlns:a="http://schemas.openxmlformats.org/drawingml/2006/main" xmlns:r="http://schemas.openxmlformats.org/officeDocument/2006/relationships" xmlns:p="http://schemas.openxmlformats.org/presentationml/2006/main">
+  <p:cSld>
+    <p:spTree>
+      <p:nvGrpSpPr>
+        <p:cNvPr id="1" name=""/>
+        <p:cNvGrpSpPr/>
+        <p:nvPr/>
+      </p:nvGrpSpPr>
+      <p:grpSpPr>
+        <a:xfrm>
+          <a:off x="0" y="0"/>
+          <a:ext cx="0" cy="0"/>
+          <a:chOff x="0" y="0"/>
+          <a:chExt cx="0" cy="0"/>
+        </a:xfrm>
+      </p:grpSpPr>
+      <p:sp>
+        <p:nvSpPr>
+          <p:cNvPr id="2" name="Slide Image Placeholder 1"/>
+          <p:cNvSpPr>
+            <a:spLocks noGrp="1" noRot="1" noChangeAspect="1"/>
+          </p:cNvSpPr>
+          <p:nvPr>
+            <p:ph type="sldImg"/>
+          </p:nvPr>
+        </p:nvSpPr>
+        <p:spPr/>
+      </p:sp>
+      <p:sp>
+        <p:nvSpPr>
+          <p:cNvPr id="3" name="Notes Placeholder 2"/>
+          <p:cNvSpPr>
+            <a:spLocks noGrp="1"/>
+          </p:cNvSpPr>
+          <p:nvPr>
+            <p:ph type="body" idx="1"/>
+          </p:nvPr>
+        </p:nvSpPr>
+        <p:spPr/>
+        <p:txBody>
+          <a:bodyPr/>
+          <a:lstStyle/>
+          <a:p>
+            <a:r>
+              <a:rPr lang="en-US" dirty="0"/>
+              <a:t>Backup for questions: our causal-design proposal (the brief's third option) and the honest limits of the study.</a:t>
+            </a:r>
+            <a:endParaRPr lang="en-US" dirty="0"/>
+          </a:p>
+        </p:txBody>
+      </p:sp>
+      <p:sp>
+        <p:nvSpPr>
+          <p:cNvPr id="4" name="Slide Number Placeholder 3"/>
+          <p:cNvSpPr>
+            <a:spLocks noGrp="1"/>
+          </p:cNvSpPr>
+          <p:nvPr>
+            <p:ph type="sldNum" sz="quarter" idx="10"/>
+          </p:nvPr>
+        </p:nvSpPr>
+        <p:spPr/>
+        <p:txBody>
+          <a:bodyPr/>
+          <a:lstStyle/>
+          <a:p>
+            <a:fld id="{F7021451-1387-4CA6-816F-3879F97B5CBC}" type="slidenum">
+              <a:rPr lang="en-US"/>
+              <a:t>18</a:t>
             </a:fld>
             <a:endParaRPr lang="en-US"/>
           </a:p>
@@ -4550,7 +5826,7 @@
           <a:p>
             <a:r>
               <a:rPr lang="en-US" dirty="0"/>
-              <a:t>(45 s) How to read this: the survey score is 100 when people feel like they did in 1966; in the 50s people are very gloomy. The blue line is how people 'should' feel based on unemployment, inflation and growth — using only data available at each moment. The black line is how they actually feel. Today they should be around 83; they're at 46. That gap is twice as big as in the 2008 financial crisis, and May 2026 was the lowest reading ever recorded. That's the puzzle.</a:t>
+              <a:t>(40 s) Start with the economy. Unemployment is 4.2% — low; the long-run average is about 6. The economy is growing at a normal 2.2% pace. Inflation is about 3.4% — above the 2% goal but far below the 7% of 2022. Put those into a model trained on history and people 'should' feel around 83 on this scale, where 100 is 1966 and the 50s are very gloomy. They actually feel 46. That gap is twice the size of 2008, and May 2026 was the lowest reading ever. That's the mismatch we set out to explain.</a:t>
             </a:r>
             <a:endParaRPr lang="en-US" dirty="0"/>
           </a:p>
@@ -4726,7 +6002,7 @@
           <a:p>
             <a:r>
               <a:rPr lang="en-US" dirty="0"/>
-              <a:t>(30 s) Before analysing anything we checked the data and found four problems. The inflation column we were given left out food and gas — the things people notice most. It included a GDP number that hadn't been published yet. The 2025 shutdown left a month of jobs data missing. And the survey moved online, which makes answers gloomier by itself. We fixed all four.</a:t>
+              <a:t>(20 s) Before analysing anything we checked the data and found four problems. The inflation column we were given left out food and gas — the things people notice most. It included a GDP number that hadn't been published yet. The 2025 shutdown left a month of jobs data missing. And the survey moved online, which makes answers gloomier by itself. We fixed all four.</a:t>
             </a:r>
             <a:endParaRPr lang="en-US" dirty="0"/>
           </a:p>
@@ -4990,7 +6266,7 @@
           <a:p>
             <a:r>
               <a:rPr lang="en-US" dirty="0"/>
-              <a:t>(45 s) This is the key idea. Eggs were 2 dollars in 2021, 4 dollars in 2023. Today they rise slowly — 4 dollars 12 — so the government says inflation is low. But it measures how fast prices rise now, not whether they came back down; people remember 2 dollars. It also doesn't count loan costs — a 7% mortgage isn't 'inflation'. On the right: since 2021 prices rose 28%, rent and housing 32%, gas 68%, but paychecks only 26%. So people really are worse off.</a:t>
+              <a:t>(35 s) Michigan doesn't just ask how people feel — it asks why, in their own words. In 2019, 7% said they were worse off because of higher prices. Today it's 45% — more than at the 2022 inflation peak. 44% say it's a bad time to buy a home because of interest rates, up from 8%. And the gap is mostly about today's situation, not the future. So people are telling us directly: it's the cost of living.</a:t>
             </a:r>
             <a:endParaRPr lang="en-US" dirty="0"/>
           </a:p>
@@ -5078,7 +6354,7 @@
           <a:p>
             <a:r>
               <a:rPr lang="en-US" dirty="0"/>
-              <a:t>(40 s) Here we split the 41-point drop into pieces. The official numbers — jobs, inflation, growth — explain only about 5 points. Everyday costs — high prices, food, loans and job worries — explain about 15, the biggest piece. The survey moving online explains about 7. Fewer Republicans answering explains about 2. About 12 points are left unexplained — that's the most any media story could account for.</a:t>
+              <a:t>(45 s) This is the key idea. Eggs were 2 dollars in 2021, 4 dollars in 2023. Today they rise slowly — 4 dollars 12 — so the government says inflation is low. But it measures how fast prices rise now, not whether they came back down; people remember 2 dollars. It also doesn't count loan costs — a 7% mortgage isn't 'inflation'. On the right: since 2021 prices rose 28%, rent and housing 32%, gas 68%, but paychecks only 26%. So people really are worse off.</a:t>
             </a:r>
             <a:endParaRPr lang="en-US" dirty="0"/>
           </a:p>
@@ -5166,7 +6442,7 @@
           <a:p>
             <a:r>
               <a:rPr lang="en-US" dirty="0"/>
-              <a:t>(45 s) Why did young adults fall furthest? Economists have shown that people learn about inflation from what they've lived through. For a 26-year-old, two years of high inflation is a big chunk of their life; for a 66-year-old who remembers the 1970s, it's a blip. We measured this: the recent shock raised young adults' inflation memory about ten times more than older adults'. Young adults fell about 10 points more than people over 55 — and this effect explains about 8 of those 10 points, comparing groups in the same month so the news is identical for everyone.</a:t>
+              <a:t>(40 s) Now we rank the causes of the 41-point drop. Number one is the cost of living — prices about 11% above normal, plus food and gas — about 11 points. Number two is the survey moving online, about 7. Number three is uncertainty from tariffs and the shutdown, about 6. Jobs, income and growth explain only about 2 and a half, and the mix of who answers the survey politically about 2. Roughly 12 points we can't explain with any measure, and we report that honestly. One caution: the uncertainty index is built from newspapers, so it reflects real policy shocks as reported in the news.</a:t>
             </a:r>
             <a:endParaRPr lang="en-US" dirty="0"/>
           </a:p>
@@ -6012,26 +7288,42 @@
                 <a:ea typeface="Cambria" pitchFamily="34" charset="-122"/>
                 <a:cs typeface="Cambria" pitchFamily="34" charset="-120"/>
               </a:rPr>
-              <a:t>Is the media to blame? How we checked</a:t>
+              <a:t>Why young adults fell furthest: it was their first big inflation</a:t>
             </a:r>
             <a:endParaRPr lang="en-US" sz="3000" dirty="0"/>
           </a:p>
         </p:txBody>
       </p:sp>
-      <p:sp>
-        <p:nvSpPr>
-          <p:cNvPr id="3" name="Shape 1"/>
+      <p:graphicFrame>
+        <p:nvGraphicFramePr>
+          <p:cNvPr id="3" name="Chart 0" descr=""/>
+          <p:cNvGraphicFramePr/>
+          <p:nvPr/>
+        </p:nvGraphicFramePr>
+        <p:xfrm>
+          <a:off x="548640" y="1234440"/>
+          <a:ext cx="4937760" cy="4343400"/>
+        </p:xfrm>
+        <a:graphic xmlns:a="http://schemas.openxmlformats.org/drawingml/2006/main">
+          <a:graphicData uri="http://schemas.openxmlformats.org/drawingml/2006/chart">
+            <c:chart xmlns:c="http://schemas.openxmlformats.org/drawingml/2006/chart" r:id="rId1"/>
+          </a:graphicData>
+        </a:graphic>
+      </p:graphicFrame>
+      <p:sp>
+        <p:nvSpPr>
+          <p:cNvPr id="4" name="Shape 1"/>
           <p:cNvSpPr/>
           <p:nvPr/>
         </p:nvSpPr>
         <p:spPr>
           <a:xfrm>
-            <a:off x="548640" y="1280160"/>
-            <a:ext cx="2606040" cy="2423160"/>
+            <a:off x="5852160" y="1325880"/>
+            <a:ext cx="5760720" cy="4206240"/>
           </a:xfrm>
           <a:prstGeom prst="roundRect">
             <a:avLst>
-              <a:gd name="adj" fmla="val 3019"/>
+              <a:gd name="adj" fmla="val 1739"/>
             </a:avLst>
           </a:prstGeom>
           <a:solidFill>
@@ -6047,14 +7339,14 @@
       </p:sp>
       <p:sp>
         <p:nvSpPr>
-          <p:cNvPr id="4" name="Text 2"/>
+          <p:cNvPr id="5" name="Text 2"/>
           <p:cNvSpPr txBox="1"/>
           <p:nvPr/>
         </p:nvSpPr>
         <p:spPr>
           <a:xfrm>
-            <a:off x="731520" y="1417320"/>
-            <a:ext cx="2240280" cy="411480"/>
+            <a:off x="6080760" y="1508760"/>
+            <a:ext cx="5349240" cy="3931920"/>
           </a:xfrm>
           <a:prstGeom prst="rect">
             <a:avLst/>
@@ -6067,228 +7359,98 @@
           <a:lstStyle/>
           <a:p>
             <a:pPr indent="0" marL="0">
+              <a:spcAft>
+                <a:spcPts val="600"/>
+              </a:spcAft>
               <a:buNone/>
             </a:pPr>
             <a:r>
               <a:rPr lang="en-US" sz="1700" b="1" dirty="0">
                 <a:solidFill>
-                  <a:srgbClr val="2A78D6"/>
+                  <a:srgbClr val="1B1F27"/>
                 </a:solidFill>
                 <a:latin typeface="Calibri" pitchFamily="34" charset="0"/>
                 <a:ea typeface="Calibri" pitchFamily="34" charset="-122"/>
                 <a:cs typeface="Calibri" pitchFamily="34" charset="-120"/>
               </a:rPr>
-              <a:t>1  Collected</a:t>
+              <a:t>The idea</a:t>
             </a:r>
             <a:endParaRPr lang="en-US" sz="1700" dirty="0"/>
           </a:p>
-        </p:txBody>
-      </p:sp>
-      <p:sp>
-        <p:nvSpPr>
-          <p:cNvPr id="5" name="Text 3"/>
-          <p:cNvSpPr txBox="1"/>
-          <p:nvPr/>
-        </p:nvSpPr>
-        <p:spPr>
-          <a:xfrm>
-            <a:off x="731520" y="1874520"/>
-            <a:ext cx="2240280" cy="1737360"/>
-          </a:xfrm>
-          <a:prstGeom prst="rect">
-            <a:avLst/>
-          </a:prstGeom>
-          <a:noFill/>
-          <a:ln/>
-        </p:spPr>
-        <p:txBody>
-          <a:bodyPr wrap="square" lIns="0" tIns="0" rIns="0" bIns="0" rtlCol="0" anchor="t"/>
-          <a:lstStyle/>
           <a:p>
             <a:pPr indent="0" marL="0">
+              <a:spcAft>
+                <a:spcPts val="1200"/>
+              </a:spcAft>
               <a:buNone/>
             </a:pPr>
             <a:r>
-              <a:rPr lang="en-US" sz="1300" dirty="0">
-                <a:solidFill>
-                  <a:srgbClr val="3A4150"/>
+              <a:rPr lang="en-US" sz="1400" dirty="0">
+                <a:solidFill>
+                  <a:srgbClr val="1B1F27"/>
                 </a:solidFill>
                 <a:latin typeface="Calibri" pitchFamily="34" charset="0"/>
                 <a:ea typeface="Calibri" pitchFamily="34" charset="-122"/>
                 <a:cs typeface="Calibri" pitchFamily="34" charset="-120"/>
               </a:rPr>
-              <a:t>247k news headlines and social posts, 2010–2026, from 9,515+ outlets</a:t>
-            </a:r>
-            <a:endParaRPr lang="en-US" sz="1300" dirty="0"/>
-          </a:p>
-        </p:txBody>
-      </p:sp>
-      <p:sp>
-        <p:nvSpPr>
-          <p:cNvPr id="6" name="Shape 4"/>
-          <p:cNvSpPr/>
-          <p:nvPr/>
-        </p:nvSpPr>
-        <p:spPr>
-          <a:xfrm>
-            <a:off x="3383280" y="1280160"/>
-            <a:ext cx="2606040" cy="2423160"/>
-          </a:xfrm>
-          <a:prstGeom prst="roundRect">
-            <a:avLst>
-              <a:gd name="adj" fmla="val 3019"/>
-            </a:avLst>
-          </a:prstGeom>
-          <a:solidFill>
-            <a:srgbClr val="F2F4F7"/>
-          </a:solidFill>
-          <a:ln w="12700">
-            <a:solidFill>
-              <a:srgbClr val="F2F4F7"/>
-            </a:solidFill>
-            <a:prstDash val="solid"/>
-          </a:ln>
-        </p:spPr>
-      </p:sp>
-      <p:sp>
-        <p:nvSpPr>
-          <p:cNvPr id="7" name="Text 5"/>
-          <p:cNvSpPr txBox="1"/>
-          <p:nvPr/>
-        </p:nvSpPr>
-        <p:spPr>
-          <a:xfrm>
-            <a:off x="3566160" y="1417320"/>
-            <a:ext cx="2240280" cy="411480"/>
-          </a:xfrm>
-          <a:prstGeom prst="rect">
-            <a:avLst/>
-          </a:prstGeom>
-          <a:noFill/>
-          <a:ln/>
-        </p:spPr>
-        <p:txBody>
-          <a:bodyPr wrap="square" lIns="0" tIns="0" rIns="0" bIns="0" rtlCol="0" anchor="t"/>
-          <a:lstStyle/>
+              <a:t>People learn about inflation from what they have lived through. For a 26-year-old, two years of high inflation is a big share of their whole life. For a 66-year-old who lived through the 1970s, it's a small blip.</a:t>
+            </a:r>
+            <a:endParaRPr lang="en-US" sz="1700" dirty="0"/>
+          </a:p>
           <a:p>
             <a:pPr indent="0" marL="0">
+              <a:spcAft>
+                <a:spcPts val="600"/>
+              </a:spcAft>
               <a:buNone/>
             </a:pPr>
             <a:r>
               <a:rPr lang="en-US" sz="1700" b="1" dirty="0">
                 <a:solidFill>
-                  <a:srgbClr val="2A78D6"/>
+                  <a:srgbClr val="1B1F27"/>
                 </a:solidFill>
                 <a:latin typeface="Calibri" pitchFamily="34" charset="0"/>
                 <a:ea typeface="Calibri" pitchFamily="34" charset="-122"/>
                 <a:cs typeface="Calibri" pitchFamily="34" charset="-120"/>
               </a:rPr>
-              <a:t>2  Rulebook</a:t>
+              <a:t>What we found</a:t>
             </a:r>
             <a:endParaRPr lang="en-US" sz="1700" dirty="0"/>
           </a:p>
-        </p:txBody>
-      </p:sp>
-      <p:sp>
-        <p:nvSpPr>
-          <p:cNvPr id="8" name="Text 6"/>
-          <p:cNvSpPr txBox="1"/>
-          <p:nvPr/>
-        </p:nvSpPr>
-        <p:spPr>
-          <a:xfrm>
-            <a:off x="3566160" y="1874520"/>
-            <a:ext cx="2240280" cy="1737360"/>
-          </a:xfrm>
-          <a:prstGeom prst="rect">
-            <a:avLst/>
-          </a:prstGeom>
-          <a:noFill/>
-          <a:ln/>
-        </p:spPr>
-        <p:txBody>
-          <a:bodyPr wrap="square" lIns="0" tIns="0" rIns="0" bIns="0" rtlCol="0" anchor="t"/>
-          <a:lstStyle/>
           <a:p>
             <a:pPr indent="0" marL="0">
+              <a:spcAft>
+                <a:spcPts val="600"/>
+              </a:spcAft>
               <a:buNone/>
             </a:pPr>
             <a:r>
-              <a:rPr lang="en-US" sz="1300" dirty="0">
-                <a:solidFill>
-                  <a:srgbClr val="3A4150"/>
+              <a:rPr lang="en-US" sz="1400" dirty="0">
+                <a:solidFill>
+                  <a:srgbClr val="1B1F27"/>
                 </a:solidFill>
                 <a:latin typeface="Calibri" pitchFamily="34" charset="0"/>
                 <a:ea typeface="Calibri" pitchFamily="34" charset="-122"/>
                 <a:cs typeface="Calibri" pitchFamily="34" charset="-120"/>
               </a:rPr>
-              <a:t>Wrote clear rules first: is this good or bad news for households? Is it slanted?</a:t>
-            </a:r>
-            <a:endParaRPr lang="en-US" sz="1300" dirty="0"/>
-          </a:p>
-        </p:txBody>
-      </p:sp>
-      <p:sp>
-        <p:nvSpPr>
-          <p:cNvPr id="9" name="Shape 7"/>
-          <p:cNvSpPr/>
-          <p:nvPr/>
-        </p:nvSpPr>
-        <p:spPr>
-          <a:xfrm>
-            <a:off x="6217920" y="1280160"/>
-            <a:ext cx="2606040" cy="2423160"/>
-          </a:xfrm>
-          <a:prstGeom prst="roundRect">
-            <a:avLst>
-              <a:gd name="adj" fmla="val 3019"/>
-            </a:avLst>
-          </a:prstGeom>
-          <a:solidFill>
-            <a:srgbClr val="F2F4F7"/>
-          </a:solidFill>
-          <a:ln w="12700">
-            <a:solidFill>
-              <a:srgbClr val="F2F4F7"/>
-            </a:solidFill>
-            <a:prstDash val="solid"/>
-          </a:ln>
-        </p:spPr>
-      </p:sp>
-      <p:sp>
-        <p:nvSpPr>
-          <p:cNvPr id="10" name="Text 8"/>
-          <p:cNvSpPr txBox="1"/>
-          <p:nvPr/>
-        </p:nvSpPr>
-        <p:spPr>
-          <a:xfrm>
-            <a:off x="6400800" y="1417320"/>
-            <a:ext cx="2240280" cy="411480"/>
-          </a:xfrm>
-          <a:prstGeom prst="rect">
-            <a:avLst/>
-          </a:prstGeom>
-          <a:noFill/>
-          <a:ln/>
-        </p:spPr>
-        <p:txBody>
-          <a:bodyPr wrap="square" lIns="0" tIns="0" rIns="0" bIns="0" rtlCol="0" anchor="t"/>
-          <a:lstStyle/>
+              <a:t>The 2021–23 shock raised young adults' inflation memory about 10× more than older adults'.</a:t>
+            </a:r>
+            <a:endParaRPr lang="en-US" sz="1700" dirty="0"/>
+          </a:p>
           <a:p>
             <a:pPr indent="0" marL="0">
               <a:buNone/>
             </a:pPr>
             <a:r>
-              <a:rPr lang="en-US" sz="1700" b="1" dirty="0">
-                <a:solidFill>
-                  <a:srgbClr val="2A78D6"/>
+              <a:rPr lang="en-US" sz="1400" b="1" dirty="0">
+                <a:solidFill>
+                  <a:srgbClr val="1B1F27"/>
                 </a:solidFill>
                 <a:latin typeface="Calibri" pitchFamily="34" charset="0"/>
                 <a:ea typeface="Calibri" pitchFamily="34" charset="-122"/>
                 <a:cs typeface="Calibri" pitchFamily="34" charset="-120"/>
               </a:rPr>
-              <a:t>3  AI reader</a:t>
+              <a:t>Young adults fell 10.4 points more than 55+. This effect explains about 8.2 of those 10.4 points.</a:t>
             </a:r>
             <a:endParaRPr lang="en-US" sz="1700" dirty="0"/>
           </a:p>
@@ -6296,263 +7458,7 @@
       </p:sp>
       <p:sp>
         <p:nvSpPr>
-          <p:cNvPr id="11" name="Text 9"/>
-          <p:cNvSpPr txBox="1"/>
-          <p:nvPr/>
-        </p:nvSpPr>
-        <p:spPr>
-          <a:xfrm>
-            <a:off x="6400800" y="1874520"/>
-            <a:ext cx="2240280" cy="1737360"/>
-          </a:xfrm>
-          <a:prstGeom prst="rect">
-            <a:avLst/>
-          </a:prstGeom>
-          <a:noFill/>
-          <a:ln/>
-        </p:spPr>
-        <p:txBody>
-          <a:bodyPr wrap="square" lIns="0" tIns="0" rIns="0" bIns="0" rtlCol="0" anchor="t"/>
-          <a:lstStyle/>
-          <a:p>
-            <a:pPr indent="0" marL="0">
-              <a:buNone/>
-            </a:pPr>
-            <a:r>
-              <a:rPr lang="en-US" sz="1300" dirty="0">
-                <a:solidFill>
-                  <a:srgbClr val="3A4150"/>
-                </a:solidFill>
-                <a:latin typeface="Calibri" pitchFamily="34" charset="0"/>
-                <a:ea typeface="Calibri" pitchFamily="34" charset="-122"/>
-                <a:cs typeface="Calibri" pitchFamily="34" charset="-120"/>
-              </a:rPr>
-              <a:t>An AI read every headline. A human checked 300: the AI agreed 70% of the time — better than word lists (43%) or other AI (50%)</a:t>
-            </a:r>
-            <a:endParaRPr lang="en-US" sz="1300" dirty="0"/>
-          </a:p>
-        </p:txBody>
-      </p:sp>
-      <p:sp>
-        <p:nvSpPr>
-          <p:cNvPr id="12" name="Shape 10"/>
-          <p:cNvSpPr/>
-          <p:nvPr/>
-        </p:nvSpPr>
-        <p:spPr>
-          <a:xfrm>
-            <a:off x="9052560" y="1280160"/>
-            <a:ext cx="2606040" cy="2423160"/>
-          </a:xfrm>
-          <a:prstGeom prst="roundRect">
-            <a:avLst>
-              <a:gd name="adj" fmla="val 3019"/>
-            </a:avLst>
-          </a:prstGeom>
-          <a:solidFill>
-            <a:srgbClr val="F2F4F7"/>
-          </a:solidFill>
-          <a:ln w="12700">
-            <a:solidFill>
-              <a:srgbClr val="F2F4F7"/>
-            </a:solidFill>
-            <a:prstDash val="solid"/>
-          </a:ln>
-        </p:spPr>
-      </p:sp>
-      <p:sp>
-        <p:nvSpPr>
-          <p:cNvPr id="13" name="Text 11"/>
-          <p:cNvSpPr txBox="1"/>
-          <p:nvPr/>
-        </p:nvSpPr>
-        <p:spPr>
-          <a:xfrm>
-            <a:off x="9235440" y="1417320"/>
-            <a:ext cx="2240280" cy="411480"/>
-          </a:xfrm>
-          <a:prstGeom prst="rect">
-            <a:avLst/>
-          </a:prstGeom>
-          <a:noFill/>
-          <a:ln/>
-        </p:spPr>
-        <p:txBody>
-          <a:bodyPr wrap="square" lIns="0" tIns="0" rIns="0" bIns="0" rtlCol="0" anchor="t"/>
-          <a:lstStyle/>
-          <a:p>
-            <a:pPr indent="0" marL="0">
-              <a:buNone/>
-            </a:pPr>
-            <a:r>
-              <a:rPr lang="en-US" sz="1700" b="1" dirty="0">
-                <a:solidFill>
-                  <a:srgbClr val="2A78D6"/>
-                </a:solidFill>
-                <a:latin typeface="Calibri" pitchFamily="34" charset="0"/>
-                <a:ea typeface="Calibri" pitchFamily="34" charset="-122"/>
-                <a:cs typeface="Calibri" pitchFamily="34" charset="-120"/>
-              </a:rPr>
-              <a:t>4  Fair tests</a:t>
-            </a:r>
-            <a:endParaRPr lang="en-US" sz="1700" dirty="0"/>
-          </a:p>
-        </p:txBody>
-      </p:sp>
-      <p:sp>
-        <p:nvSpPr>
-          <p:cNvPr id="14" name="Text 12"/>
-          <p:cNvSpPr txBox="1"/>
-          <p:nvPr/>
-        </p:nvSpPr>
-        <p:spPr>
-          <a:xfrm>
-            <a:off x="9235440" y="1874520"/>
-            <a:ext cx="2240280" cy="1737360"/>
-          </a:xfrm>
-          <a:prstGeom prst="rect">
-            <a:avLst/>
-          </a:prstGeom>
-          <a:noFill/>
-          <a:ln/>
-        </p:spPr>
-        <p:txBody>
-          <a:bodyPr wrap="square" lIns="0" tIns="0" rIns="0" bIns="0" rtlCol="0" anchor="t"/>
-          <a:lstStyle/>
-          <a:p>
-            <a:pPr indent="0" marL="0">
-              <a:buNone/>
-            </a:pPr>
-            <a:r>
-              <a:rPr lang="en-US" sz="1300" dirty="0">
-                <a:solidFill>
-                  <a:srgbClr val="3A4150"/>
-                </a:solidFill>
-                <a:latin typeface="Calibri" pitchFamily="34" charset="0"/>
-                <a:ea typeface="Calibri" pitchFamily="34" charset="-122"/>
-                <a:cs typeface="Calibri" pitchFamily="34" charset="-120"/>
-              </a:rPr>
-              <a:t>Negative isn't biased if the news is bad. We compared coverage to the real data and to other outlets in the same month</a:t>
-            </a:r>
-            <a:endParaRPr lang="en-US" sz="1300" dirty="0"/>
-          </a:p>
-        </p:txBody>
-      </p:sp>
-      <p:sp>
-        <p:nvSpPr>
-          <p:cNvPr id="15" name="Shape 13"/>
-          <p:cNvSpPr/>
-          <p:nvPr/>
-        </p:nvSpPr>
-        <p:spPr>
-          <a:xfrm>
-            <a:off x="548640" y="3886200"/>
-            <a:ext cx="11064240" cy="1691640"/>
-          </a:xfrm>
-          <a:prstGeom prst="roundRect">
-            <a:avLst>
-              <a:gd name="adj" fmla="val 4324"/>
-            </a:avLst>
-          </a:prstGeom>
-          <a:solidFill>
-            <a:srgbClr val="EAF2FC"/>
-          </a:solidFill>
-          <a:ln w="12700">
-            <a:solidFill>
-              <a:srgbClr val="EAF2FC"/>
-            </a:solidFill>
-            <a:prstDash val="solid"/>
-          </a:ln>
-        </p:spPr>
-      </p:sp>
-      <p:sp>
-        <p:nvSpPr>
-          <p:cNvPr id="16" name="Text 14"/>
-          <p:cNvSpPr txBox="1"/>
-          <p:nvPr/>
-        </p:nvSpPr>
-        <p:spPr>
-          <a:xfrm>
-            <a:off x="777240" y="4005072"/>
-            <a:ext cx="10607040" cy="1508760"/>
-          </a:xfrm>
-          <a:prstGeom prst="rect">
-            <a:avLst/>
-          </a:prstGeom>
-          <a:noFill/>
-          <a:ln/>
-        </p:spPr>
-        <p:txBody>
-          <a:bodyPr wrap="square" lIns="0" tIns="0" rIns="0" bIns="0" rtlCol="0" anchor="t"/>
-          <a:lstStyle/>
-          <a:p>
-            <a:pPr marL="342900" indent="-342900">
-              <a:spcAft>
-                <a:spcPts val="700"/>
-              </a:spcAft>
-              <a:buSzPct val="100000"/>
-              <a:buChar char="•"/>
-            </a:pPr>
-            <a:r>
-              <a:rPr lang="en-US" sz="1400" dirty="0">
-                <a:solidFill>
-                  <a:srgbClr val="1B1F27"/>
-                </a:solidFill>
-                <a:latin typeface="Calibri" pitchFamily="34" charset="0"/>
-                <a:ea typeface="Calibri" pitchFamily="34" charset="-122"/>
-                <a:cs typeface="Calibri" pitchFamily="34" charset="-120"/>
-              </a:rPr>
-              <a:t>Yes, there is political slant: right-leaning outlets sound much more negative when a Democrat is president (and vice versa).</a:t>
-            </a:r>
-            <a:endParaRPr lang="en-US" sz="1400" dirty="0"/>
-          </a:p>
-          <a:p>
-            <a:pPr marL="342900" indent="-342900">
-              <a:spcAft>
-                <a:spcPts val="700"/>
-              </a:spcAft>
-              <a:buSzPct val="100000"/>
-              <a:buChar char="•"/>
-            </a:pPr>
-            <a:r>
-              <a:rPr lang="en-US" sz="1400" dirty="0">
-                <a:solidFill>
-                  <a:srgbClr val="1B1F27"/>
-                </a:solidFill>
-                <a:latin typeface="Calibri" pitchFamily="34" charset="0"/>
-                <a:ea typeface="Calibri" pitchFamily="34" charset="-122"/>
-                <a:cs typeface="Calibri" pitchFamily="34" charset="-120"/>
-              </a:rPr>
-              <a:t>No, the news isn't overly negative: bad news isn't covered more than equally big good news, and 'inflation falling' stories rise when inflation falls.</a:t>
-            </a:r>
-            <a:endParaRPr lang="en-US" sz="1400" dirty="0"/>
-          </a:p>
-          <a:p>
-            <a:pPr marL="342900" indent="-342900">
-              <a:spcAft>
-                <a:spcPts val="700"/>
-              </a:spcAft>
-              <a:buSzPct val="100000"/>
-              <a:buChar char="•"/>
-            </a:pPr>
-            <a:r>
-              <a:rPr lang="en-US" sz="1400" dirty="0">
-                <a:solidFill>
-                  <a:srgbClr val="1B1F27"/>
-                </a:solidFill>
-                <a:latin typeface="Calibri" pitchFamily="34" charset="0"/>
-                <a:ea typeface="Calibri" pitchFamily="34" charset="-122"/>
-                <a:cs typeface="Calibri" pitchFamily="34" charset="-120"/>
-              </a:rPr>
-              <a:t>Adding news data to our forecast made it 25% worse. Adding everyday-cost data made it 24% better.</a:t>
-            </a:r>
-            <a:endParaRPr lang="en-US" sz="1400" dirty="0"/>
-          </a:p>
-        </p:txBody>
-      </p:sp>
-      <p:sp>
-        <p:nvSpPr>
-          <p:cNvPr id="17" name="Shape 15"/>
+          <p:cNvPr id="6" name="Shape 3"/>
           <p:cNvSpPr/>
           <p:nvPr/>
         </p:nvSpPr>
@@ -6579,7 +7485,7 @@
       </p:sp>
       <p:sp>
         <p:nvSpPr>
-          <p:cNvPr id="18" name="Text 16"/>
+          <p:cNvPr id="7" name="Text 4"/>
           <p:cNvSpPr txBox="1"/>
           <p:nvPr/>
         </p:nvSpPr>
@@ -6624,7 +7530,7 @@
                 <a:ea typeface="Calibri" pitchFamily="34" charset="-122"/>
                 <a:cs typeface="Calibri" pitchFamily="34" charset="-120"/>
               </a:rPr>
-              <a:t>The news has a political tilt, but it isn't driving the mood — knowing the news doesn't help predict it.</a:t>
+              <a:t>Young people aren't irrational — they're learning from the only big inflation they've ever seen.</a:t>
             </a:r>
             <a:endParaRPr lang="en-US" sz="1500" dirty="0"/>
           </a:p>
@@ -6735,7 +7641,7 @@
                 <a:ea typeface="Cambria" pitchFamily="34" charset="-122"/>
                 <a:cs typeface="Cambria" pitchFamily="34" charset="-120"/>
               </a:rPr>
-              <a:t>The test: moods kept falling, but the news didn't get worse</a:t>
+              <a:t>Party matters — but independents are gloomy too</a:t>
             </a:r>
             <a:endParaRPr lang="en-US" sz="3000" dirty="0"/>
           </a:p>
@@ -6749,7 +7655,7 @@
         </p:nvGraphicFramePr>
         <p:xfrm>
           <a:off x="548640" y="1234440"/>
-          <a:ext cx="5394960" cy="4343400"/>
+          <a:ext cx="6583680" cy="4343400"/>
         </p:xfrm>
         <a:graphic xmlns:a="http://schemas.openxmlformats.org/drawingml/2006/main">
           <a:graphicData uri="http://schemas.openxmlformats.org/drawingml/2006/chart">
@@ -6765,12 +7671,12 @@
         </p:nvSpPr>
         <p:spPr>
           <a:xfrm>
-            <a:off x="6309360" y="1325880"/>
-            <a:ext cx="5303520" cy="4206240"/>
+            <a:off x="7498080" y="1325880"/>
+            <a:ext cx="4114800" cy="4206240"/>
           </a:xfrm>
           <a:prstGeom prst="roundRect">
             <a:avLst>
-              <a:gd name="adj" fmla="val 1739"/>
+              <a:gd name="adj" fmla="val 1778"/>
             </a:avLst>
           </a:prstGeom>
           <a:solidFill>
@@ -6792,8 +7698,8 @@
         </p:nvSpPr>
         <p:spPr>
           <a:xfrm>
-            <a:off x="6537960" y="1508760"/>
-            <a:ext cx="4892040" cy="3931920"/>
+            <a:off x="7726680" y="1508760"/>
+            <a:ext cx="3703320" cy="3931920"/>
           </a:xfrm>
           <a:prstGeom prst="rect">
             <a:avLst/>
@@ -6805,14 +7711,15 @@
           <a:bodyPr wrap="square" lIns="0" tIns="0" rIns="0" bIns="0" rtlCol="0" anchor="t"/>
           <a:lstStyle/>
           <a:p>
-            <a:pPr indent="0" marL="0">
+            <a:pPr marL="342900" indent="-342900">
               <a:spcAft>
-                <a:spcPts val="600"/>
+                <a:spcPts val="700"/>
               </a:spcAft>
-              <a:buNone/>
-            </a:pPr>
-            <a:r>
-              <a:rPr lang="en-US" sz="1600" b="1" dirty="0">
+              <a:buSzPct val="100000"/>
+              <a:buChar char="•"/>
+            </a:pPr>
+            <a:r>
+              <a:rPr lang="en-US" sz="1350" dirty="0">
                 <a:solidFill>
                   <a:srgbClr val="1B1F27"/>
                 </a:solidFill>
@@ -6820,19 +7727,20 @@
                 <a:ea typeface="Calibri" pitchFamily="34" charset="-122"/>
                 <a:cs typeface="Calibri" pitchFamily="34" charset="-120"/>
               </a:rPr>
-              <a:t>What should have happened if media caused it</a:t>
-            </a:r>
-            <a:endParaRPr lang="en-US" sz="1600" dirty="0"/>
-          </a:p>
-          <a:p>
-            <a:pPr indent="0" marL="0">
+              <a:t>People whose party holds the White House feel much better. This flips every election — Michigan has seen it since the 1980s.</a:t>
+            </a:r>
+            <a:endParaRPr lang="en-US" sz="1350" dirty="0"/>
+          </a:p>
+          <a:p>
+            <a:pPr marL="342900" indent="-342900">
               <a:spcAft>
-                <a:spcPts val="1200"/>
+                <a:spcPts val="700"/>
               </a:spcAft>
-              <a:buNone/>
-            </a:pPr>
-            <a:r>
-              <a:rPr lang="en-US" sz="1400" dirty="0">
+              <a:buSzPct val="100000"/>
+              <a:buChar char="•"/>
+            </a:pPr>
+            <a:r>
+              <a:rPr lang="en-US" sz="1350" dirty="0">
                 <a:solidFill>
                   <a:srgbClr val="1B1F27"/>
                 </a:solidFill>
@@ -6840,19 +7748,20 @@
                 <a:ea typeface="Calibri" pitchFamily="34" charset="-122"/>
                 <a:cs typeface="Calibri" pitchFamily="34" charset="-120"/>
               </a:rPr>
-              <a:t>Sentiment fell another 14.5 points after January 2025. If the news drove that, news coverage should have turned much more negative.</a:t>
-            </a:r>
-            <a:endParaRPr lang="en-US" sz="1600" dirty="0"/>
-          </a:p>
-          <a:p>
-            <a:pPr indent="0" marL="0">
+              <a:t>Independents — the middle — are the best guide to the national mood. They are at 41: very gloomy too.</a:t>
+            </a:r>
+            <a:endParaRPr lang="en-US" sz="1350" dirty="0"/>
+          </a:p>
+          <a:p>
+            <a:pPr marL="342900" indent="-342900">
               <a:spcAft>
-                <a:spcPts val="600"/>
+                <a:spcPts val="700"/>
               </a:spcAft>
-              <a:buNone/>
-            </a:pPr>
-            <a:r>
-              <a:rPr lang="en-US" sz="1600" b="1" dirty="0">
+              <a:buSzPct val="100000"/>
+              <a:buChar char="•"/>
+            </a:pPr>
+            <a:r>
+              <a:rPr lang="en-US" sz="1350" dirty="0">
                 <a:solidFill>
                   <a:srgbClr val="1B1F27"/>
                 </a:solidFill>
@@ -6860,46 +7769,9 @@
                 <a:ea typeface="Calibri" pitchFamily="34" charset="-122"/>
                 <a:cs typeface="Calibri" pitchFamily="34" charset="-120"/>
               </a:rPr>
-              <a:t>What actually happened</a:t>
-            </a:r>
-            <a:endParaRPr lang="en-US" sz="1600" dirty="0"/>
-          </a:p>
-          <a:p>
-            <a:pPr indent="0" marL="0">
-              <a:spcAft>
-                <a:spcPts val="1200"/>
-              </a:spcAft>
-              <a:buNone/>
-            </a:pPr>
-            <a:r>
-              <a:rPr lang="en-US" sz="1400" dirty="0">
-                <a:solidFill>
-                  <a:srgbClr val="1B1F27"/>
-                </a:solidFill>
-                <a:latin typeface="Calibri" pitchFamily="34" charset="0"/>
-                <a:ea typeface="Calibri" pitchFamily="34" charset="-122"/>
-                <a:cs typeface="Calibri" pitchFamily="34" charset="-120"/>
-              </a:rPr>
-              <a:t>Overall news tone barely changed. Even in the worst case, that change explains about 0.9 point of the 14.5-point drop.</a:t>
-            </a:r>
-            <a:endParaRPr lang="en-US" sz="1600" dirty="0"/>
-          </a:p>
-          <a:p>
-            <a:pPr indent="0" marL="0">
-              <a:buNone/>
-            </a:pPr>
-            <a:r>
-              <a:rPr lang="en-US" sz="1300" dirty="0">
-                <a:solidFill>
-                  <a:srgbClr val="3A4150"/>
-                </a:solidFill>
-                <a:latin typeface="Calibri" pitchFamily="34" charset="0"/>
-                <a:ea typeface="Calibri" pitchFamily="34" charset="-122"/>
-                <a:cs typeface="Calibri" pitchFamily="34" charset="-120"/>
-              </a:rPr>
-              <a:t>Right-leaning outlets did turn more positive under Trump — slant follows whoever is in power — but the total news mood stayed the same.</a:t>
-            </a:r>
-            <a:endParaRPr lang="en-US" sz="1600" dirty="0"/>
+              <a:t>Since 2025, fewer people call themselves Republican in the survey. That alone lowers the national score by about 2 points.</a:t>
+            </a:r>
+            <a:endParaRPr lang="en-US" sz="1350" dirty="0"/>
           </a:p>
         </p:txBody>
       </p:sp>
@@ -6977,7 +7849,7 @@
                 <a:ea typeface="Calibri" pitchFamily="34" charset="-122"/>
                 <a:cs typeface="Calibri" pitchFamily="34" charset="-120"/>
               </a:rPr>
-              <a:t>The news can amplify the mood, but it didn't cause the collapse.</a:t>
+              <a:t>Party colors how people judge the economy, but the gloom is real across the political middle.</a:t>
             </a:r>
             <a:endParaRPr lang="en-US" sz="1500" dirty="0"/>
           </a:p>
@@ -7088,42 +7960,558 @@
                 <a:ea typeface="Cambria" pitchFamily="34" charset="-122"/>
                 <a:cs typeface="Cambria" pitchFamily="34" charset="-120"/>
               </a:rPr>
-              <a:t>What this means for investors and forecasters</a:t>
+              <a:t>Is the media to blame? How we checked</a:t>
             </a:r>
             <a:endParaRPr lang="en-US" sz="3000" dirty="0"/>
           </a:p>
         </p:txBody>
       </p:sp>
-      <p:graphicFrame>
-        <p:nvGraphicFramePr>
-          <p:cNvPr id="3" name="Chart 0" descr=""/>
-          <p:cNvGraphicFramePr/>
-          <p:nvPr/>
-        </p:nvGraphicFramePr>
-        <p:xfrm>
-          <a:off x="548640" y="1234440"/>
-          <a:ext cx="6675120" cy="4343400"/>
-        </p:xfrm>
-        <a:graphic xmlns:a="http://schemas.openxmlformats.org/drawingml/2006/main">
-          <a:graphicData uri="http://schemas.openxmlformats.org/drawingml/2006/chart">
-            <c:chart xmlns:c="http://schemas.openxmlformats.org/drawingml/2006/chart" r:id="rId1"/>
-          </a:graphicData>
-        </a:graphic>
-      </p:graphicFrame>
-      <p:sp>
-        <p:nvSpPr>
-          <p:cNvPr id="4" name="Shape 1"/>
+      <p:sp>
+        <p:nvSpPr>
+          <p:cNvPr id="3" name="Shape 1"/>
           <p:cNvSpPr/>
           <p:nvPr/>
         </p:nvSpPr>
         <p:spPr>
           <a:xfrm>
-            <a:off x="7498080" y="1325880"/>
-            <a:ext cx="4114800" cy="4206240"/>
+            <a:off x="548640" y="1280160"/>
+            <a:ext cx="2606040" cy="2423160"/>
           </a:xfrm>
           <a:prstGeom prst="roundRect">
             <a:avLst>
-              <a:gd name="adj" fmla="val 1778"/>
+              <a:gd name="adj" fmla="val 3019"/>
+            </a:avLst>
+          </a:prstGeom>
+          <a:solidFill>
+            <a:srgbClr val="F2F4F7"/>
+          </a:solidFill>
+          <a:ln w="12700">
+            <a:solidFill>
+              <a:srgbClr val="F2F4F7"/>
+            </a:solidFill>
+            <a:prstDash val="solid"/>
+          </a:ln>
+        </p:spPr>
+      </p:sp>
+      <p:sp>
+        <p:nvSpPr>
+          <p:cNvPr id="4" name="Text 2"/>
+          <p:cNvSpPr txBox="1"/>
+          <p:nvPr/>
+        </p:nvSpPr>
+        <p:spPr>
+          <a:xfrm>
+            <a:off x="731520" y="1417320"/>
+            <a:ext cx="2240280" cy="411480"/>
+          </a:xfrm>
+          <a:prstGeom prst="rect">
+            <a:avLst/>
+          </a:prstGeom>
+          <a:noFill/>
+          <a:ln/>
+        </p:spPr>
+        <p:txBody>
+          <a:bodyPr wrap="square" lIns="0" tIns="0" rIns="0" bIns="0" rtlCol="0" anchor="t"/>
+          <a:lstStyle/>
+          <a:p>
+            <a:pPr indent="0" marL="0">
+              <a:buNone/>
+            </a:pPr>
+            <a:r>
+              <a:rPr lang="en-US" sz="1700" b="1" dirty="0">
+                <a:solidFill>
+                  <a:srgbClr val="2A78D6"/>
+                </a:solidFill>
+                <a:latin typeface="Calibri" pitchFamily="34" charset="0"/>
+                <a:ea typeface="Calibri" pitchFamily="34" charset="-122"/>
+                <a:cs typeface="Calibri" pitchFamily="34" charset="-120"/>
+              </a:rPr>
+              <a:t>1  Collected</a:t>
+            </a:r>
+            <a:endParaRPr lang="en-US" sz="1700" dirty="0"/>
+          </a:p>
+        </p:txBody>
+      </p:sp>
+      <p:sp>
+        <p:nvSpPr>
+          <p:cNvPr id="5" name="Text 3"/>
+          <p:cNvSpPr txBox="1"/>
+          <p:nvPr/>
+        </p:nvSpPr>
+        <p:spPr>
+          <a:xfrm>
+            <a:off x="731520" y="1874520"/>
+            <a:ext cx="2240280" cy="1737360"/>
+          </a:xfrm>
+          <a:prstGeom prst="rect">
+            <a:avLst/>
+          </a:prstGeom>
+          <a:noFill/>
+          <a:ln/>
+        </p:spPr>
+        <p:txBody>
+          <a:bodyPr wrap="square" lIns="0" tIns="0" rIns="0" bIns="0" rtlCol="0" anchor="t"/>
+          <a:lstStyle/>
+          <a:p>
+            <a:pPr indent="0" marL="0">
+              <a:buNone/>
+            </a:pPr>
+            <a:r>
+              <a:rPr lang="en-US" sz="1300" dirty="0">
+                <a:solidFill>
+                  <a:srgbClr val="3A4150"/>
+                </a:solidFill>
+                <a:latin typeface="Calibri" pitchFamily="34" charset="0"/>
+                <a:ea typeface="Calibri" pitchFamily="34" charset="-122"/>
+                <a:cs typeface="Calibri" pitchFamily="34" charset="-120"/>
+              </a:rPr>
+              <a:t>247k news headlines and social posts, 2010–2026, from 9,515+ outlets</a:t>
+            </a:r>
+            <a:endParaRPr lang="en-US" sz="1300" dirty="0"/>
+          </a:p>
+        </p:txBody>
+      </p:sp>
+      <p:sp>
+        <p:nvSpPr>
+          <p:cNvPr id="6" name="Shape 4"/>
+          <p:cNvSpPr/>
+          <p:nvPr/>
+        </p:nvSpPr>
+        <p:spPr>
+          <a:xfrm>
+            <a:off x="3383280" y="1280160"/>
+            <a:ext cx="2606040" cy="2423160"/>
+          </a:xfrm>
+          <a:prstGeom prst="roundRect">
+            <a:avLst>
+              <a:gd name="adj" fmla="val 3019"/>
+            </a:avLst>
+          </a:prstGeom>
+          <a:solidFill>
+            <a:srgbClr val="F2F4F7"/>
+          </a:solidFill>
+          <a:ln w="12700">
+            <a:solidFill>
+              <a:srgbClr val="F2F4F7"/>
+            </a:solidFill>
+            <a:prstDash val="solid"/>
+          </a:ln>
+        </p:spPr>
+      </p:sp>
+      <p:sp>
+        <p:nvSpPr>
+          <p:cNvPr id="7" name="Text 5"/>
+          <p:cNvSpPr txBox="1"/>
+          <p:nvPr/>
+        </p:nvSpPr>
+        <p:spPr>
+          <a:xfrm>
+            <a:off x="3566160" y="1417320"/>
+            <a:ext cx="2240280" cy="411480"/>
+          </a:xfrm>
+          <a:prstGeom prst="rect">
+            <a:avLst/>
+          </a:prstGeom>
+          <a:noFill/>
+          <a:ln/>
+        </p:spPr>
+        <p:txBody>
+          <a:bodyPr wrap="square" lIns="0" tIns="0" rIns="0" bIns="0" rtlCol="0" anchor="t"/>
+          <a:lstStyle/>
+          <a:p>
+            <a:pPr indent="0" marL="0">
+              <a:buNone/>
+            </a:pPr>
+            <a:r>
+              <a:rPr lang="en-US" sz="1700" b="1" dirty="0">
+                <a:solidFill>
+                  <a:srgbClr val="2A78D6"/>
+                </a:solidFill>
+                <a:latin typeface="Calibri" pitchFamily="34" charset="0"/>
+                <a:ea typeface="Calibri" pitchFamily="34" charset="-122"/>
+                <a:cs typeface="Calibri" pitchFamily="34" charset="-120"/>
+              </a:rPr>
+              <a:t>2  Rulebook</a:t>
+            </a:r>
+            <a:endParaRPr lang="en-US" sz="1700" dirty="0"/>
+          </a:p>
+        </p:txBody>
+      </p:sp>
+      <p:sp>
+        <p:nvSpPr>
+          <p:cNvPr id="8" name="Text 6"/>
+          <p:cNvSpPr txBox="1"/>
+          <p:nvPr/>
+        </p:nvSpPr>
+        <p:spPr>
+          <a:xfrm>
+            <a:off x="3566160" y="1874520"/>
+            <a:ext cx="2240280" cy="1737360"/>
+          </a:xfrm>
+          <a:prstGeom prst="rect">
+            <a:avLst/>
+          </a:prstGeom>
+          <a:noFill/>
+          <a:ln/>
+        </p:spPr>
+        <p:txBody>
+          <a:bodyPr wrap="square" lIns="0" tIns="0" rIns="0" bIns="0" rtlCol="0" anchor="t"/>
+          <a:lstStyle/>
+          <a:p>
+            <a:pPr indent="0" marL="0">
+              <a:buNone/>
+            </a:pPr>
+            <a:r>
+              <a:rPr lang="en-US" sz="1300" dirty="0">
+                <a:solidFill>
+                  <a:srgbClr val="3A4150"/>
+                </a:solidFill>
+                <a:latin typeface="Calibri" pitchFamily="34" charset="0"/>
+                <a:ea typeface="Calibri" pitchFamily="34" charset="-122"/>
+                <a:cs typeface="Calibri" pitchFamily="34" charset="-120"/>
+              </a:rPr>
+              <a:t>Wrote clear rules first: is this good or bad news for households? Is it slanted?</a:t>
+            </a:r>
+            <a:endParaRPr lang="en-US" sz="1300" dirty="0"/>
+          </a:p>
+        </p:txBody>
+      </p:sp>
+      <p:sp>
+        <p:nvSpPr>
+          <p:cNvPr id="9" name="Shape 7"/>
+          <p:cNvSpPr/>
+          <p:nvPr/>
+        </p:nvSpPr>
+        <p:spPr>
+          <a:xfrm>
+            <a:off x="6217920" y="1280160"/>
+            <a:ext cx="2606040" cy="2423160"/>
+          </a:xfrm>
+          <a:prstGeom prst="roundRect">
+            <a:avLst>
+              <a:gd name="adj" fmla="val 3019"/>
+            </a:avLst>
+          </a:prstGeom>
+          <a:solidFill>
+            <a:srgbClr val="F2F4F7"/>
+          </a:solidFill>
+          <a:ln w="12700">
+            <a:solidFill>
+              <a:srgbClr val="F2F4F7"/>
+            </a:solidFill>
+            <a:prstDash val="solid"/>
+          </a:ln>
+        </p:spPr>
+      </p:sp>
+      <p:sp>
+        <p:nvSpPr>
+          <p:cNvPr id="10" name="Text 8"/>
+          <p:cNvSpPr txBox="1"/>
+          <p:nvPr/>
+        </p:nvSpPr>
+        <p:spPr>
+          <a:xfrm>
+            <a:off x="6400800" y="1417320"/>
+            <a:ext cx="2240280" cy="411480"/>
+          </a:xfrm>
+          <a:prstGeom prst="rect">
+            <a:avLst/>
+          </a:prstGeom>
+          <a:noFill/>
+          <a:ln/>
+        </p:spPr>
+        <p:txBody>
+          <a:bodyPr wrap="square" lIns="0" tIns="0" rIns="0" bIns="0" rtlCol="0" anchor="t"/>
+          <a:lstStyle/>
+          <a:p>
+            <a:pPr indent="0" marL="0">
+              <a:buNone/>
+            </a:pPr>
+            <a:r>
+              <a:rPr lang="en-US" sz="1700" b="1" dirty="0">
+                <a:solidFill>
+                  <a:srgbClr val="2A78D6"/>
+                </a:solidFill>
+                <a:latin typeface="Calibri" pitchFamily="34" charset="0"/>
+                <a:ea typeface="Calibri" pitchFamily="34" charset="-122"/>
+                <a:cs typeface="Calibri" pitchFamily="34" charset="-120"/>
+              </a:rPr>
+              <a:t>3  AI reader</a:t>
+            </a:r>
+            <a:endParaRPr lang="en-US" sz="1700" dirty="0"/>
+          </a:p>
+        </p:txBody>
+      </p:sp>
+      <p:sp>
+        <p:nvSpPr>
+          <p:cNvPr id="11" name="Text 9"/>
+          <p:cNvSpPr txBox="1"/>
+          <p:nvPr/>
+        </p:nvSpPr>
+        <p:spPr>
+          <a:xfrm>
+            <a:off x="6400800" y="1874520"/>
+            <a:ext cx="2240280" cy="1737360"/>
+          </a:xfrm>
+          <a:prstGeom prst="rect">
+            <a:avLst/>
+          </a:prstGeom>
+          <a:noFill/>
+          <a:ln/>
+        </p:spPr>
+        <p:txBody>
+          <a:bodyPr wrap="square" lIns="0" tIns="0" rIns="0" bIns="0" rtlCol="0" anchor="t"/>
+          <a:lstStyle/>
+          <a:p>
+            <a:pPr indent="0" marL="0">
+              <a:buNone/>
+            </a:pPr>
+            <a:r>
+              <a:rPr lang="en-US" sz="1300" dirty="0">
+                <a:solidFill>
+                  <a:srgbClr val="3A4150"/>
+                </a:solidFill>
+                <a:latin typeface="Calibri" pitchFamily="34" charset="0"/>
+                <a:ea typeface="Calibri" pitchFamily="34" charset="-122"/>
+                <a:cs typeface="Calibri" pitchFamily="34" charset="-120"/>
+              </a:rPr>
+              <a:t>An AI read every headline. A human checked 300: the AI agreed 70% of the time — better than word lists (43%) or other AI (50%)</a:t>
+            </a:r>
+            <a:endParaRPr lang="en-US" sz="1300" dirty="0"/>
+          </a:p>
+        </p:txBody>
+      </p:sp>
+      <p:sp>
+        <p:nvSpPr>
+          <p:cNvPr id="12" name="Shape 10"/>
+          <p:cNvSpPr/>
+          <p:nvPr/>
+        </p:nvSpPr>
+        <p:spPr>
+          <a:xfrm>
+            <a:off x="9052560" y="1280160"/>
+            <a:ext cx="2606040" cy="2423160"/>
+          </a:xfrm>
+          <a:prstGeom prst="roundRect">
+            <a:avLst>
+              <a:gd name="adj" fmla="val 3019"/>
+            </a:avLst>
+          </a:prstGeom>
+          <a:solidFill>
+            <a:srgbClr val="F2F4F7"/>
+          </a:solidFill>
+          <a:ln w="12700">
+            <a:solidFill>
+              <a:srgbClr val="F2F4F7"/>
+            </a:solidFill>
+            <a:prstDash val="solid"/>
+          </a:ln>
+        </p:spPr>
+      </p:sp>
+      <p:sp>
+        <p:nvSpPr>
+          <p:cNvPr id="13" name="Text 11"/>
+          <p:cNvSpPr txBox="1"/>
+          <p:nvPr/>
+        </p:nvSpPr>
+        <p:spPr>
+          <a:xfrm>
+            <a:off x="9235440" y="1417320"/>
+            <a:ext cx="2240280" cy="411480"/>
+          </a:xfrm>
+          <a:prstGeom prst="rect">
+            <a:avLst/>
+          </a:prstGeom>
+          <a:noFill/>
+          <a:ln/>
+        </p:spPr>
+        <p:txBody>
+          <a:bodyPr wrap="square" lIns="0" tIns="0" rIns="0" bIns="0" rtlCol="0" anchor="t"/>
+          <a:lstStyle/>
+          <a:p>
+            <a:pPr indent="0" marL="0">
+              <a:buNone/>
+            </a:pPr>
+            <a:r>
+              <a:rPr lang="en-US" sz="1700" b="1" dirty="0">
+                <a:solidFill>
+                  <a:srgbClr val="2A78D6"/>
+                </a:solidFill>
+                <a:latin typeface="Calibri" pitchFamily="34" charset="0"/>
+                <a:ea typeface="Calibri" pitchFamily="34" charset="-122"/>
+                <a:cs typeface="Calibri" pitchFamily="34" charset="-120"/>
+              </a:rPr>
+              <a:t>4  Fair tests</a:t>
+            </a:r>
+            <a:endParaRPr lang="en-US" sz="1700" dirty="0"/>
+          </a:p>
+        </p:txBody>
+      </p:sp>
+      <p:sp>
+        <p:nvSpPr>
+          <p:cNvPr id="14" name="Text 12"/>
+          <p:cNvSpPr txBox="1"/>
+          <p:nvPr/>
+        </p:nvSpPr>
+        <p:spPr>
+          <a:xfrm>
+            <a:off x="9235440" y="1874520"/>
+            <a:ext cx="2240280" cy="1737360"/>
+          </a:xfrm>
+          <a:prstGeom prst="rect">
+            <a:avLst/>
+          </a:prstGeom>
+          <a:noFill/>
+          <a:ln/>
+        </p:spPr>
+        <p:txBody>
+          <a:bodyPr wrap="square" lIns="0" tIns="0" rIns="0" bIns="0" rtlCol="0" anchor="t"/>
+          <a:lstStyle/>
+          <a:p>
+            <a:pPr indent="0" marL="0">
+              <a:buNone/>
+            </a:pPr>
+            <a:r>
+              <a:rPr lang="en-US" sz="1300" dirty="0">
+                <a:solidFill>
+                  <a:srgbClr val="3A4150"/>
+                </a:solidFill>
+                <a:latin typeface="Calibri" pitchFamily="34" charset="0"/>
+                <a:ea typeface="Calibri" pitchFamily="34" charset="-122"/>
+                <a:cs typeface="Calibri" pitchFamily="34" charset="-120"/>
+              </a:rPr>
+              <a:t>Negative isn't biased if the news is bad. We compared coverage to the real data and to other outlets in the same month</a:t>
+            </a:r>
+            <a:endParaRPr lang="en-US" sz="1300" dirty="0"/>
+          </a:p>
+        </p:txBody>
+      </p:sp>
+      <p:sp>
+        <p:nvSpPr>
+          <p:cNvPr id="15" name="Shape 13"/>
+          <p:cNvSpPr/>
+          <p:nvPr/>
+        </p:nvSpPr>
+        <p:spPr>
+          <a:xfrm>
+            <a:off x="548640" y="3886200"/>
+            <a:ext cx="11064240" cy="1691640"/>
+          </a:xfrm>
+          <a:prstGeom prst="roundRect">
+            <a:avLst>
+              <a:gd name="adj" fmla="val 4324"/>
+            </a:avLst>
+          </a:prstGeom>
+          <a:solidFill>
+            <a:srgbClr val="EAF2FC"/>
+          </a:solidFill>
+          <a:ln w="12700">
+            <a:solidFill>
+              <a:srgbClr val="EAF2FC"/>
+            </a:solidFill>
+            <a:prstDash val="solid"/>
+          </a:ln>
+        </p:spPr>
+      </p:sp>
+      <p:sp>
+        <p:nvSpPr>
+          <p:cNvPr id="16" name="Text 14"/>
+          <p:cNvSpPr txBox="1"/>
+          <p:nvPr/>
+        </p:nvSpPr>
+        <p:spPr>
+          <a:xfrm>
+            <a:off x="777240" y="4005072"/>
+            <a:ext cx="10607040" cy="1508760"/>
+          </a:xfrm>
+          <a:prstGeom prst="rect">
+            <a:avLst/>
+          </a:prstGeom>
+          <a:noFill/>
+          <a:ln/>
+        </p:spPr>
+        <p:txBody>
+          <a:bodyPr wrap="square" lIns="0" tIns="0" rIns="0" bIns="0" rtlCol="0" anchor="t"/>
+          <a:lstStyle/>
+          <a:p>
+            <a:pPr marL="342900" indent="-342900">
+              <a:spcAft>
+                <a:spcPts val="700"/>
+              </a:spcAft>
+              <a:buSzPct val="100000"/>
+              <a:buChar char="•"/>
+            </a:pPr>
+            <a:r>
+              <a:rPr lang="en-US" sz="1400" dirty="0">
+                <a:solidFill>
+                  <a:srgbClr val="1B1F27"/>
+                </a:solidFill>
+                <a:latin typeface="Calibri" pitchFamily="34" charset="0"/>
+                <a:ea typeface="Calibri" pitchFamily="34" charset="-122"/>
+                <a:cs typeface="Calibri" pitchFamily="34" charset="-120"/>
+              </a:rPr>
+              <a:t>Yes, there is political slant: right-leaning outlets sound much more negative when a Democrat is president (and vice versa).</a:t>
+            </a:r>
+            <a:endParaRPr lang="en-US" sz="1400" dirty="0"/>
+          </a:p>
+          <a:p>
+            <a:pPr marL="342900" indent="-342900">
+              <a:spcAft>
+                <a:spcPts val="700"/>
+              </a:spcAft>
+              <a:buSzPct val="100000"/>
+              <a:buChar char="•"/>
+            </a:pPr>
+            <a:r>
+              <a:rPr lang="en-US" sz="1400" dirty="0">
+                <a:solidFill>
+                  <a:srgbClr val="1B1F27"/>
+                </a:solidFill>
+                <a:latin typeface="Calibri" pitchFamily="34" charset="0"/>
+                <a:ea typeface="Calibri" pitchFamily="34" charset="-122"/>
+                <a:cs typeface="Calibri" pitchFamily="34" charset="-120"/>
+              </a:rPr>
+              <a:t>No, the news isn't overly negative: bad news isn't covered more than equally big good news, and 'inflation falling' stories rise when inflation falls.</a:t>
+            </a:r>
+            <a:endParaRPr lang="en-US" sz="1400" dirty="0"/>
+          </a:p>
+          <a:p>
+            <a:pPr marL="342900" indent="-342900">
+              <a:spcAft>
+                <a:spcPts val="700"/>
+              </a:spcAft>
+              <a:buSzPct val="100000"/>
+              <a:buChar char="•"/>
+            </a:pPr>
+            <a:r>
+              <a:rPr lang="en-US" sz="1400" dirty="0">
+                <a:solidFill>
+                  <a:srgbClr val="1B1F27"/>
+                </a:solidFill>
+                <a:latin typeface="Calibri" pitchFamily="34" charset="0"/>
+                <a:ea typeface="Calibri" pitchFamily="34" charset="-122"/>
+                <a:cs typeface="Calibri" pitchFamily="34" charset="-120"/>
+              </a:rPr>
+              <a:t>Adding news data to our forecast made it 25% worse. Adding everyday-cost data made it 24% better.</a:t>
+            </a:r>
+            <a:endParaRPr lang="en-US" sz="1400" dirty="0"/>
+          </a:p>
+        </p:txBody>
+      </p:sp>
+      <p:sp>
+        <p:nvSpPr>
+          <p:cNvPr id="17" name="Shape 15"/>
+          <p:cNvSpPr/>
+          <p:nvPr/>
+        </p:nvSpPr>
+        <p:spPr>
+          <a:xfrm>
+            <a:off x="548640" y="5715000"/>
+            <a:ext cx="11064240" cy="548640"/>
+          </a:xfrm>
+          <a:prstGeom prst="roundRect">
+            <a:avLst>
+              <a:gd name="adj" fmla="val 13333"/>
             </a:avLst>
           </a:prstGeom>
           <a:solidFill>
@@ -7139,14 +8527,14 @@
       </p:sp>
       <p:sp>
         <p:nvSpPr>
-          <p:cNvPr id="5" name="Text 2"/>
+          <p:cNvPr id="18" name="Text 16"/>
           <p:cNvSpPr txBox="1"/>
           <p:nvPr/>
         </p:nvSpPr>
         <p:spPr>
           <a:xfrm>
-            <a:off x="7726680" y="1554480"/>
-            <a:ext cx="3657600" cy="3931920"/>
+            <a:off x="777240" y="5788152"/>
+            <a:ext cx="10607040" cy="411480"/>
           </a:xfrm>
           <a:prstGeom prst="rect">
             <a:avLst/>
@@ -7155,162 +8543,36 @@
           <a:ln/>
         </p:spPr>
         <p:txBody>
-          <a:bodyPr wrap="square" lIns="0" tIns="0" rIns="0" bIns="0" rtlCol="0" anchor="t"/>
+          <a:bodyPr wrap="square" lIns="0" tIns="0" rIns="0" bIns="0" rtlCol="0" anchor="ctr"/>
           <a:lstStyle/>
           <a:p>
             <a:pPr indent="0" marL="0">
-              <a:spcAft>
-                <a:spcPts val="800"/>
-              </a:spcAft>
               <a:buNone/>
             </a:pPr>
             <a:r>
-              <a:rPr lang="en-US" sz="1800" b="1" dirty="0">
-                <a:solidFill>
-                  <a:schemeClr val="bg1"/>
+              <a:rPr lang="en-US" sz="1500" b="1" dirty="0">
+                <a:solidFill>
+                  <a:srgbClr val="F2B8B5"/>
                 </a:solidFill>
                 <a:latin typeface="Calibri" pitchFamily="34" charset="0"/>
                 <a:ea typeface="Calibri" pitchFamily="34" charset="-122"/>
                 <a:cs typeface="Calibri" pitchFamily="34" charset="-120"/>
               </a:rPr>
-              <a:t>The lesson</a:t>
-            </a:r>
-            <a:endParaRPr lang="en-US" sz="1800" dirty="0"/>
-          </a:p>
-          <a:p>
+              <a:t>What this means:  </a:t>
+            </a:r>
             <a:pPr indent="0" marL="0">
-              <a:spcAft>
-                <a:spcPts val="800"/>
-              </a:spcAft>
               <a:buNone/>
             </a:pPr>
             <a:r>
-              <a:rPr lang="en-US" sz="1400" dirty="0">
-                <a:solidFill>
-                  <a:schemeClr val="bg1"/>
+              <a:rPr lang="en-US" sz="1500" b="1" dirty="0">
+                <a:solidFill>
+                  <a:srgbClr val="FFFFFF"/>
                 </a:solidFill>
                 <a:latin typeface="Calibri" pitchFamily="34" charset="0"/>
                 <a:ea typeface="Calibri" pitchFamily="34" charset="-122"/>
                 <a:cs typeface="Calibri" pitchFamily="34" charset="-120"/>
               </a:rPr>
-              <a:t>Since 2022 people said they felt awful — and kept spending about 2.5% more each year.</a:t>
-            </a:r>
-            <a:endParaRPr lang="en-US" sz="1800" dirty="0"/>
-          </a:p>
-          <a:p>
-            <a:pPr indent="0" marL="0">
-              <a:spcAft>
-                <a:spcPts val="800"/>
-              </a:spcAft>
-              <a:buNone/>
-            </a:pPr>
-            <a:r>
-              <a:rPr lang="en-US" sz="1400" dirty="0">
-                <a:solidFill>
-                  <a:schemeClr val="bg1"/>
-                </a:solidFill>
-                <a:latin typeface="Calibri" pitchFamily="34" charset="0"/>
-                <a:ea typeface="Calibri" pitchFamily="34" charset="-122"/>
-                <a:cs typeface="Calibri" pitchFamily="34" charset="-120"/>
-              </a:rPr>
-              <a:t>Using the survey as-is made spending forecasts 20% worse. Using only the part that matches the economy made them 17% better.</a:t>
-            </a:r>
-            <a:endParaRPr lang="en-US" sz="1800" dirty="0"/>
-          </a:p>
-          <a:p>
-            <a:pPr indent="0" marL="0">
-              <a:buNone/>
-            </a:pPr>
-            <a:r>
-              <a:rPr lang="en-US" sz="1400" b="1" dirty="0">
-                <a:solidFill>
-                  <a:srgbClr val="F2B8B5"/>
-                </a:solidFill>
-                <a:latin typeface="Calibri" pitchFamily="34" charset="0"/>
-                <a:ea typeface="Calibri" pitchFamily="34" charset="-122"/>
-                <a:cs typeface="Calibri" pitchFamily="34" charset="-120"/>
-              </a:rPr>
-              <a:t>So: separate real economic worry from the 'gloom gap' before betting on a recession.</a:t>
-            </a:r>
-            <a:endParaRPr lang="en-US" sz="1800" dirty="0"/>
-          </a:p>
-        </p:txBody>
-      </p:sp>
-      <p:sp>
-        <p:nvSpPr>
-          <p:cNvPr id="6" name="Shape 3"/>
-          <p:cNvSpPr/>
-          <p:nvPr/>
-        </p:nvSpPr>
-        <p:spPr>
-          <a:xfrm>
-            <a:off x="548640" y="5715000"/>
-            <a:ext cx="11064240" cy="548640"/>
-          </a:xfrm>
-          <a:prstGeom prst="roundRect">
-            <a:avLst>
-              <a:gd name="adj" fmla="val 13333"/>
-            </a:avLst>
-          </a:prstGeom>
-          <a:solidFill>
-            <a:srgbClr val="1B1F27"/>
-          </a:solidFill>
-          <a:ln w="12700">
-            <a:solidFill>
-              <a:srgbClr val="1B1F27"/>
-            </a:solidFill>
-            <a:prstDash val="solid"/>
-          </a:ln>
-        </p:spPr>
-      </p:sp>
-      <p:sp>
-        <p:nvSpPr>
-          <p:cNvPr id="7" name="Text 4"/>
-          <p:cNvSpPr txBox="1"/>
-          <p:nvPr/>
-        </p:nvSpPr>
-        <p:spPr>
-          <a:xfrm>
-            <a:off x="777240" y="5788152"/>
-            <a:ext cx="10607040" cy="411480"/>
-          </a:xfrm>
-          <a:prstGeom prst="rect">
-            <a:avLst/>
-          </a:prstGeom>
-          <a:noFill/>
-          <a:ln/>
-        </p:spPr>
-        <p:txBody>
-          <a:bodyPr wrap="square" lIns="0" tIns="0" rIns="0" bIns="0" rtlCol="0" anchor="ctr"/>
-          <a:lstStyle/>
-          <a:p>
-            <a:pPr indent="0" marL="0">
-              <a:buNone/>
-            </a:pPr>
-            <a:r>
-              <a:rPr lang="en-US" sz="1500" b="1" dirty="0">
-                <a:solidFill>
-                  <a:srgbClr val="F2B8B5"/>
-                </a:solidFill>
-                <a:latin typeface="Calibri" pitchFamily="34" charset="0"/>
-                <a:ea typeface="Calibri" pitchFamily="34" charset="-122"/>
-                <a:cs typeface="Calibri" pitchFamily="34" charset="-120"/>
-              </a:rPr>
-              <a:t>What this means:  </a:t>
-            </a:r>
-            <a:pPr indent="0" marL="0">
-              <a:buNone/>
-            </a:pPr>
-            <a:r>
-              <a:rPr lang="en-US" sz="1500" b="1" dirty="0">
-                <a:solidFill>
-                  <a:srgbClr val="FFFFFF"/>
-                </a:solidFill>
-                <a:latin typeface="Calibri" pitchFamily="34" charset="0"/>
-                <a:ea typeface="Calibri" pitchFamily="34" charset="-122"/>
-                <a:cs typeface="Calibri" pitchFamily="34" charset="-120"/>
-              </a:rPr>
-              <a:t>Bottom line: high prices, the survey change and lived experience — not media bias — explain the gloom.</a:t>
+              <a:t>The news has a political tilt, but it isn't driving the mood — knowing the news doesn't help predict it.</a:t>
             </a:r>
             <a:endParaRPr lang="en-US" sz="1500" dirty="0"/>
           </a:p>
@@ -7396,6 +8658,1534 @@
         </p:nvSpPr>
         <p:spPr>
           <a:xfrm>
+            <a:off x="548640" y="320040"/>
+            <a:ext cx="11064240" cy="868680"/>
+          </a:xfrm>
+          <a:prstGeom prst="rect">
+            <a:avLst/>
+          </a:prstGeom>
+          <a:noFill/>
+          <a:ln/>
+        </p:spPr>
+        <p:txBody>
+          <a:bodyPr wrap="square" rtlCol="0" anchor="t"/>
+          <a:lstStyle/>
+          <a:p>
+            <a:pPr indent="0" marL="0">
+              <a:buNone/>
+            </a:pPr>
+            <a:r>
+              <a:rPr lang="en-US" sz="3000" b="1" dirty="0">
+                <a:solidFill>
+                  <a:schemeClr val="tx1"/>
+                </a:solidFill>
+                <a:latin typeface="Cambria" pitchFamily="34" charset="0"/>
+                <a:ea typeface="Cambria" pitchFamily="34" charset="-122"/>
+                <a:cs typeface="Cambria" pitchFamily="34" charset="-120"/>
+              </a:rPr>
+              <a:t>The test: moods kept falling, but the news didn't get worse</a:t>
+            </a:r>
+            <a:endParaRPr lang="en-US" sz="3000" dirty="0"/>
+          </a:p>
+        </p:txBody>
+      </p:sp>
+      <p:graphicFrame>
+        <p:nvGraphicFramePr>
+          <p:cNvPr id="3" name="Chart 0" descr=""/>
+          <p:cNvGraphicFramePr/>
+          <p:nvPr/>
+        </p:nvGraphicFramePr>
+        <p:xfrm>
+          <a:off x="548640" y="1234440"/>
+          <a:ext cx="5394960" cy="4343400"/>
+        </p:xfrm>
+        <a:graphic xmlns:a="http://schemas.openxmlformats.org/drawingml/2006/main">
+          <a:graphicData uri="http://schemas.openxmlformats.org/drawingml/2006/chart">
+            <c:chart xmlns:c="http://schemas.openxmlformats.org/drawingml/2006/chart" r:id="rId1"/>
+          </a:graphicData>
+        </a:graphic>
+      </p:graphicFrame>
+      <p:sp>
+        <p:nvSpPr>
+          <p:cNvPr id="4" name="Shape 1"/>
+          <p:cNvSpPr/>
+          <p:nvPr/>
+        </p:nvSpPr>
+        <p:spPr>
+          <a:xfrm>
+            <a:off x="6309360" y="1325880"/>
+            <a:ext cx="5303520" cy="4206240"/>
+          </a:xfrm>
+          <a:prstGeom prst="roundRect">
+            <a:avLst>
+              <a:gd name="adj" fmla="val 1739"/>
+            </a:avLst>
+          </a:prstGeom>
+          <a:solidFill>
+            <a:srgbClr val="F2F4F7"/>
+          </a:solidFill>
+          <a:ln w="12700">
+            <a:solidFill>
+              <a:srgbClr val="F2F4F7"/>
+            </a:solidFill>
+            <a:prstDash val="solid"/>
+          </a:ln>
+        </p:spPr>
+      </p:sp>
+      <p:sp>
+        <p:nvSpPr>
+          <p:cNvPr id="5" name="Text 2"/>
+          <p:cNvSpPr txBox="1"/>
+          <p:nvPr/>
+        </p:nvSpPr>
+        <p:spPr>
+          <a:xfrm>
+            <a:off x="6537960" y="1508760"/>
+            <a:ext cx="4892040" cy="3931920"/>
+          </a:xfrm>
+          <a:prstGeom prst="rect">
+            <a:avLst/>
+          </a:prstGeom>
+          <a:noFill/>
+          <a:ln/>
+        </p:spPr>
+        <p:txBody>
+          <a:bodyPr wrap="square" lIns="0" tIns="0" rIns="0" bIns="0" rtlCol="0" anchor="t"/>
+          <a:lstStyle/>
+          <a:p>
+            <a:pPr indent="0" marL="0">
+              <a:spcAft>
+                <a:spcPts val="600"/>
+              </a:spcAft>
+              <a:buNone/>
+            </a:pPr>
+            <a:r>
+              <a:rPr lang="en-US" sz="1600" b="1" dirty="0">
+                <a:solidFill>
+                  <a:srgbClr val="1B1F27"/>
+                </a:solidFill>
+                <a:latin typeface="Calibri" pitchFamily="34" charset="0"/>
+                <a:ea typeface="Calibri" pitchFamily="34" charset="-122"/>
+                <a:cs typeface="Calibri" pitchFamily="34" charset="-120"/>
+              </a:rPr>
+              <a:t>What should have happened if media caused it</a:t>
+            </a:r>
+            <a:endParaRPr lang="en-US" sz="1600" dirty="0"/>
+          </a:p>
+          <a:p>
+            <a:pPr indent="0" marL="0">
+              <a:spcAft>
+                <a:spcPts val="1200"/>
+              </a:spcAft>
+              <a:buNone/>
+            </a:pPr>
+            <a:r>
+              <a:rPr lang="en-US" sz="1400" dirty="0">
+                <a:solidFill>
+                  <a:srgbClr val="1B1F27"/>
+                </a:solidFill>
+                <a:latin typeface="Calibri" pitchFamily="34" charset="0"/>
+                <a:ea typeface="Calibri" pitchFamily="34" charset="-122"/>
+                <a:cs typeface="Calibri" pitchFamily="34" charset="-120"/>
+              </a:rPr>
+              <a:t>Sentiment fell another 14.5 points after January 2025. If the news drove that, news coverage should have turned much more negative.</a:t>
+            </a:r>
+            <a:endParaRPr lang="en-US" sz="1600" dirty="0"/>
+          </a:p>
+          <a:p>
+            <a:pPr indent="0" marL="0">
+              <a:spcAft>
+                <a:spcPts val="600"/>
+              </a:spcAft>
+              <a:buNone/>
+            </a:pPr>
+            <a:r>
+              <a:rPr lang="en-US" sz="1600" b="1" dirty="0">
+                <a:solidFill>
+                  <a:srgbClr val="1B1F27"/>
+                </a:solidFill>
+                <a:latin typeface="Calibri" pitchFamily="34" charset="0"/>
+                <a:ea typeface="Calibri" pitchFamily="34" charset="-122"/>
+                <a:cs typeface="Calibri" pitchFamily="34" charset="-120"/>
+              </a:rPr>
+              <a:t>What actually happened</a:t>
+            </a:r>
+            <a:endParaRPr lang="en-US" sz="1600" dirty="0"/>
+          </a:p>
+          <a:p>
+            <a:pPr indent="0" marL="0">
+              <a:spcAft>
+                <a:spcPts val="1200"/>
+              </a:spcAft>
+              <a:buNone/>
+            </a:pPr>
+            <a:r>
+              <a:rPr lang="en-US" sz="1400" dirty="0">
+                <a:solidFill>
+                  <a:srgbClr val="1B1F27"/>
+                </a:solidFill>
+                <a:latin typeface="Calibri" pitchFamily="34" charset="0"/>
+                <a:ea typeface="Calibri" pitchFamily="34" charset="-122"/>
+                <a:cs typeface="Calibri" pitchFamily="34" charset="-120"/>
+              </a:rPr>
+              <a:t>Overall news tone barely changed. Even in the worst case, that change explains about 0.9 point of the 14.5-point drop.</a:t>
+            </a:r>
+            <a:endParaRPr lang="en-US" sz="1600" dirty="0"/>
+          </a:p>
+          <a:p>
+            <a:pPr indent="0" marL="0">
+              <a:buNone/>
+            </a:pPr>
+            <a:r>
+              <a:rPr lang="en-US" sz="1300" dirty="0">
+                <a:solidFill>
+                  <a:srgbClr val="3A4150"/>
+                </a:solidFill>
+                <a:latin typeface="Calibri" pitchFamily="34" charset="0"/>
+                <a:ea typeface="Calibri" pitchFamily="34" charset="-122"/>
+                <a:cs typeface="Calibri" pitchFamily="34" charset="-120"/>
+              </a:rPr>
+              <a:t>Right-leaning outlets did turn more positive under Trump — slant follows whoever is in power — but the total news mood stayed the same.</a:t>
+            </a:r>
+            <a:endParaRPr lang="en-US" sz="1600" dirty="0"/>
+          </a:p>
+        </p:txBody>
+      </p:sp>
+      <p:sp>
+        <p:nvSpPr>
+          <p:cNvPr id="6" name="Shape 3"/>
+          <p:cNvSpPr/>
+          <p:nvPr/>
+        </p:nvSpPr>
+        <p:spPr>
+          <a:xfrm>
+            <a:off x="548640" y="5715000"/>
+            <a:ext cx="11064240" cy="548640"/>
+          </a:xfrm>
+          <a:prstGeom prst="roundRect">
+            <a:avLst>
+              <a:gd name="adj" fmla="val 13333"/>
+            </a:avLst>
+          </a:prstGeom>
+          <a:solidFill>
+            <a:srgbClr val="1B1F27"/>
+          </a:solidFill>
+          <a:ln w="12700">
+            <a:solidFill>
+              <a:srgbClr val="1B1F27"/>
+            </a:solidFill>
+            <a:prstDash val="solid"/>
+          </a:ln>
+        </p:spPr>
+      </p:sp>
+      <p:sp>
+        <p:nvSpPr>
+          <p:cNvPr id="7" name="Text 4"/>
+          <p:cNvSpPr txBox="1"/>
+          <p:nvPr/>
+        </p:nvSpPr>
+        <p:spPr>
+          <a:xfrm>
+            <a:off x="777240" y="5788152"/>
+            <a:ext cx="10607040" cy="411480"/>
+          </a:xfrm>
+          <a:prstGeom prst="rect">
+            <a:avLst/>
+          </a:prstGeom>
+          <a:noFill/>
+          <a:ln/>
+        </p:spPr>
+        <p:txBody>
+          <a:bodyPr wrap="square" lIns="0" tIns="0" rIns="0" bIns="0" rtlCol="0" anchor="ctr"/>
+          <a:lstStyle/>
+          <a:p>
+            <a:pPr indent="0" marL="0">
+              <a:buNone/>
+            </a:pPr>
+            <a:r>
+              <a:rPr lang="en-US" sz="1500" b="1" dirty="0">
+                <a:solidFill>
+                  <a:srgbClr val="F2B8B5"/>
+                </a:solidFill>
+                <a:latin typeface="Calibri" pitchFamily="34" charset="0"/>
+                <a:ea typeface="Calibri" pitchFamily="34" charset="-122"/>
+                <a:cs typeface="Calibri" pitchFamily="34" charset="-120"/>
+              </a:rPr>
+              <a:t>What this means:  </a:t>
+            </a:r>
+            <a:pPr indent="0" marL="0">
+              <a:buNone/>
+            </a:pPr>
+            <a:r>
+              <a:rPr lang="en-US" sz="1500" b="1" dirty="0">
+                <a:solidFill>
+                  <a:srgbClr val="FFFFFF"/>
+                </a:solidFill>
+                <a:latin typeface="Calibri" pitchFamily="34" charset="0"/>
+                <a:ea typeface="Calibri" pitchFamily="34" charset="-122"/>
+                <a:cs typeface="Calibri" pitchFamily="34" charset="-120"/>
+              </a:rPr>
+              <a:t>The news can amplify the mood, but it didn't cause the collapse.</a:t>
+            </a:r>
+            <a:endParaRPr lang="en-US" sz="1500" dirty="0"/>
+          </a:p>
+        </p:txBody>
+      </p:sp>
+      <p:sp>
+        <p:nvSpPr>
+          <p:cNvPr id="25" name="Slide Number Placeholder 0"/>
+          <p:cNvSpPr>
+            <a:spLocks noGrp="1"/>
+          </p:cNvSpPr>
+          <p:nvPr>
+            <p:ph type="sldNum" sz="quarter" idx="4294967295"/>
+          </p:nvPr>
+        </p:nvSpPr>
+        <p:spPr>
+          <a:xfrm>
+            <a:off x="11247120" y="6400800"/>
+            <a:ext cx="457200" cy="274320"/>
+          </a:xfrm>
+          <a:prstGeom prst="rect">
+            <a:avLst/>
+          </a:prstGeom>
+          <a:extLst>
+            <a:ext uri="{C572A759-6A51-4108-AA02-DFA0A04FC94B}">
+              <ma14:wrappingTextBoxFlag xmlns:ma14="http://schemas.microsoft.com/office/mac/drawingml/2011/main" val="0"/>
+            </a:ext>
+          </a:extLst>
+        </p:spPr>
+        <p:txBody>
+          <a:bodyPr/>
+          <a:lstStyle>
+            <a:lvl1pPr>
+              <a:defRPr sz="900">
+                <a:solidFill>
+                  <a:srgbClr val="7A8392"/>
+                </a:solidFill>
+              </a:defRPr>
+            </a:lvl1pPr>
+          </a:lstStyle>
+          <a:p>
+            <a:pPr algn="l"/>
+            <a:fld id="{F7021451-1387-4CA6-816F-3879F97B5CBC}" type="slidenum">
+              <a:rPr b="0" lang="en-US"/>
+              <a:t>13</a:t>
+            </a:fld>
+            <a:endParaRPr lang="en-US"/>
+          </a:p>
+        </p:txBody>
+      </p:sp>
+    </p:spTree>
+  </p:cSld>
+  <p:clrMapOvr>
+    <a:masterClrMapping/>
+  </p:clrMapOvr>
+</p:sld>
+</file>
+
+<file path=ppt/slides/slide14.xml><?xml version="1.0" encoding="utf-8"?>
+<p:sld xmlns:a="http://schemas.openxmlformats.org/drawingml/2006/main" xmlns:r="http://schemas.openxmlformats.org/officeDocument/2006/relationships" xmlns:p="http://schemas.openxmlformats.org/presentationml/2006/main">
+  <p:cSld name="Slide 14">
+    <p:spTree>
+      <p:nvGrpSpPr>
+        <p:cNvPr id="1" name=""/>
+        <p:cNvGrpSpPr/>
+        <p:nvPr/>
+      </p:nvGrpSpPr>
+      <p:grpSpPr>
+        <a:xfrm>
+          <a:off x="0" y="0"/>
+          <a:ext cx="0" cy="0"/>
+          <a:chOff x="0" y="0"/>
+          <a:chExt cx="0" cy="0"/>
+        </a:xfrm>
+      </p:grpSpPr>
+      <p:sp>
+        <p:nvSpPr>
+          <p:cNvPr id="2" name="Text 0"/>
+          <p:cNvSpPr/>
+          <p:nvPr>
+            <p:ph idx="100" type="title" hasCustomPrompt="1"/>
+          </p:nvPr>
+        </p:nvSpPr>
+        <p:spPr>
+          <a:xfrm>
+            <a:off x="548640" y="320040"/>
+            <a:ext cx="11064240" cy="868680"/>
+          </a:xfrm>
+          <a:prstGeom prst="rect">
+            <a:avLst/>
+          </a:prstGeom>
+          <a:noFill/>
+          <a:ln/>
+        </p:spPr>
+        <p:txBody>
+          <a:bodyPr wrap="square" rtlCol="0" anchor="t"/>
+          <a:lstStyle/>
+          <a:p>
+            <a:pPr indent="0" marL="0">
+              <a:buNone/>
+            </a:pPr>
+            <a:r>
+              <a:rPr lang="en-US" sz="3000" b="1" dirty="0">
+                <a:solidFill>
+                  <a:schemeClr val="tx1"/>
+                </a:solidFill>
+                <a:latin typeface="Cambria" pitchFamily="34" charset="0"/>
+                <a:ea typeface="Cambria" pitchFamily="34" charset="-122"/>
+                <a:cs typeface="Cambria" pitchFamily="34" charset="-120"/>
+              </a:rPr>
+              <a:t>So what is causing the mismatch?</a:t>
+            </a:r>
+            <a:endParaRPr lang="en-US" sz="3000" dirty="0"/>
+          </a:p>
+        </p:txBody>
+      </p:sp>
+      <p:sp>
+        <p:nvSpPr>
+          <p:cNvPr id="3" name="Shape 1"/>
+          <p:cNvSpPr/>
+          <p:nvPr/>
+        </p:nvSpPr>
+        <p:spPr>
+          <a:xfrm>
+            <a:off x="548640" y="1325880"/>
+            <a:ext cx="3520440" cy="4206240"/>
+          </a:xfrm>
+          <a:prstGeom prst="roundRect">
+            <a:avLst>
+              <a:gd name="adj" fmla="val 2078"/>
+            </a:avLst>
+          </a:prstGeom>
+          <a:solidFill>
+            <a:srgbClr val="F2F4F7"/>
+          </a:solidFill>
+          <a:ln w="12700">
+            <a:solidFill>
+              <a:srgbClr val="F2F4F7"/>
+            </a:solidFill>
+            <a:prstDash val="solid"/>
+          </a:ln>
+        </p:spPr>
+      </p:sp>
+      <p:sp>
+        <p:nvSpPr>
+          <p:cNvPr id="4" name="Shape 2"/>
+          <p:cNvSpPr/>
+          <p:nvPr/>
+        </p:nvSpPr>
+        <p:spPr>
+          <a:xfrm>
+            <a:off x="777240" y="1508760"/>
+            <a:ext cx="3063240" cy="502920"/>
+          </a:xfrm>
+          <a:prstGeom prst="roundRect">
+            <a:avLst>
+              <a:gd name="adj" fmla="val 18182"/>
+            </a:avLst>
+          </a:prstGeom>
+          <a:solidFill>
+            <a:srgbClr val="C8433F"/>
+          </a:solidFill>
+          <a:ln w="12700">
+            <a:solidFill>
+              <a:srgbClr val="C8433F"/>
+            </a:solidFill>
+            <a:prstDash val="solid"/>
+          </a:ln>
+        </p:spPr>
+      </p:sp>
+      <p:sp>
+        <p:nvSpPr>
+          <p:cNvPr id="5" name="Text 3"/>
+          <p:cNvSpPr txBox="1"/>
+          <p:nvPr/>
+        </p:nvSpPr>
+        <p:spPr>
+          <a:xfrm>
+            <a:off x="868680" y="1508760"/>
+            <a:ext cx="2880360" cy="502920"/>
+          </a:xfrm>
+          <a:prstGeom prst="rect">
+            <a:avLst/>
+          </a:prstGeom>
+          <a:noFill/>
+          <a:ln/>
+        </p:spPr>
+        <p:txBody>
+          <a:bodyPr wrap="square" lIns="0" tIns="0" rIns="0" bIns="0" rtlCol="0" anchor="ctr"/>
+          <a:lstStyle/>
+          <a:p>
+            <a:pPr algn="ctr" indent="0" marL="0">
+              <a:buNone/>
+            </a:pPr>
+            <a:r>
+              <a:rPr lang="en-US" sz="1400" b="1" dirty="0">
+                <a:solidFill>
+                  <a:schemeClr val="bg1"/>
+                </a:solidFill>
+                <a:latin typeface="Calibri" pitchFamily="34" charset="0"/>
+                <a:ea typeface="Calibri" pitchFamily="34" charset="-122"/>
+                <a:cs typeface="Calibri" pitchFamily="34" charset="-120"/>
+              </a:rPr>
+              <a:t>Real costs the headline numbers miss</a:t>
+            </a:r>
+            <a:endParaRPr lang="en-US" sz="1400" dirty="0"/>
+          </a:p>
+        </p:txBody>
+      </p:sp>
+      <p:sp>
+        <p:nvSpPr>
+          <p:cNvPr id="6" name="Text 4"/>
+          <p:cNvSpPr txBox="1"/>
+          <p:nvPr/>
+        </p:nvSpPr>
+        <p:spPr>
+          <a:xfrm>
+            <a:off x="822960" y="2148840"/>
+            <a:ext cx="3017520" cy="548640"/>
+          </a:xfrm>
+          <a:prstGeom prst="rect">
+            <a:avLst/>
+          </a:prstGeom>
+          <a:noFill/>
+          <a:ln/>
+        </p:spPr>
+        <p:txBody>
+          <a:bodyPr wrap="square" lIns="0" tIns="0" rIns="0" bIns="0" rtlCol="0" anchor="t"/>
+          <a:lstStyle/>
+          <a:p>
+            <a:pPr indent="0" marL="0">
+              <a:buNone/>
+            </a:pPr>
+            <a:r>
+              <a:rPr lang="en-US" sz="2600" b="1" dirty="0">
+                <a:solidFill>
+                  <a:srgbClr val="1B1F27"/>
+                </a:solidFill>
+                <a:latin typeface="Cambria" pitchFamily="34" charset="0"/>
+                <a:ea typeface="Cambria" pitchFamily="34" charset="-122"/>
+                <a:cs typeface="Cambria" pitchFamily="34" charset="-120"/>
+              </a:rPr>
+              <a:t>20 points</a:t>
+            </a:r>
+            <a:endParaRPr lang="en-US" sz="2600" dirty="0"/>
+          </a:p>
+        </p:txBody>
+      </p:sp>
+      <p:sp>
+        <p:nvSpPr>
+          <p:cNvPr id="7" name="Text 5"/>
+          <p:cNvSpPr txBox="1"/>
+          <p:nvPr/>
+        </p:nvSpPr>
+        <p:spPr>
+          <a:xfrm>
+            <a:off x="822960" y="2788920"/>
+            <a:ext cx="3017520" cy="2651760"/>
+          </a:xfrm>
+          <a:prstGeom prst="rect">
+            <a:avLst/>
+          </a:prstGeom>
+          <a:noFill/>
+          <a:ln/>
+        </p:spPr>
+        <p:txBody>
+          <a:bodyPr wrap="square" lIns="0" tIns="0" rIns="0" bIns="0" rtlCol="0" anchor="t"/>
+          <a:lstStyle/>
+          <a:p>
+            <a:pPr marL="342900" indent="-342900">
+              <a:spcAft>
+                <a:spcPts val="700"/>
+              </a:spcAft>
+              <a:buSzPct val="100000"/>
+              <a:buChar char="•"/>
+            </a:pPr>
+            <a:r>
+              <a:rPr lang="en-US" sz="1500" dirty="0">
+                <a:solidFill>
+                  <a:srgbClr val="1B1F27"/>
+                </a:solidFill>
+                <a:latin typeface="Calibri" pitchFamily="34" charset="0"/>
+                <a:ea typeface="Calibri" pitchFamily="34" charset="-122"/>
+                <a:cs typeface="Calibri" pitchFamily="34" charset="-120"/>
+              </a:rPr>
+              <a:t>Prices ~11% above normal; paychecks behind</a:t>
+            </a:r>
+            <a:endParaRPr lang="en-US" sz="1500" dirty="0"/>
+          </a:p>
+          <a:p>
+            <a:pPr marL="342900" indent="-342900">
+              <a:spcAft>
+                <a:spcPts val="700"/>
+              </a:spcAft>
+              <a:buSzPct val="100000"/>
+              <a:buChar char="•"/>
+            </a:pPr>
+            <a:r>
+              <a:rPr lang="en-US" sz="1500" dirty="0">
+                <a:solidFill>
+                  <a:srgbClr val="1B1F27"/>
+                </a:solidFill>
+                <a:latin typeface="Calibri" pitchFamily="34" charset="0"/>
+                <a:ea typeface="Calibri" pitchFamily="34" charset="-122"/>
+                <a:cs typeface="Calibri" pitchFamily="34" charset="-120"/>
+              </a:rPr>
+              <a:t>Mortgage rates: 44% say it's a bad time to buy a home</a:t>
+            </a:r>
+            <a:endParaRPr lang="en-US" sz="1500" dirty="0"/>
+          </a:p>
+          <a:p>
+            <a:pPr marL="342900" indent="-342900">
+              <a:spcAft>
+                <a:spcPts val="700"/>
+              </a:spcAft>
+              <a:buSzPct val="100000"/>
+              <a:buChar char="•"/>
+            </a:pPr>
+            <a:r>
+              <a:rPr lang="en-US" sz="1500" dirty="0">
+                <a:solidFill>
+                  <a:srgbClr val="1B1F27"/>
+                </a:solidFill>
+                <a:latin typeface="Calibri" pitchFamily="34" charset="0"/>
+                <a:ea typeface="Calibri" pitchFamily="34" charset="-122"/>
+                <a:cs typeface="Calibri" pitchFamily="34" charset="-120"/>
+              </a:rPr>
+              <a:t>Tariff &amp; shutdown uncertainty</a:t>
+            </a:r>
+            <a:endParaRPr lang="en-US" sz="1500" dirty="0"/>
+          </a:p>
+        </p:txBody>
+      </p:sp>
+      <p:sp>
+        <p:nvSpPr>
+          <p:cNvPr id="8" name="Shape 6"/>
+          <p:cNvSpPr/>
+          <p:nvPr/>
+        </p:nvSpPr>
+        <p:spPr>
+          <a:xfrm>
+            <a:off x="4297680" y="1325880"/>
+            <a:ext cx="3520440" cy="4206240"/>
+          </a:xfrm>
+          <a:prstGeom prst="roundRect">
+            <a:avLst>
+              <a:gd name="adj" fmla="val 2078"/>
+            </a:avLst>
+          </a:prstGeom>
+          <a:solidFill>
+            <a:srgbClr val="F2F4F7"/>
+          </a:solidFill>
+          <a:ln w="12700">
+            <a:solidFill>
+              <a:srgbClr val="F2F4F7"/>
+            </a:solidFill>
+            <a:prstDash val="solid"/>
+          </a:ln>
+        </p:spPr>
+      </p:sp>
+      <p:sp>
+        <p:nvSpPr>
+          <p:cNvPr id="9" name="Shape 7"/>
+          <p:cNvSpPr/>
+          <p:nvPr/>
+        </p:nvSpPr>
+        <p:spPr>
+          <a:xfrm>
+            <a:off x="4526280" y="1508760"/>
+            <a:ext cx="3063240" cy="502920"/>
+          </a:xfrm>
+          <a:prstGeom prst="roundRect">
+            <a:avLst>
+              <a:gd name="adj" fmla="val 18182"/>
+            </a:avLst>
+          </a:prstGeom>
+          <a:solidFill>
+            <a:srgbClr val="2A78D6"/>
+          </a:solidFill>
+          <a:ln w="12700">
+            <a:solidFill>
+              <a:srgbClr val="2A78D6"/>
+            </a:solidFill>
+            <a:prstDash val="solid"/>
+          </a:ln>
+        </p:spPr>
+      </p:sp>
+      <p:sp>
+        <p:nvSpPr>
+          <p:cNvPr id="10" name="Text 8"/>
+          <p:cNvSpPr txBox="1"/>
+          <p:nvPr/>
+        </p:nvSpPr>
+        <p:spPr>
+          <a:xfrm>
+            <a:off x="4617720" y="1508760"/>
+            <a:ext cx="2880360" cy="502920"/>
+          </a:xfrm>
+          <a:prstGeom prst="rect">
+            <a:avLst/>
+          </a:prstGeom>
+          <a:noFill/>
+          <a:ln/>
+        </p:spPr>
+        <p:txBody>
+          <a:bodyPr wrap="square" lIns="0" tIns="0" rIns="0" bIns="0" rtlCol="0" anchor="ctr"/>
+          <a:lstStyle/>
+          <a:p>
+            <a:pPr algn="ctr" indent="0" marL="0">
+              <a:buNone/>
+            </a:pPr>
+            <a:r>
+              <a:rPr lang="en-US" sz="1400" b="1" dirty="0">
+                <a:solidFill>
+                  <a:schemeClr val="bg1"/>
+                </a:solidFill>
+                <a:latin typeface="Calibri" pitchFamily="34" charset="0"/>
+                <a:ea typeface="Calibri" pitchFamily="34" charset="-122"/>
+                <a:cs typeface="Calibri" pitchFamily="34" charset="-120"/>
+              </a:rPr>
+              <a:t>How it's measured</a:t>
+            </a:r>
+            <a:endParaRPr lang="en-US" sz="1400" dirty="0"/>
+          </a:p>
+        </p:txBody>
+      </p:sp>
+      <p:sp>
+        <p:nvSpPr>
+          <p:cNvPr id="11" name="Text 9"/>
+          <p:cNvSpPr txBox="1"/>
+          <p:nvPr/>
+        </p:nvSpPr>
+        <p:spPr>
+          <a:xfrm>
+            <a:off x="4572000" y="2148840"/>
+            <a:ext cx="3017520" cy="548640"/>
+          </a:xfrm>
+          <a:prstGeom prst="rect">
+            <a:avLst/>
+          </a:prstGeom>
+          <a:noFill/>
+          <a:ln/>
+        </p:spPr>
+        <p:txBody>
+          <a:bodyPr wrap="square" lIns="0" tIns="0" rIns="0" bIns="0" rtlCol="0" anchor="t"/>
+          <a:lstStyle/>
+          <a:p>
+            <a:pPr indent="0" marL="0">
+              <a:buNone/>
+            </a:pPr>
+            <a:r>
+              <a:rPr lang="en-US" sz="2600" b="1" dirty="0">
+                <a:solidFill>
+                  <a:srgbClr val="1B1F27"/>
+                </a:solidFill>
+                <a:latin typeface="Cambria" pitchFamily="34" charset="0"/>
+                <a:ea typeface="Cambria" pitchFamily="34" charset="-122"/>
+                <a:cs typeface="Cambria" pitchFamily="34" charset="-120"/>
+              </a:rPr>
+              <a:t>9 points</a:t>
+            </a:r>
+            <a:endParaRPr lang="en-US" sz="2600" dirty="0"/>
+          </a:p>
+        </p:txBody>
+      </p:sp>
+      <p:sp>
+        <p:nvSpPr>
+          <p:cNvPr id="12" name="Text 10"/>
+          <p:cNvSpPr txBox="1"/>
+          <p:nvPr/>
+        </p:nvSpPr>
+        <p:spPr>
+          <a:xfrm>
+            <a:off x="4572000" y="2788920"/>
+            <a:ext cx="3017520" cy="2651760"/>
+          </a:xfrm>
+          <a:prstGeom prst="rect">
+            <a:avLst/>
+          </a:prstGeom>
+          <a:noFill/>
+          <a:ln/>
+        </p:spPr>
+        <p:txBody>
+          <a:bodyPr wrap="square" lIns="0" tIns="0" rIns="0" bIns="0" rtlCol="0" anchor="t"/>
+          <a:lstStyle/>
+          <a:p>
+            <a:pPr marL="342900" indent="-342900">
+              <a:spcAft>
+                <a:spcPts val="700"/>
+              </a:spcAft>
+              <a:buSzPct val="100000"/>
+              <a:buChar char="•"/>
+            </a:pPr>
+            <a:r>
+              <a:rPr lang="en-US" sz="1500" dirty="0">
+                <a:solidFill>
+                  <a:srgbClr val="1B1F27"/>
+                </a:solidFill>
+                <a:latin typeface="Calibri" pitchFamily="34" charset="0"/>
+                <a:ea typeface="Calibri" pitchFamily="34" charset="-122"/>
+                <a:cs typeface="Calibri" pitchFamily="34" charset="-120"/>
+              </a:rPr>
+              <a:t>Survey moved from phone to online (−6.6)</a:t>
+            </a:r>
+            <a:endParaRPr lang="en-US" sz="1500" dirty="0"/>
+          </a:p>
+          <a:p>
+            <a:pPr marL="342900" indent="-342900">
+              <a:spcAft>
+                <a:spcPts val="700"/>
+              </a:spcAft>
+              <a:buSzPct val="100000"/>
+              <a:buChar char="•"/>
+            </a:pPr>
+            <a:r>
+              <a:rPr lang="en-US" sz="1500" dirty="0">
+                <a:solidFill>
+                  <a:srgbClr val="1B1F27"/>
+                </a:solidFill>
+                <a:latin typeface="Calibri" pitchFamily="34" charset="0"/>
+                <a:ea typeface="Calibri" pitchFamily="34" charset="-122"/>
+                <a:cs typeface="Calibri" pitchFamily="34" charset="-120"/>
+              </a:rPr>
+              <a:t>Fewer Republicans answering (−2.4)</a:t>
+            </a:r>
+            <a:endParaRPr lang="en-US" sz="1500" dirty="0"/>
+          </a:p>
+          <a:p>
+            <a:pPr marL="342900" indent="-342900">
+              <a:spcAft>
+                <a:spcPts val="700"/>
+              </a:spcAft>
+              <a:buSzPct val="100000"/>
+              <a:buChar char="•"/>
+            </a:pPr>
+            <a:r>
+              <a:rPr lang="en-US" sz="1500" dirty="0">
+                <a:solidFill>
+                  <a:srgbClr val="1B1F27"/>
+                </a:solidFill>
+                <a:latin typeface="Calibri" pitchFamily="34" charset="0"/>
+                <a:ea typeface="Calibri" pitchFamily="34" charset="-122"/>
+                <a:cs typeface="Calibri" pitchFamily="34" charset="-120"/>
+              </a:rPr>
+              <a:t>Old models never saw a shock like this</a:t>
+            </a:r>
+            <a:endParaRPr lang="en-US" sz="1500" dirty="0"/>
+          </a:p>
+        </p:txBody>
+      </p:sp>
+      <p:sp>
+        <p:nvSpPr>
+          <p:cNvPr id="13" name="Shape 11"/>
+          <p:cNvSpPr/>
+          <p:nvPr/>
+        </p:nvSpPr>
+        <p:spPr>
+          <a:xfrm>
+            <a:off x="8046720" y="1325880"/>
+            <a:ext cx="3520440" cy="4206240"/>
+          </a:xfrm>
+          <a:prstGeom prst="roundRect">
+            <a:avLst>
+              <a:gd name="adj" fmla="val 2078"/>
+            </a:avLst>
+          </a:prstGeom>
+          <a:solidFill>
+            <a:srgbClr val="F2F4F7"/>
+          </a:solidFill>
+          <a:ln w="12700">
+            <a:solidFill>
+              <a:srgbClr val="F2F4F7"/>
+            </a:solidFill>
+            <a:prstDash val="solid"/>
+          </a:ln>
+        </p:spPr>
+      </p:sp>
+      <p:sp>
+        <p:nvSpPr>
+          <p:cNvPr id="14" name="Shape 12"/>
+          <p:cNvSpPr/>
+          <p:nvPr/>
+        </p:nvSpPr>
+        <p:spPr>
+          <a:xfrm>
+            <a:off x="8275320" y="1508760"/>
+            <a:ext cx="3063240" cy="502920"/>
+          </a:xfrm>
+          <a:prstGeom prst="roundRect">
+            <a:avLst>
+              <a:gd name="adj" fmla="val 18182"/>
+            </a:avLst>
+          </a:prstGeom>
+          <a:solidFill>
+            <a:srgbClr val="D99A1E"/>
+          </a:solidFill>
+          <a:ln w="12700">
+            <a:solidFill>
+              <a:srgbClr val="D99A1E"/>
+            </a:solidFill>
+            <a:prstDash val="solid"/>
+          </a:ln>
+        </p:spPr>
+      </p:sp>
+      <p:sp>
+        <p:nvSpPr>
+          <p:cNvPr id="15" name="Text 13"/>
+          <p:cNvSpPr txBox="1"/>
+          <p:nvPr/>
+        </p:nvSpPr>
+        <p:spPr>
+          <a:xfrm>
+            <a:off x="8366760" y="1508760"/>
+            <a:ext cx="2880360" cy="502920"/>
+          </a:xfrm>
+          <a:prstGeom prst="rect">
+            <a:avLst/>
+          </a:prstGeom>
+          <a:noFill/>
+          <a:ln/>
+        </p:spPr>
+        <p:txBody>
+          <a:bodyPr wrap="square" lIns="0" tIns="0" rIns="0" bIns="0" rtlCol="0" anchor="ctr"/>
+          <a:lstStyle/>
+          <a:p>
+            <a:pPr algn="ctr" indent="0" marL="0">
+              <a:buNone/>
+            </a:pPr>
+            <a:r>
+              <a:rPr lang="en-US" sz="1400" b="1" dirty="0">
+                <a:solidFill>
+                  <a:schemeClr val="bg1"/>
+                </a:solidFill>
+                <a:latin typeface="Calibri" pitchFamily="34" charset="0"/>
+                <a:ea typeface="Calibri" pitchFamily="34" charset="-122"/>
+                <a:cs typeface="Calibri" pitchFamily="34" charset="-120"/>
+              </a:rPr>
+              <a:t>How people interpret it</a:t>
+            </a:r>
+            <a:endParaRPr lang="en-US" sz="1400" dirty="0"/>
+          </a:p>
+        </p:txBody>
+      </p:sp>
+      <p:sp>
+        <p:nvSpPr>
+          <p:cNvPr id="16" name="Text 14"/>
+          <p:cNvSpPr txBox="1"/>
+          <p:nvPr/>
+        </p:nvSpPr>
+        <p:spPr>
+          <a:xfrm>
+            <a:off x="8321040" y="2148840"/>
+            <a:ext cx="3017520" cy="548640"/>
+          </a:xfrm>
+          <a:prstGeom prst="rect">
+            <a:avLst/>
+          </a:prstGeom>
+          <a:noFill/>
+          <a:ln/>
+        </p:spPr>
+        <p:txBody>
+          <a:bodyPr wrap="square" lIns="0" tIns="0" rIns="0" bIns="0" rtlCol="0" anchor="t"/>
+          <a:lstStyle/>
+          <a:p>
+            <a:pPr indent="0" marL="0">
+              <a:buNone/>
+            </a:pPr>
+            <a:r>
+              <a:rPr lang="en-US" sz="2600" b="1" dirty="0">
+                <a:solidFill>
+                  <a:srgbClr val="1B1F27"/>
+                </a:solidFill>
+                <a:latin typeface="Cambria" pitchFamily="34" charset="0"/>
+                <a:ea typeface="Cambria" pitchFamily="34" charset="-122"/>
+                <a:cs typeface="Cambria" pitchFamily="34" charset="-120"/>
+              </a:rPr>
+              <a:t>who is hit hardest</a:t>
+            </a:r>
+            <a:endParaRPr lang="en-US" sz="2600" dirty="0"/>
+          </a:p>
+        </p:txBody>
+      </p:sp>
+      <p:sp>
+        <p:nvSpPr>
+          <p:cNvPr id="17" name="Text 15"/>
+          <p:cNvSpPr txBox="1"/>
+          <p:nvPr/>
+        </p:nvSpPr>
+        <p:spPr>
+          <a:xfrm>
+            <a:off x="8321040" y="2788920"/>
+            <a:ext cx="3017520" cy="2651760"/>
+          </a:xfrm>
+          <a:prstGeom prst="rect">
+            <a:avLst/>
+          </a:prstGeom>
+          <a:noFill/>
+          <a:ln/>
+        </p:spPr>
+        <p:txBody>
+          <a:bodyPr wrap="square" lIns="0" tIns="0" rIns="0" bIns="0" rtlCol="0" anchor="t"/>
+          <a:lstStyle/>
+          <a:p>
+            <a:pPr marL="342900" indent="-342900">
+              <a:spcAft>
+                <a:spcPts val="700"/>
+              </a:spcAft>
+              <a:buSzPct val="100000"/>
+              <a:buChar char="•"/>
+            </a:pPr>
+            <a:r>
+              <a:rPr lang="en-US" sz="1500" dirty="0">
+                <a:solidFill>
+                  <a:srgbClr val="1B1F27"/>
+                </a:solidFill>
+                <a:latin typeface="Calibri" pitchFamily="34" charset="0"/>
+                <a:ea typeface="Calibri" pitchFamily="34" charset="-122"/>
+                <a:cs typeface="Calibri" pitchFamily="34" charset="-120"/>
+              </a:rPr>
+              <a:t>Young adults: first big inflation (~78% of their extra drop)</a:t>
+            </a:r>
+            <a:endParaRPr lang="en-US" sz="1500" dirty="0"/>
+          </a:p>
+          <a:p>
+            <a:pPr marL="342900" indent="-342900">
+              <a:spcAft>
+                <a:spcPts val="700"/>
+              </a:spcAft>
+              <a:buSzPct val="100000"/>
+              <a:buChar char="•"/>
+            </a:pPr>
+            <a:r>
+              <a:rPr lang="en-US" sz="1500" dirty="0">
+                <a:solidFill>
+                  <a:srgbClr val="1B1F27"/>
+                </a:solidFill>
+                <a:latin typeface="Calibri" pitchFamily="34" charset="0"/>
+                <a:ea typeface="Calibri" pitchFamily="34" charset="-122"/>
+                <a:cs typeface="Calibri" pitchFamily="34" charset="-120"/>
+              </a:rPr>
+              <a:t>Party in power feels better</a:t>
+            </a:r>
+            <a:endParaRPr lang="en-US" sz="1500" dirty="0"/>
+          </a:p>
+          <a:p>
+            <a:pPr marL="342900" indent="-342900">
+              <a:spcAft>
+                <a:spcPts val="700"/>
+              </a:spcAft>
+              <a:buSzPct val="100000"/>
+              <a:buChar char="•"/>
+            </a:pPr>
+            <a:r>
+              <a:rPr lang="en-US" sz="1500" dirty="0">
+                <a:solidFill>
+                  <a:srgbClr val="1B1F27"/>
+                </a:solidFill>
+                <a:latin typeface="Calibri" pitchFamily="34" charset="0"/>
+                <a:ea typeface="Calibri" pitchFamily="34" charset="-122"/>
+                <a:cs typeface="Calibri" pitchFamily="34" charset="-120"/>
+              </a:rPr>
+              <a:t>Media: ~0.9 point — not the cause</a:t>
+            </a:r>
+            <a:endParaRPr lang="en-US" sz="1500" dirty="0"/>
+          </a:p>
+        </p:txBody>
+      </p:sp>
+      <p:sp>
+        <p:nvSpPr>
+          <p:cNvPr id="18" name="Shape 16"/>
+          <p:cNvSpPr/>
+          <p:nvPr/>
+        </p:nvSpPr>
+        <p:spPr>
+          <a:xfrm>
+            <a:off x="548640" y="5715000"/>
+            <a:ext cx="11064240" cy="548640"/>
+          </a:xfrm>
+          <a:prstGeom prst="roundRect">
+            <a:avLst>
+              <a:gd name="adj" fmla="val 13333"/>
+            </a:avLst>
+          </a:prstGeom>
+          <a:solidFill>
+            <a:srgbClr val="1B1F27"/>
+          </a:solidFill>
+          <a:ln w="12700">
+            <a:solidFill>
+              <a:srgbClr val="1B1F27"/>
+            </a:solidFill>
+            <a:prstDash val="solid"/>
+          </a:ln>
+        </p:spPr>
+      </p:sp>
+      <p:sp>
+        <p:nvSpPr>
+          <p:cNvPr id="19" name="Text 17"/>
+          <p:cNvSpPr txBox="1"/>
+          <p:nvPr/>
+        </p:nvSpPr>
+        <p:spPr>
+          <a:xfrm>
+            <a:off x="777240" y="5788152"/>
+            <a:ext cx="10607040" cy="411480"/>
+          </a:xfrm>
+          <a:prstGeom prst="rect">
+            <a:avLst/>
+          </a:prstGeom>
+          <a:noFill/>
+          <a:ln/>
+        </p:spPr>
+        <p:txBody>
+          <a:bodyPr wrap="square" lIns="0" tIns="0" rIns="0" bIns="0" rtlCol="0" anchor="ctr"/>
+          <a:lstStyle/>
+          <a:p>
+            <a:pPr indent="0" marL="0">
+              <a:buNone/>
+            </a:pPr>
+            <a:r>
+              <a:rPr lang="en-US" sz="1500" b="1" dirty="0">
+                <a:solidFill>
+                  <a:srgbClr val="F2B8B5"/>
+                </a:solidFill>
+                <a:latin typeface="Calibri" pitchFamily="34" charset="0"/>
+                <a:ea typeface="Calibri" pitchFamily="34" charset="-122"/>
+                <a:cs typeface="Calibri" pitchFamily="34" charset="-120"/>
+              </a:rPr>
+              <a:t>What this means:  </a:t>
+            </a:r>
+            <a:pPr indent="0" marL="0">
+              <a:buNone/>
+            </a:pPr>
+            <a:r>
+              <a:rPr lang="en-US" sz="1500" b="1" dirty="0">
+                <a:solidFill>
+                  <a:srgbClr val="FFFFFF"/>
+                </a:solidFill>
+                <a:latin typeface="Calibri" pitchFamily="34" charset="0"/>
+                <a:ea typeface="Calibri" pitchFamily="34" charset="-122"/>
+                <a:cs typeface="Calibri" pitchFamily="34" charset="-120"/>
+              </a:rPr>
+              <a:t>Of 41 points: ~20 real costs, ~9 measurement, ~12 unexplained — and media explains about 1.</a:t>
+            </a:r>
+            <a:endParaRPr lang="en-US" sz="1500" dirty="0"/>
+          </a:p>
+        </p:txBody>
+      </p:sp>
+      <p:sp>
+        <p:nvSpPr>
+          <p:cNvPr id="25" name="Slide Number Placeholder 0"/>
+          <p:cNvSpPr>
+            <a:spLocks noGrp="1"/>
+          </p:cNvSpPr>
+          <p:nvPr>
+            <p:ph type="sldNum" sz="quarter" idx="4294967295"/>
+          </p:nvPr>
+        </p:nvSpPr>
+        <p:spPr>
+          <a:xfrm>
+            <a:off x="11247120" y="6400800"/>
+            <a:ext cx="457200" cy="274320"/>
+          </a:xfrm>
+          <a:prstGeom prst="rect">
+            <a:avLst/>
+          </a:prstGeom>
+          <a:extLst>
+            <a:ext uri="{C572A759-6A51-4108-AA02-DFA0A04FC94B}">
+              <ma14:wrappingTextBoxFlag xmlns:ma14="http://schemas.microsoft.com/office/mac/drawingml/2011/main" val="0"/>
+            </a:ext>
+          </a:extLst>
+        </p:spPr>
+        <p:txBody>
+          <a:bodyPr/>
+          <a:lstStyle>
+            <a:lvl1pPr>
+              <a:defRPr sz="900">
+                <a:solidFill>
+                  <a:srgbClr val="7A8392"/>
+                </a:solidFill>
+              </a:defRPr>
+            </a:lvl1pPr>
+          </a:lstStyle>
+          <a:p>
+            <a:pPr algn="l"/>
+            <a:fld id="{F7021451-1387-4CA6-816F-3879F97B5CBC}" type="slidenum">
+              <a:rPr b="0" lang="en-US"/>
+              <a:t>14</a:t>
+            </a:fld>
+            <a:endParaRPr lang="en-US"/>
+          </a:p>
+        </p:txBody>
+      </p:sp>
+    </p:spTree>
+  </p:cSld>
+  <p:clrMapOvr>
+    <a:masterClrMapping/>
+  </p:clrMapOvr>
+</p:sld>
+</file>
+
+<file path=ppt/slides/slide15.xml><?xml version="1.0" encoding="utf-8"?>
+<p:sld xmlns:a="http://schemas.openxmlformats.org/drawingml/2006/main" xmlns:r="http://schemas.openxmlformats.org/officeDocument/2006/relationships" xmlns:p="http://schemas.openxmlformats.org/presentationml/2006/main">
+  <p:cSld name="Slide 15">
+    <p:spTree>
+      <p:nvGrpSpPr>
+        <p:cNvPr id="1" name=""/>
+        <p:cNvGrpSpPr/>
+        <p:nvPr/>
+      </p:nvGrpSpPr>
+      <p:grpSpPr>
+        <a:xfrm>
+          <a:off x="0" y="0"/>
+          <a:ext cx="0" cy="0"/>
+          <a:chOff x="0" y="0"/>
+          <a:chExt cx="0" cy="0"/>
+        </a:xfrm>
+      </p:grpSpPr>
+      <p:sp>
+        <p:nvSpPr>
+          <p:cNvPr id="2" name="Text 0"/>
+          <p:cNvSpPr/>
+          <p:nvPr>
+            <p:ph idx="100" type="title" hasCustomPrompt="1"/>
+          </p:nvPr>
+        </p:nvSpPr>
+        <p:spPr>
+          <a:xfrm>
+            <a:off x="548640" y="320040"/>
+            <a:ext cx="11064240" cy="868680"/>
+          </a:xfrm>
+          <a:prstGeom prst="rect">
+            <a:avLst/>
+          </a:prstGeom>
+          <a:noFill/>
+          <a:ln/>
+        </p:spPr>
+        <p:txBody>
+          <a:bodyPr wrap="square" rtlCol="0" anchor="t"/>
+          <a:lstStyle/>
+          <a:p>
+            <a:pPr indent="0" marL="0">
+              <a:buNone/>
+            </a:pPr>
+            <a:r>
+              <a:rPr lang="en-US" sz="3000" b="1" dirty="0">
+                <a:solidFill>
+                  <a:schemeClr val="tx1"/>
+                </a:solidFill>
+                <a:latin typeface="Cambria" pitchFamily="34" charset="0"/>
+                <a:ea typeface="Cambria" pitchFamily="34" charset="-122"/>
+                <a:cs typeface="Cambria" pitchFamily="34" charset="-120"/>
+              </a:rPr>
+              <a:t>What this means for investors and forecasters</a:t>
+            </a:r>
+            <a:endParaRPr lang="en-US" sz="3000" dirty="0"/>
+          </a:p>
+        </p:txBody>
+      </p:sp>
+      <p:graphicFrame>
+        <p:nvGraphicFramePr>
+          <p:cNvPr id="3" name="Chart 0" descr=""/>
+          <p:cNvGraphicFramePr/>
+          <p:nvPr/>
+        </p:nvGraphicFramePr>
+        <p:xfrm>
+          <a:off x="548640" y="1234440"/>
+          <a:ext cx="6675120" cy="4343400"/>
+        </p:xfrm>
+        <a:graphic xmlns:a="http://schemas.openxmlformats.org/drawingml/2006/main">
+          <a:graphicData uri="http://schemas.openxmlformats.org/drawingml/2006/chart">
+            <c:chart xmlns:c="http://schemas.openxmlformats.org/drawingml/2006/chart" r:id="rId1"/>
+          </a:graphicData>
+        </a:graphic>
+      </p:graphicFrame>
+      <p:sp>
+        <p:nvSpPr>
+          <p:cNvPr id="4" name="Shape 1"/>
+          <p:cNvSpPr/>
+          <p:nvPr/>
+        </p:nvSpPr>
+        <p:spPr>
+          <a:xfrm>
+            <a:off x="7498080" y="1325880"/>
+            <a:ext cx="4114800" cy="4206240"/>
+          </a:xfrm>
+          <a:prstGeom prst="roundRect">
+            <a:avLst>
+              <a:gd name="adj" fmla="val 1778"/>
+            </a:avLst>
+          </a:prstGeom>
+          <a:solidFill>
+            <a:srgbClr val="1B1F27"/>
+          </a:solidFill>
+          <a:ln w="12700">
+            <a:solidFill>
+              <a:srgbClr val="1B1F27"/>
+            </a:solidFill>
+            <a:prstDash val="solid"/>
+          </a:ln>
+        </p:spPr>
+      </p:sp>
+      <p:sp>
+        <p:nvSpPr>
+          <p:cNvPr id="5" name="Text 2"/>
+          <p:cNvSpPr txBox="1"/>
+          <p:nvPr/>
+        </p:nvSpPr>
+        <p:spPr>
+          <a:xfrm>
+            <a:off x="7726680" y="1554480"/>
+            <a:ext cx="3657600" cy="3931920"/>
+          </a:xfrm>
+          <a:prstGeom prst="rect">
+            <a:avLst/>
+          </a:prstGeom>
+          <a:noFill/>
+          <a:ln/>
+        </p:spPr>
+        <p:txBody>
+          <a:bodyPr wrap="square" lIns="0" tIns="0" rIns="0" bIns="0" rtlCol="0" anchor="t"/>
+          <a:lstStyle/>
+          <a:p>
+            <a:pPr indent="0" marL="0">
+              <a:spcAft>
+                <a:spcPts val="800"/>
+              </a:spcAft>
+              <a:buNone/>
+            </a:pPr>
+            <a:r>
+              <a:rPr lang="en-US" sz="1800" b="1" dirty="0">
+                <a:solidFill>
+                  <a:schemeClr val="bg1"/>
+                </a:solidFill>
+                <a:latin typeface="Calibri" pitchFamily="34" charset="0"/>
+                <a:ea typeface="Calibri" pitchFamily="34" charset="-122"/>
+                <a:cs typeface="Calibri" pitchFamily="34" charset="-120"/>
+              </a:rPr>
+              <a:t>The lesson</a:t>
+            </a:r>
+            <a:endParaRPr lang="en-US" sz="1800" dirty="0"/>
+          </a:p>
+          <a:p>
+            <a:pPr indent="0" marL="0">
+              <a:spcAft>
+                <a:spcPts val="800"/>
+              </a:spcAft>
+              <a:buNone/>
+            </a:pPr>
+            <a:r>
+              <a:rPr lang="en-US" sz="1400" dirty="0">
+                <a:solidFill>
+                  <a:schemeClr val="bg1"/>
+                </a:solidFill>
+                <a:latin typeface="Calibri" pitchFamily="34" charset="0"/>
+                <a:ea typeface="Calibri" pitchFamily="34" charset="-122"/>
+                <a:cs typeface="Calibri" pitchFamily="34" charset="-120"/>
+              </a:rPr>
+              <a:t>Since 2022 people said they felt awful — and kept spending about 2.5% more each year.</a:t>
+            </a:r>
+            <a:endParaRPr lang="en-US" sz="1800" dirty="0"/>
+          </a:p>
+          <a:p>
+            <a:pPr indent="0" marL="0">
+              <a:spcAft>
+                <a:spcPts val="800"/>
+              </a:spcAft>
+              <a:buNone/>
+            </a:pPr>
+            <a:r>
+              <a:rPr lang="en-US" sz="1400" dirty="0">
+                <a:solidFill>
+                  <a:schemeClr val="bg1"/>
+                </a:solidFill>
+                <a:latin typeface="Calibri" pitchFamily="34" charset="0"/>
+                <a:ea typeface="Calibri" pitchFamily="34" charset="-122"/>
+                <a:cs typeface="Calibri" pitchFamily="34" charset="-120"/>
+              </a:rPr>
+              <a:t>Using the survey as-is made spending forecasts 20% worse. Using only the part that matches the economy made them 17% better.</a:t>
+            </a:r>
+            <a:endParaRPr lang="en-US" sz="1800" dirty="0"/>
+          </a:p>
+          <a:p>
+            <a:pPr indent="0" marL="0">
+              <a:buNone/>
+            </a:pPr>
+            <a:r>
+              <a:rPr lang="en-US" sz="1400" b="1" dirty="0">
+                <a:solidFill>
+                  <a:srgbClr val="F2B8B5"/>
+                </a:solidFill>
+                <a:latin typeface="Calibri" pitchFamily="34" charset="0"/>
+                <a:ea typeface="Calibri" pitchFamily="34" charset="-122"/>
+                <a:cs typeface="Calibri" pitchFamily="34" charset="-120"/>
+              </a:rPr>
+              <a:t>So: separate real economic worry from the 'gloom gap' before betting on a recession.</a:t>
+            </a:r>
+            <a:endParaRPr lang="en-US" sz="1800" dirty="0"/>
+          </a:p>
+        </p:txBody>
+      </p:sp>
+      <p:sp>
+        <p:nvSpPr>
+          <p:cNvPr id="6" name="Shape 3"/>
+          <p:cNvSpPr/>
+          <p:nvPr/>
+        </p:nvSpPr>
+        <p:spPr>
+          <a:xfrm>
+            <a:off x="548640" y="5715000"/>
+            <a:ext cx="11064240" cy="548640"/>
+          </a:xfrm>
+          <a:prstGeom prst="roundRect">
+            <a:avLst>
+              <a:gd name="adj" fmla="val 13333"/>
+            </a:avLst>
+          </a:prstGeom>
+          <a:solidFill>
+            <a:srgbClr val="1B1F27"/>
+          </a:solidFill>
+          <a:ln w="12700">
+            <a:solidFill>
+              <a:srgbClr val="1B1F27"/>
+            </a:solidFill>
+            <a:prstDash val="solid"/>
+          </a:ln>
+        </p:spPr>
+      </p:sp>
+      <p:sp>
+        <p:nvSpPr>
+          <p:cNvPr id="7" name="Text 4"/>
+          <p:cNvSpPr txBox="1"/>
+          <p:nvPr/>
+        </p:nvSpPr>
+        <p:spPr>
+          <a:xfrm>
+            <a:off x="777240" y="5788152"/>
+            <a:ext cx="10607040" cy="411480"/>
+          </a:xfrm>
+          <a:prstGeom prst="rect">
+            <a:avLst/>
+          </a:prstGeom>
+          <a:noFill/>
+          <a:ln/>
+        </p:spPr>
+        <p:txBody>
+          <a:bodyPr wrap="square" lIns="0" tIns="0" rIns="0" bIns="0" rtlCol="0" anchor="ctr"/>
+          <a:lstStyle/>
+          <a:p>
+            <a:pPr indent="0" marL="0">
+              <a:buNone/>
+            </a:pPr>
+            <a:r>
+              <a:rPr lang="en-US" sz="1500" b="1" dirty="0">
+                <a:solidFill>
+                  <a:srgbClr val="F2B8B5"/>
+                </a:solidFill>
+                <a:latin typeface="Calibri" pitchFamily="34" charset="0"/>
+                <a:ea typeface="Calibri" pitchFamily="34" charset="-122"/>
+                <a:cs typeface="Calibri" pitchFamily="34" charset="-120"/>
+              </a:rPr>
+              <a:t>What this means:  </a:t>
+            </a:r>
+            <a:pPr indent="0" marL="0">
+              <a:buNone/>
+            </a:pPr>
+            <a:r>
+              <a:rPr lang="en-US" sz="1500" b="1" dirty="0">
+                <a:solidFill>
+                  <a:srgbClr val="FFFFFF"/>
+                </a:solidFill>
+                <a:latin typeface="Calibri" pitchFamily="34" charset="0"/>
+                <a:ea typeface="Calibri" pitchFamily="34" charset="-122"/>
+                <a:cs typeface="Calibri" pitchFamily="34" charset="-120"/>
+              </a:rPr>
+              <a:t>Bottom line: high prices, the survey change and lived experience — not media bias — explain the gloom.</a:t>
+            </a:r>
+            <a:endParaRPr lang="en-US" sz="1500" dirty="0"/>
+          </a:p>
+        </p:txBody>
+      </p:sp>
+      <p:sp>
+        <p:nvSpPr>
+          <p:cNvPr id="25" name="Slide Number Placeholder 0"/>
+          <p:cNvSpPr>
+            <a:spLocks noGrp="1"/>
+          </p:cNvSpPr>
+          <p:nvPr>
+            <p:ph type="sldNum" sz="quarter" idx="4294967295"/>
+          </p:nvPr>
+        </p:nvSpPr>
+        <p:spPr>
+          <a:xfrm>
+            <a:off x="11247120" y="6400800"/>
+            <a:ext cx="457200" cy="274320"/>
+          </a:xfrm>
+          <a:prstGeom prst="rect">
+            <a:avLst/>
+          </a:prstGeom>
+          <a:extLst>
+            <a:ext uri="{C572A759-6A51-4108-AA02-DFA0A04FC94B}">
+              <ma14:wrappingTextBoxFlag xmlns:ma14="http://schemas.microsoft.com/office/mac/drawingml/2011/main" val="0"/>
+            </a:ext>
+          </a:extLst>
+        </p:spPr>
+        <p:txBody>
+          <a:bodyPr/>
+          <a:lstStyle>
+            <a:lvl1pPr>
+              <a:defRPr sz="900">
+                <a:solidFill>
+                  <a:srgbClr val="7A8392"/>
+                </a:solidFill>
+              </a:defRPr>
+            </a:lvl1pPr>
+          </a:lstStyle>
+          <a:p>
+            <a:pPr algn="l"/>
+            <a:fld id="{F7021451-1387-4CA6-816F-3879F97B5CBC}" type="slidenum">
+              <a:rPr b="0" lang="en-US"/>
+              <a:t>15</a:t>
+            </a:fld>
+            <a:endParaRPr lang="en-US"/>
+          </a:p>
+        </p:txBody>
+      </p:sp>
+    </p:spTree>
+  </p:cSld>
+  <p:clrMapOvr>
+    <a:masterClrMapping/>
+  </p:clrMapOvr>
+</p:sld>
+</file>
+
+<file path=ppt/slides/slide16.xml><?xml version="1.0" encoding="utf-8"?>
+<p:sld xmlns:a="http://schemas.openxmlformats.org/drawingml/2006/main" xmlns:r="http://schemas.openxmlformats.org/officeDocument/2006/relationships" xmlns:p="http://schemas.openxmlformats.org/presentationml/2006/main">
+  <p:cSld name="Slide 16">
+    <p:spTree>
+      <p:nvGrpSpPr>
+        <p:cNvPr id="1" name=""/>
+        <p:cNvGrpSpPr/>
+        <p:nvPr/>
+      </p:nvGrpSpPr>
+      <p:grpSpPr>
+        <a:xfrm>
+          <a:off x="0" y="0"/>
+          <a:ext cx="0" cy="0"/>
+          <a:chOff x="0" y="0"/>
+          <a:chExt cx="0" cy="0"/>
+        </a:xfrm>
+      </p:grpSpPr>
+      <p:sp>
+        <p:nvSpPr>
+          <p:cNvPr id="2" name="Text 0"/>
+          <p:cNvSpPr/>
+          <p:nvPr>
+            <p:ph idx="100" type="title" hasCustomPrompt="1"/>
+          </p:nvPr>
+        </p:nvSpPr>
+        <p:spPr>
+          <a:xfrm>
             <a:off x="731520" y="1737360"/>
             <a:ext cx="10698480" cy="1828800"/>
           </a:xfrm>
@@ -7499,6 +10289,1316 @@
               <a:t>Questions?</a:t>
             </a:r>
             <a:endParaRPr lang="en-US" sz="1800" dirty="0"/>
+          </a:p>
+        </p:txBody>
+      </p:sp>
+    </p:spTree>
+  </p:cSld>
+  <p:clrMapOvr>
+    <a:masterClrMapping/>
+  </p:clrMapOvr>
+</p:sld>
+</file>
+
+<file path=ppt/slides/slide17.xml><?xml version="1.0" encoding="utf-8"?>
+<p:sld xmlns:a="http://schemas.openxmlformats.org/drawingml/2006/main" xmlns:r="http://schemas.openxmlformats.org/officeDocument/2006/relationships" xmlns:p="http://schemas.openxmlformats.org/presentationml/2006/main">
+  <p:cSld name="Slide 17">
+    <p:spTree>
+      <p:nvGrpSpPr>
+        <p:cNvPr id="1" name=""/>
+        <p:cNvGrpSpPr/>
+        <p:nvPr/>
+      </p:nvGrpSpPr>
+      <p:grpSpPr>
+        <a:xfrm>
+          <a:off x="0" y="0"/>
+          <a:ext cx="0" cy="0"/>
+          <a:chOff x="0" y="0"/>
+          <a:chExt cx="0" cy="0"/>
+        </a:xfrm>
+      </p:grpSpPr>
+      <p:sp>
+        <p:nvSpPr>
+          <p:cNvPr id="2" name="Text 0"/>
+          <p:cNvSpPr/>
+          <p:nvPr>
+            <p:ph idx="100" type="title" hasCustomPrompt="1"/>
+          </p:nvPr>
+        </p:nvSpPr>
+        <p:spPr>
+          <a:xfrm>
+            <a:off x="548640" y="320040"/>
+            <a:ext cx="11064240" cy="868680"/>
+          </a:xfrm>
+          <a:prstGeom prst="rect">
+            <a:avLst/>
+          </a:prstGeom>
+          <a:noFill/>
+          <a:ln/>
+        </p:spPr>
+        <p:txBody>
+          <a:bodyPr wrap="square" rtlCol="0" anchor="t"/>
+          <a:lstStyle/>
+          <a:p>
+            <a:pPr indent="0" marL="0">
+              <a:buNone/>
+            </a:pPr>
+            <a:r>
+              <a:rPr lang="en-US" sz="3000" b="1" dirty="0">
+                <a:solidFill>
+                  <a:schemeClr val="tx1"/>
+                </a:solidFill>
+                <a:latin typeface="Cambria" pitchFamily="34" charset="0"/>
+                <a:ea typeface="Cambria" pitchFamily="34" charset="-122"/>
+                <a:cs typeface="Cambria" pitchFamily="34" charset="-120"/>
+              </a:rPr>
+              <a:t>Backup: answers to the six required questions</a:t>
+            </a:r>
+            <a:endParaRPr lang="en-US" sz="3000" dirty="0"/>
+          </a:p>
+        </p:txBody>
+      </p:sp>
+      <p:graphicFrame>
+        <p:nvGraphicFramePr>
+          <p:cNvPr id="18" name="Table 0"/>
+          <p:cNvGraphicFramePr>
+            <a:graphicFrameLocks noGrp="1"/>
+          </p:cNvGraphicFramePr>
+          <p:nvPr>
+            <p:extLst>
+              <p:ext uri="{D42A27DB-BD31-4B8C-83A1-F6EECF244321}">
+                <p14:modId xmlns:p14="http://schemas.microsoft.com/office/powerpoint/2010/main" val="1579011935"/>
+              </p:ext>
+            </p:extLst>
+          </p:nvPr>
+        </p:nvGraphicFramePr>
+        <p:xfrm>
+          <a:off x="548640" y="1280160"/>
+          <a:ext cx="11064240" cy="914400"/>
+        </p:xfrm>
+        <a:graphic>
+          <a:graphicData uri="http://schemas.openxmlformats.org/drawingml/2006/table">
+            <a:tbl>
+              <a:tblPr/>
+              <a:tblGrid>
+                <a:gridCol w="3291840"/>
+                <a:gridCol w="7772400"/>
+              </a:tblGrid>
+              <a:tr h="658368">
+                <a:tc>
+                  <a:txBody>
+                    <a:bodyPr/>
+                    <a:lstStyle/>
+                    <a:p>
+                      <a:pPr indent="0" marL="0">
+                        <a:buNone/>
+                      </a:pPr>
+                      <a:r>
+                        <a:rPr lang="en-US" sz="1250" b="1" dirty="0">
+                          <a:solidFill>
+                            <a:srgbClr val="1B1F27"/>
+                          </a:solidFill>
+                          <a:latin typeface="Calibri" pitchFamily="34" charset="0"/>
+                          <a:ea typeface="Calibri" pitchFamily="34" charset="-122"/>
+                          <a:cs typeface="Calibri" pitchFamily="34" charset="-120"/>
+                        </a:rPr>
+                        <a:t>1. How can we measure media bias?</a:t>
+                      </a:r>
+                      <a:endParaRPr lang="en-US" sz="1250" dirty="0">
+                        <a:latin typeface="Calibri" charset="0"/>
+                        <a:ea typeface="Calibri" charset="0"/>
+                        <a:cs typeface="Calibri" charset="0"/>
+                      </a:endParaRPr>
+                    </a:p>
+                  </a:txBody>
+                  <a:tcPr marL="91440" marR="91440" marT="45720" marB="45720">
+                    <a:lnL w="6350" cap="flat" cmpd="sng" algn="ctr">
+                      <a:solidFill>
+                        <a:srgbClr val="D9DEE5"/>
+                      </a:solidFill>
+                      <a:prstDash val="solid"/>
+                      <a:round/>
+                      <a:headEnd type="none" w="med" len="med"/>
+                      <a:tailEnd type="none" w="med" len="med"/>
+                    </a:lnL>
+                    <a:lnR w="6350" cap="flat" cmpd="sng" algn="ctr">
+                      <a:solidFill>
+                        <a:srgbClr val="D9DEE5"/>
+                      </a:solidFill>
+                      <a:prstDash val="solid"/>
+                      <a:round/>
+                      <a:headEnd type="none" w="med" len="med"/>
+                      <a:tailEnd type="none" w="med" len="med"/>
+                    </a:lnR>
+                    <a:lnT w="6350" cap="flat" cmpd="sng" algn="ctr">
+                      <a:solidFill>
+                        <a:srgbClr val="D9DEE5"/>
+                      </a:solidFill>
+                      <a:prstDash val="solid"/>
+                      <a:round/>
+                      <a:headEnd type="none" w="med" len="med"/>
+                      <a:tailEnd type="none" w="med" len="med"/>
+                    </a:lnT>
+                    <a:lnB w="6350" cap="flat" cmpd="sng" algn="ctr">
+                      <a:solidFill>
+                        <a:srgbClr val="D9DEE5"/>
+                      </a:solidFill>
+                      <a:prstDash val="solid"/>
+                      <a:round/>
+                      <a:headEnd type="none" w="med" len="med"/>
+                      <a:tailEnd type="none" w="med" len="med"/>
+                    </a:lnB>
+                  </a:tcPr>
+                </a:tc>
+                <a:tc>
+                  <a:txBody>
+                    <a:bodyPr/>
+                    <a:lstStyle/>
+                    <a:p>
+                      <a:pPr indent="0" marL="0">
+                        <a:buNone/>
+                      </a:pPr>
+                      <a:r>
+                        <a:rPr lang="en-US" sz="1250" dirty="0">
+                          <a:solidFill>
+                            <a:srgbClr val="1B1F27"/>
+                          </a:solidFill>
+                          <a:latin typeface="Calibri" pitchFamily="34" charset="0"/>
+                          <a:ea typeface="Calibri" pitchFamily="34" charset="-122"/>
+                          <a:cs typeface="Calibri" pitchFamily="34" charset="-120"/>
+                        </a:rPr>
+                        <a:t>Against benchmarks: equal good vs bad news, the real data, the same month across outlets, official numbers. AI coder checked against 300 human labels (70% agreement).</a:t>
+                      </a:r>
+                      <a:endParaRPr lang="en-US" sz="1250" dirty="0">
+                        <a:latin typeface="Calibri" charset="0"/>
+                        <a:ea typeface="Calibri" charset="0"/>
+                        <a:cs typeface="Calibri" charset="0"/>
+                      </a:endParaRPr>
+                    </a:p>
+                  </a:txBody>
+                  <a:tcPr marL="91440" marR="91440" marT="45720" marB="45720">
+                    <a:lnL w="6350" cap="flat" cmpd="sng" algn="ctr">
+                      <a:solidFill>
+                        <a:srgbClr val="D9DEE5"/>
+                      </a:solidFill>
+                      <a:prstDash val="solid"/>
+                      <a:round/>
+                      <a:headEnd type="none" w="med" len="med"/>
+                      <a:tailEnd type="none" w="med" len="med"/>
+                    </a:lnL>
+                    <a:lnR w="6350" cap="flat" cmpd="sng" algn="ctr">
+                      <a:solidFill>
+                        <a:srgbClr val="D9DEE5"/>
+                      </a:solidFill>
+                      <a:prstDash val="solid"/>
+                      <a:round/>
+                      <a:headEnd type="none" w="med" len="med"/>
+                      <a:tailEnd type="none" w="med" len="med"/>
+                    </a:lnR>
+                    <a:lnT w="6350" cap="flat" cmpd="sng" algn="ctr">
+                      <a:solidFill>
+                        <a:srgbClr val="D9DEE5"/>
+                      </a:solidFill>
+                      <a:prstDash val="solid"/>
+                      <a:round/>
+                      <a:headEnd type="none" w="med" len="med"/>
+                      <a:tailEnd type="none" w="med" len="med"/>
+                    </a:lnT>
+                    <a:lnB w="6350" cap="flat" cmpd="sng" algn="ctr">
+                      <a:solidFill>
+                        <a:srgbClr val="D9DEE5"/>
+                      </a:solidFill>
+                      <a:prstDash val="solid"/>
+                      <a:round/>
+                      <a:headEnd type="none" w="med" len="med"/>
+                      <a:tailEnd type="none" w="med" len="med"/>
+                    </a:lnB>
+                  </a:tcPr>
+                </a:tc>
+              </a:tr>
+              <a:tr h="658368">
+                <a:tc>
+                  <a:txBody>
+                    <a:bodyPr/>
+                    <a:lstStyle/>
+                    <a:p>
+                      <a:pPr indent="0" marL="0">
+                        <a:buNone/>
+                      </a:pPr>
+                      <a:r>
+                        <a:rPr lang="en-US" sz="1250" b="1" dirty="0">
+                          <a:solidFill>
+                            <a:srgbClr val="1B1F27"/>
+                          </a:solidFill>
+                          <a:latin typeface="Calibri" pitchFamily="34" charset="0"/>
+                          <a:ea typeface="Calibri" pitchFamily="34" charset="-122"/>
+                          <a:cs typeface="Calibri" pitchFamily="34" charset="-120"/>
+                        </a:rPr>
+                        <a:t>2. Is bias depressing sentiment?</a:t>
+                      </a:r>
+                      <a:endParaRPr lang="en-US" sz="1250" dirty="0">
+                        <a:latin typeface="Calibri" charset="0"/>
+                        <a:ea typeface="Calibri" charset="0"/>
+                        <a:cs typeface="Calibri" charset="0"/>
+                      </a:endParaRPr>
+                    </a:p>
+                  </a:txBody>
+                  <a:tcPr marL="91440" marR="91440" marT="45720" marB="45720">
+                    <a:lnL w="6350" cap="flat" cmpd="sng" algn="ctr">
+                      <a:solidFill>
+                        <a:srgbClr val="D9DEE5"/>
+                      </a:solidFill>
+                      <a:prstDash val="solid"/>
+                      <a:round/>
+                      <a:headEnd type="none" w="med" len="med"/>
+                      <a:tailEnd type="none" w="med" len="med"/>
+                    </a:lnL>
+                    <a:lnR w="6350" cap="flat" cmpd="sng" algn="ctr">
+                      <a:solidFill>
+                        <a:srgbClr val="D9DEE5"/>
+                      </a:solidFill>
+                      <a:prstDash val="solid"/>
+                      <a:round/>
+                      <a:headEnd type="none" w="med" len="med"/>
+                      <a:tailEnd type="none" w="med" len="med"/>
+                    </a:lnR>
+                    <a:lnT w="6350" cap="flat" cmpd="sng" algn="ctr">
+                      <a:solidFill>
+                        <a:srgbClr val="D9DEE5"/>
+                      </a:solidFill>
+                      <a:prstDash val="solid"/>
+                      <a:round/>
+                      <a:headEnd type="none" w="med" len="med"/>
+                      <a:tailEnd type="none" w="med" len="med"/>
+                    </a:lnT>
+                    <a:lnB w="6350" cap="flat" cmpd="sng" algn="ctr">
+                      <a:solidFill>
+                        <a:srgbClr val="D9DEE5"/>
+                      </a:solidFill>
+                      <a:prstDash val="solid"/>
+                      <a:round/>
+                      <a:headEnd type="none" w="med" len="med"/>
+                      <a:tailEnd type="none" w="med" len="med"/>
+                    </a:lnB>
+                  </a:tcPr>
+                </a:tc>
+                <a:tc>
+                  <a:txBody>
+                    <a:bodyPr/>
+                    <a:lstStyle/>
+                    <a:p>
+                      <a:pPr indent="0" marL="0">
+                        <a:buNone/>
+                      </a:pPr>
+                      <a:r>
+                        <a:rPr lang="en-US" sz="1250" dirty="0">
+                          <a:solidFill>
+                            <a:srgbClr val="1B1F27"/>
+                          </a:solidFill>
+                          <a:latin typeface="Calibri" pitchFamily="34" charset="0"/>
+                          <a:ea typeface="Calibri" pitchFamily="34" charset="-122"/>
+                          <a:cs typeface="Calibri" pitchFamily="34" charset="-120"/>
+                        </a:rPr>
+                        <a:t>No evidence: news adds no forecasting power; in 2025 tone barely changed while sentiment fell 14.5 points (~1 point explained).</a:t>
+                      </a:r>
+                      <a:endParaRPr lang="en-US" sz="1250" dirty="0">
+                        <a:latin typeface="Calibri" charset="0"/>
+                        <a:ea typeface="Calibri" charset="0"/>
+                        <a:cs typeface="Calibri" charset="0"/>
+                      </a:endParaRPr>
+                    </a:p>
+                  </a:txBody>
+                  <a:tcPr marL="91440" marR="91440" marT="45720" marB="45720">
+                    <a:lnL w="6350" cap="flat" cmpd="sng" algn="ctr">
+                      <a:solidFill>
+                        <a:srgbClr val="D9DEE5"/>
+                      </a:solidFill>
+                      <a:prstDash val="solid"/>
+                      <a:round/>
+                      <a:headEnd type="none" w="med" len="med"/>
+                      <a:tailEnd type="none" w="med" len="med"/>
+                    </a:lnL>
+                    <a:lnR w="6350" cap="flat" cmpd="sng" algn="ctr">
+                      <a:solidFill>
+                        <a:srgbClr val="D9DEE5"/>
+                      </a:solidFill>
+                      <a:prstDash val="solid"/>
+                      <a:round/>
+                      <a:headEnd type="none" w="med" len="med"/>
+                      <a:tailEnd type="none" w="med" len="med"/>
+                    </a:lnR>
+                    <a:lnT w="6350" cap="flat" cmpd="sng" algn="ctr">
+                      <a:solidFill>
+                        <a:srgbClr val="D9DEE5"/>
+                      </a:solidFill>
+                      <a:prstDash val="solid"/>
+                      <a:round/>
+                      <a:headEnd type="none" w="med" len="med"/>
+                      <a:tailEnd type="none" w="med" len="med"/>
+                    </a:lnT>
+                    <a:lnB w="6350" cap="flat" cmpd="sng" algn="ctr">
+                      <a:solidFill>
+                        <a:srgbClr val="D9DEE5"/>
+                      </a:solidFill>
+                      <a:prstDash val="solid"/>
+                      <a:round/>
+                      <a:headEnd type="none" w="med" len="med"/>
+                      <a:tailEnd type="none" w="med" len="med"/>
+                    </a:lnB>
+                  </a:tcPr>
+                </a:tc>
+              </a:tr>
+              <a:tr h="658368">
+                <a:tc>
+                  <a:txBody>
+                    <a:bodyPr/>
+                    <a:lstStyle/>
+                    <a:p>
+                      <a:pPr indent="0" marL="0">
+                        <a:buNone/>
+                      </a:pPr>
+                      <a:r>
+                        <a:rPr lang="en-US" sz="1250" b="1" dirty="0">
+                          <a:solidFill>
+                            <a:srgbClr val="1B1F27"/>
+                          </a:solidFill>
+                          <a:latin typeface="Calibri" pitchFamily="34" charset="0"/>
+                          <a:ea typeface="Calibri" pitchFamily="34" charset="-122"/>
+                          <a:cs typeface="Calibri" pitchFamily="34" charset="-120"/>
+                        </a:rPr>
+                        <a:t>3. How much do jobs, inflation, GDP explain?</a:t>
+                      </a:r>
+                      <a:endParaRPr lang="en-US" sz="1250" dirty="0">
+                        <a:latin typeface="Calibri" charset="0"/>
+                        <a:ea typeface="Calibri" charset="0"/>
+                        <a:cs typeface="Calibri" charset="0"/>
+                      </a:endParaRPr>
+                    </a:p>
+                  </a:txBody>
+                  <a:tcPr marL="91440" marR="91440" marT="45720" marB="45720">
+                    <a:lnL w="6350" cap="flat" cmpd="sng" algn="ctr">
+                      <a:solidFill>
+                        <a:srgbClr val="D9DEE5"/>
+                      </a:solidFill>
+                      <a:prstDash val="solid"/>
+                      <a:round/>
+                      <a:headEnd type="none" w="med" len="med"/>
+                      <a:tailEnd type="none" w="med" len="med"/>
+                    </a:lnL>
+                    <a:lnR w="6350" cap="flat" cmpd="sng" algn="ctr">
+                      <a:solidFill>
+                        <a:srgbClr val="D9DEE5"/>
+                      </a:solidFill>
+                      <a:prstDash val="solid"/>
+                      <a:round/>
+                      <a:headEnd type="none" w="med" len="med"/>
+                      <a:tailEnd type="none" w="med" len="med"/>
+                    </a:lnR>
+                    <a:lnT w="6350" cap="flat" cmpd="sng" algn="ctr">
+                      <a:solidFill>
+                        <a:srgbClr val="D9DEE5"/>
+                      </a:solidFill>
+                      <a:prstDash val="solid"/>
+                      <a:round/>
+                      <a:headEnd type="none" w="med" len="med"/>
+                      <a:tailEnd type="none" w="med" len="med"/>
+                    </a:lnT>
+                    <a:lnB w="6350" cap="flat" cmpd="sng" algn="ctr">
+                      <a:solidFill>
+                        <a:srgbClr val="D9DEE5"/>
+                      </a:solidFill>
+                      <a:prstDash val="solid"/>
+                      <a:round/>
+                      <a:headEnd type="none" w="med" len="med"/>
+                      <a:tailEnd type="none" w="med" len="med"/>
+                    </a:lnB>
+                  </a:tcPr>
+                </a:tc>
+                <a:tc>
+                  <a:txBody>
+                    <a:bodyPr/>
+                    <a:lstStyle/>
+                    <a:p>
+                      <a:pPr indent="0" marL="0">
+                        <a:buNone/>
+                      </a:pPr>
+                      <a:r>
+                        <a:rPr lang="en-US" sz="1250" dirty="0">
+                          <a:solidFill>
+                            <a:srgbClr val="1B1F27"/>
+                          </a:solidFill>
+                          <a:latin typeface="Calibri" pitchFamily="34" charset="0"/>
+                          <a:ea typeface="Calibri" pitchFamily="34" charset="-122"/>
+                          <a:cs typeface="Calibri" pitchFamily="34" charset="-120"/>
+                        </a:rPr>
+                        <a:t>Only ~13% of the 41-point drop.</a:t>
+                      </a:r>
+                      <a:endParaRPr lang="en-US" sz="1250" dirty="0">
+                        <a:latin typeface="Calibri" charset="0"/>
+                        <a:ea typeface="Calibri" charset="0"/>
+                        <a:cs typeface="Calibri" charset="0"/>
+                      </a:endParaRPr>
+                    </a:p>
+                  </a:txBody>
+                  <a:tcPr marL="91440" marR="91440" marT="45720" marB="45720">
+                    <a:lnL w="6350" cap="flat" cmpd="sng" algn="ctr">
+                      <a:solidFill>
+                        <a:srgbClr val="D9DEE5"/>
+                      </a:solidFill>
+                      <a:prstDash val="solid"/>
+                      <a:round/>
+                      <a:headEnd type="none" w="med" len="med"/>
+                      <a:tailEnd type="none" w="med" len="med"/>
+                    </a:lnL>
+                    <a:lnR w="6350" cap="flat" cmpd="sng" algn="ctr">
+                      <a:solidFill>
+                        <a:srgbClr val="D9DEE5"/>
+                      </a:solidFill>
+                      <a:prstDash val="solid"/>
+                      <a:round/>
+                      <a:headEnd type="none" w="med" len="med"/>
+                      <a:tailEnd type="none" w="med" len="med"/>
+                    </a:lnR>
+                    <a:lnT w="6350" cap="flat" cmpd="sng" algn="ctr">
+                      <a:solidFill>
+                        <a:srgbClr val="D9DEE5"/>
+                      </a:solidFill>
+                      <a:prstDash val="solid"/>
+                      <a:round/>
+                      <a:headEnd type="none" w="med" len="med"/>
+                      <a:tailEnd type="none" w="med" len="med"/>
+                    </a:lnT>
+                    <a:lnB w="6350" cap="flat" cmpd="sng" algn="ctr">
+                      <a:solidFill>
+                        <a:srgbClr val="D9DEE5"/>
+                      </a:solidFill>
+                      <a:prstDash val="solid"/>
+                      <a:round/>
+                      <a:headEnd type="none" w="med" len="med"/>
+                      <a:tailEnd type="none" w="med" len="med"/>
+                    </a:lnB>
+                  </a:tcPr>
+                </a:tc>
+              </a:tr>
+              <a:tr h="658368">
+                <a:tc>
+                  <a:txBody>
+                    <a:bodyPr/>
+                    <a:lstStyle/>
+                    <a:p>
+                      <a:pPr indent="0" marL="0">
+                        <a:buNone/>
+                      </a:pPr>
+                      <a:r>
+                        <a:rPr lang="en-US" sz="1250" b="1" dirty="0">
+                          <a:solidFill>
+                            <a:srgbClr val="1B1F27"/>
+                          </a:solidFill>
+                          <a:latin typeface="Calibri" pitchFamily="34" charset="0"/>
+                          <a:ea typeface="Calibri" pitchFamily="34" charset="-122"/>
+                          <a:cs typeface="Calibri" pitchFamily="34" charset="-120"/>
+                        </a:rPr>
+                        <a:t>4. Which mental biases can we measure?</a:t>
+                      </a:r>
+                      <a:endParaRPr lang="en-US" sz="1250" dirty="0">
+                        <a:latin typeface="Calibri" charset="0"/>
+                        <a:ea typeface="Calibri" charset="0"/>
+                        <a:cs typeface="Calibri" charset="0"/>
+                      </a:endParaRPr>
+                    </a:p>
+                  </a:txBody>
+                  <a:tcPr marL="91440" marR="91440" marT="45720" marB="45720">
+                    <a:lnL w="6350" cap="flat" cmpd="sng" algn="ctr">
+                      <a:solidFill>
+                        <a:srgbClr val="D9DEE5"/>
+                      </a:solidFill>
+                      <a:prstDash val="solid"/>
+                      <a:round/>
+                      <a:headEnd type="none" w="med" len="med"/>
+                      <a:tailEnd type="none" w="med" len="med"/>
+                    </a:lnL>
+                    <a:lnR w="6350" cap="flat" cmpd="sng" algn="ctr">
+                      <a:solidFill>
+                        <a:srgbClr val="D9DEE5"/>
+                      </a:solidFill>
+                      <a:prstDash val="solid"/>
+                      <a:round/>
+                      <a:headEnd type="none" w="med" len="med"/>
+                      <a:tailEnd type="none" w="med" len="med"/>
+                    </a:lnR>
+                    <a:lnT w="6350" cap="flat" cmpd="sng" algn="ctr">
+                      <a:solidFill>
+                        <a:srgbClr val="D9DEE5"/>
+                      </a:solidFill>
+                      <a:prstDash val="solid"/>
+                      <a:round/>
+                      <a:headEnd type="none" w="med" len="med"/>
+                      <a:tailEnd type="none" w="med" len="med"/>
+                    </a:lnT>
+                    <a:lnB w="6350" cap="flat" cmpd="sng" algn="ctr">
+                      <a:solidFill>
+                        <a:srgbClr val="D9DEE5"/>
+                      </a:solidFill>
+                      <a:prstDash val="solid"/>
+                      <a:round/>
+                      <a:headEnd type="none" w="med" len="med"/>
+                      <a:tailEnd type="none" w="med" len="med"/>
+                    </a:lnB>
+                  </a:tcPr>
+                </a:tc>
+                <a:tc>
+                  <a:txBody>
+                    <a:bodyPr/>
+                    <a:lstStyle/>
+                    <a:p>
+                      <a:pPr indent="0" marL="0">
+                        <a:buNone/>
+                      </a:pPr>
+                      <a:r>
+                        <a:rPr lang="en-US" sz="1250" dirty="0">
+                          <a:solidFill>
+                            <a:srgbClr val="1B1F27"/>
+                          </a:solidFill>
+                          <a:latin typeface="Calibri" pitchFamily="34" charset="0"/>
+                          <a:ea typeface="Calibri" pitchFamily="34" charset="-122"/>
+                          <a:cs typeface="Calibri" pitchFamily="34" charset="-120"/>
+                        </a:rPr>
+                        <a:t>Anchoring to old prices and learning from lived inflation: yes. Partisanship: indirectly. Availability/confirmation bias in readers: no (no exposure data).</a:t>
+                      </a:r>
+                      <a:endParaRPr lang="en-US" sz="1250" dirty="0">
+                        <a:latin typeface="Calibri" charset="0"/>
+                        <a:ea typeface="Calibri" charset="0"/>
+                        <a:cs typeface="Calibri" charset="0"/>
+                      </a:endParaRPr>
+                    </a:p>
+                  </a:txBody>
+                  <a:tcPr marL="91440" marR="91440" marT="45720" marB="45720">
+                    <a:lnL w="6350" cap="flat" cmpd="sng" algn="ctr">
+                      <a:solidFill>
+                        <a:srgbClr val="D9DEE5"/>
+                      </a:solidFill>
+                      <a:prstDash val="solid"/>
+                      <a:round/>
+                      <a:headEnd type="none" w="med" len="med"/>
+                      <a:tailEnd type="none" w="med" len="med"/>
+                    </a:lnL>
+                    <a:lnR w="6350" cap="flat" cmpd="sng" algn="ctr">
+                      <a:solidFill>
+                        <a:srgbClr val="D9DEE5"/>
+                      </a:solidFill>
+                      <a:prstDash val="solid"/>
+                      <a:round/>
+                      <a:headEnd type="none" w="med" len="med"/>
+                      <a:tailEnd type="none" w="med" len="med"/>
+                    </a:lnR>
+                    <a:lnT w="6350" cap="flat" cmpd="sng" algn="ctr">
+                      <a:solidFill>
+                        <a:srgbClr val="D9DEE5"/>
+                      </a:solidFill>
+                      <a:prstDash val="solid"/>
+                      <a:round/>
+                      <a:headEnd type="none" w="med" len="med"/>
+                      <a:tailEnd type="none" w="med" len="med"/>
+                    </a:lnT>
+                    <a:lnB w="6350" cap="flat" cmpd="sng" algn="ctr">
+                      <a:solidFill>
+                        <a:srgbClr val="D9DEE5"/>
+                      </a:solidFill>
+                      <a:prstDash val="solid"/>
+                      <a:round/>
+                      <a:headEnd type="none" w="med" len="med"/>
+                      <a:tailEnd type="none" w="med" len="med"/>
+                    </a:lnB>
+                  </a:tcPr>
+                </a:tc>
+              </a:tr>
+              <a:tr h="658368">
+                <a:tc>
+                  <a:txBody>
+                    <a:bodyPr/>
+                    <a:lstStyle/>
+                    <a:p>
+                      <a:pPr indent="0" marL="0">
+                        <a:buNone/>
+                      </a:pPr>
+                      <a:r>
+                        <a:rPr lang="en-US" sz="1250" b="1" dirty="0">
+                          <a:solidFill>
+                            <a:srgbClr val="1B1F27"/>
+                          </a:solidFill>
+                          <a:latin typeface="Calibri" pitchFamily="34" charset="0"/>
+                          <a:ea typeface="Calibri" pitchFamily="34" charset="-122"/>
+                          <a:cs typeface="Calibri" pitchFamily="34" charset="-120"/>
+                        </a:rPr>
+                        <a:t>5. Does media data improve predictions?</a:t>
+                      </a:r>
+                      <a:endParaRPr lang="en-US" sz="1250" dirty="0">
+                        <a:latin typeface="Calibri" charset="0"/>
+                        <a:ea typeface="Calibri" charset="0"/>
+                        <a:cs typeface="Calibri" charset="0"/>
+                      </a:endParaRPr>
+                    </a:p>
+                  </a:txBody>
+                  <a:tcPr marL="91440" marR="91440" marT="45720" marB="45720">
+                    <a:lnL w="6350" cap="flat" cmpd="sng" algn="ctr">
+                      <a:solidFill>
+                        <a:srgbClr val="D9DEE5"/>
+                      </a:solidFill>
+                      <a:prstDash val="solid"/>
+                      <a:round/>
+                      <a:headEnd type="none" w="med" len="med"/>
+                      <a:tailEnd type="none" w="med" len="med"/>
+                    </a:lnL>
+                    <a:lnR w="6350" cap="flat" cmpd="sng" algn="ctr">
+                      <a:solidFill>
+                        <a:srgbClr val="D9DEE5"/>
+                      </a:solidFill>
+                      <a:prstDash val="solid"/>
+                      <a:round/>
+                      <a:headEnd type="none" w="med" len="med"/>
+                      <a:tailEnd type="none" w="med" len="med"/>
+                    </a:lnR>
+                    <a:lnT w="6350" cap="flat" cmpd="sng" algn="ctr">
+                      <a:solidFill>
+                        <a:srgbClr val="D9DEE5"/>
+                      </a:solidFill>
+                      <a:prstDash val="solid"/>
+                      <a:round/>
+                      <a:headEnd type="none" w="med" len="med"/>
+                      <a:tailEnd type="none" w="med" len="med"/>
+                    </a:lnT>
+                    <a:lnB w="6350" cap="flat" cmpd="sng" algn="ctr">
+                      <a:solidFill>
+                        <a:srgbClr val="D9DEE5"/>
+                      </a:solidFill>
+                      <a:prstDash val="solid"/>
+                      <a:round/>
+                      <a:headEnd type="none" w="med" len="med"/>
+                      <a:tailEnd type="none" w="med" len="med"/>
+                    </a:lnB>
+                  </a:tcPr>
+                </a:tc>
+                <a:tc>
+                  <a:txBody>
+                    <a:bodyPr/>
+                    <a:lstStyle/>
+                    <a:p>
+                      <a:pPr indent="0" marL="0">
+                        <a:buNone/>
+                      </a:pPr>
+                      <a:r>
+                        <a:rPr lang="en-US" sz="1250" dirty="0">
+                          <a:solidFill>
+                            <a:srgbClr val="1B1F27"/>
+                          </a:solidFill>
+                          <a:latin typeface="Calibri" pitchFamily="34" charset="0"/>
+                          <a:ea typeface="Calibri" pitchFamily="34" charset="-122"/>
+                          <a:cs typeface="Calibri" pitchFamily="34" charset="-120"/>
+                        </a:rPr>
+                        <a:t>No — forecasts get ~25% worse; everyday-cost data makes them ~24% better.</a:t>
+                      </a:r>
+                      <a:endParaRPr lang="en-US" sz="1250" dirty="0">
+                        <a:latin typeface="Calibri" charset="0"/>
+                        <a:ea typeface="Calibri" charset="0"/>
+                        <a:cs typeface="Calibri" charset="0"/>
+                      </a:endParaRPr>
+                    </a:p>
+                  </a:txBody>
+                  <a:tcPr marL="91440" marR="91440" marT="45720" marB="45720">
+                    <a:lnL w="6350" cap="flat" cmpd="sng" algn="ctr">
+                      <a:solidFill>
+                        <a:srgbClr val="D9DEE5"/>
+                      </a:solidFill>
+                      <a:prstDash val="solid"/>
+                      <a:round/>
+                      <a:headEnd type="none" w="med" len="med"/>
+                      <a:tailEnd type="none" w="med" len="med"/>
+                    </a:lnL>
+                    <a:lnR w="6350" cap="flat" cmpd="sng" algn="ctr">
+                      <a:solidFill>
+                        <a:srgbClr val="D9DEE5"/>
+                      </a:solidFill>
+                      <a:prstDash val="solid"/>
+                      <a:round/>
+                      <a:headEnd type="none" w="med" len="med"/>
+                      <a:tailEnd type="none" w="med" len="med"/>
+                    </a:lnR>
+                    <a:lnT w="6350" cap="flat" cmpd="sng" algn="ctr">
+                      <a:solidFill>
+                        <a:srgbClr val="D9DEE5"/>
+                      </a:solidFill>
+                      <a:prstDash val="solid"/>
+                      <a:round/>
+                      <a:headEnd type="none" w="med" len="med"/>
+                      <a:tailEnd type="none" w="med" len="med"/>
+                    </a:lnT>
+                    <a:lnB w="6350" cap="flat" cmpd="sng" algn="ctr">
+                      <a:solidFill>
+                        <a:srgbClr val="D9DEE5"/>
+                      </a:solidFill>
+                      <a:prstDash val="solid"/>
+                      <a:round/>
+                      <a:headEnd type="none" w="med" len="med"/>
+                      <a:tailEnd type="none" w="med" len="med"/>
+                    </a:lnB>
+                  </a:tcPr>
+                </a:tc>
+              </a:tr>
+              <a:tr h="658368">
+                <a:tc>
+                  <a:txBody>
+                    <a:bodyPr/>
+                    <a:lstStyle/>
+                    <a:p>
+                      <a:pPr indent="0" marL="0">
+                        <a:buNone/>
+                      </a:pPr>
+                      <a:r>
+                        <a:rPr lang="en-US" sz="1250" b="1" dirty="0">
+                          <a:solidFill>
+                            <a:srgbClr val="1B1F27"/>
+                          </a:solidFill>
+                          <a:latin typeface="Calibri" pitchFamily="34" charset="0"/>
+                          <a:ea typeface="Calibri" pitchFamily="34" charset="-122"/>
+                          <a:cs typeface="Calibri" pitchFamily="34" charset="-120"/>
+                        </a:rPr>
+                        <a:t>6. What would contradict a media story?</a:t>
+                      </a:r>
+                      <a:endParaRPr lang="en-US" sz="1250" dirty="0">
+                        <a:latin typeface="Calibri" charset="0"/>
+                        <a:ea typeface="Calibri" charset="0"/>
+                        <a:cs typeface="Calibri" charset="0"/>
+                      </a:endParaRPr>
+                    </a:p>
+                  </a:txBody>
+                  <a:tcPr marL="91440" marR="91440" marT="45720" marB="45720">
+                    <a:lnL w="6350" cap="flat" cmpd="sng" algn="ctr">
+                      <a:solidFill>
+                        <a:srgbClr val="D9DEE5"/>
+                      </a:solidFill>
+                      <a:prstDash val="solid"/>
+                      <a:round/>
+                      <a:headEnd type="none" w="med" len="med"/>
+                      <a:tailEnd type="none" w="med" len="med"/>
+                    </a:lnL>
+                    <a:lnR w="6350" cap="flat" cmpd="sng" algn="ctr">
+                      <a:solidFill>
+                        <a:srgbClr val="D9DEE5"/>
+                      </a:solidFill>
+                      <a:prstDash val="solid"/>
+                      <a:round/>
+                      <a:headEnd type="none" w="med" len="med"/>
+                      <a:tailEnd type="none" w="med" len="med"/>
+                    </a:lnR>
+                    <a:lnT w="6350" cap="flat" cmpd="sng" algn="ctr">
+                      <a:solidFill>
+                        <a:srgbClr val="D9DEE5"/>
+                      </a:solidFill>
+                      <a:prstDash val="solid"/>
+                      <a:round/>
+                      <a:headEnd type="none" w="med" len="med"/>
+                      <a:tailEnd type="none" w="med" len="med"/>
+                    </a:lnT>
+                    <a:lnB w="6350" cap="flat" cmpd="sng" algn="ctr">
+                      <a:solidFill>
+                        <a:srgbClr val="D9DEE5"/>
+                      </a:solidFill>
+                      <a:prstDash val="solid"/>
+                      <a:round/>
+                      <a:headEnd type="none" w="med" len="med"/>
+                      <a:tailEnd type="none" w="med" len="med"/>
+                    </a:lnB>
+                  </a:tcPr>
+                </a:tc>
+                <a:tc>
+                  <a:txBody>
+                    <a:bodyPr/>
+                    <a:lstStyle/>
+                    <a:p>
+                      <a:pPr indent="0" marL="0">
+                        <a:buNone/>
+                      </a:pPr>
+                      <a:r>
+                        <a:rPr lang="en-US" sz="1250" dirty="0">
+                          <a:solidFill>
+                            <a:srgbClr val="1B1F27"/>
+                          </a:solidFill>
+                          <a:latin typeface="Calibri" pitchFamily="34" charset="0"/>
+                          <a:ea typeface="Calibri" pitchFamily="34" charset="-122"/>
+                          <a:cs typeface="Calibri" pitchFamily="34" charset="-120"/>
+                        </a:rPr>
+                        <a:t>Seven tests written in advance; most came out against it (see report Table 11).</a:t>
+                      </a:r>
+                      <a:endParaRPr lang="en-US" sz="1250" dirty="0">
+                        <a:latin typeface="Calibri" charset="0"/>
+                        <a:ea typeface="Calibri" charset="0"/>
+                        <a:cs typeface="Calibri" charset="0"/>
+                      </a:endParaRPr>
+                    </a:p>
+                  </a:txBody>
+                  <a:tcPr marL="91440" marR="91440" marT="45720" marB="45720">
+                    <a:lnL w="6350" cap="flat" cmpd="sng" algn="ctr">
+                      <a:solidFill>
+                        <a:srgbClr val="D9DEE5"/>
+                      </a:solidFill>
+                      <a:prstDash val="solid"/>
+                      <a:round/>
+                      <a:headEnd type="none" w="med" len="med"/>
+                      <a:tailEnd type="none" w="med" len="med"/>
+                    </a:lnL>
+                    <a:lnR w="6350" cap="flat" cmpd="sng" algn="ctr">
+                      <a:solidFill>
+                        <a:srgbClr val="D9DEE5"/>
+                      </a:solidFill>
+                      <a:prstDash val="solid"/>
+                      <a:round/>
+                      <a:headEnd type="none" w="med" len="med"/>
+                      <a:tailEnd type="none" w="med" len="med"/>
+                    </a:lnR>
+                    <a:lnT w="6350" cap="flat" cmpd="sng" algn="ctr">
+                      <a:solidFill>
+                        <a:srgbClr val="D9DEE5"/>
+                      </a:solidFill>
+                      <a:prstDash val="solid"/>
+                      <a:round/>
+                      <a:headEnd type="none" w="med" len="med"/>
+                      <a:tailEnd type="none" w="med" len="med"/>
+                    </a:lnT>
+                    <a:lnB w="6350" cap="flat" cmpd="sng" algn="ctr">
+                      <a:solidFill>
+                        <a:srgbClr val="D9DEE5"/>
+                      </a:solidFill>
+                      <a:prstDash val="solid"/>
+                      <a:round/>
+                      <a:headEnd type="none" w="med" len="med"/>
+                      <a:tailEnd type="none" w="med" len="med"/>
+                    </a:lnB>
+                  </a:tcPr>
+                </a:tc>
+              </a:tr>
+            </a:tbl>
+          </a:graphicData>
+        </a:graphic>
+      </p:graphicFrame>
+      <p:sp>
+        <p:nvSpPr>
+          <p:cNvPr id="25" name="Slide Number Placeholder 0"/>
+          <p:cNvSpPr>
+            <a:spLocks noGrp="1"/>
+          </p:cNvSpPr>
+          <p:nvPr>
+            <p:ph type="sldNum" sz="quarter" idx="4294967295"/>
+          </p:nvPr>
+        </p:nvSpPr>
+        <p:spPr>
+          <a:xfrm>
+            <a:off x="11247120" y="6400800"/>
+            <a:ext cx="457200" cy="274320"/>
+          </a:xfrm>
+          <a:prstGeom prst="rect">
+            <a:avLst/>
+          </a:prstGeom>
+          <a:extLst>
+            <a:ext uri="{C572A759-6A51-4108-AA02-DFA0A04FC94B}">
+              <ma14:wrappingTextBoxFlag xmlns:ma14="http://schemas.microsoft.com/office/mac/drawingml/2011/main" val="0"/>
+            </a:ext>
+          </a:extLst>
+        </p:spPr>
+        <p:txBody>
+          <a:bodyPr/>
+          <a:lstStyle>
+            <a:lvl1pPr>
+              <a:defRPr sz="900">
+                <a:solidFill>
+                  <a:srgbClr val="7A8392"/>
+                </a:solidFill>
+              </a:defRPr>
+            </a:lvl1pPr>
+          </a:lstStyle>
+          <a:p>
+            <a:pPr algn="l"/>
+            <a:fld id="{F7021451-1387-4CA6-816F-3879F97B5CBC}" type="slidenum">
+              <a:rPr b="0" lang="en-US"/>
+              <a:t>17</a:t>
+            </a:fld>
+            <a:endParaRPr lang="en-US"/>
+          </a:p>
+        </p:txBody>
+      </p:sp>
+    </p:spTree>
+  </p:cSld>
+  <p:clrMapOvr>
+    <a:masterClrMapping/>
+  </p:clrMapOvr>
+</p:sld>
+</file>
+
+<file path=ppt/slides/slide18.xml><?xml version="1.0" encoding="utf-8"?>
+<p:sld xmlns:a="http://schemas.openxmlformats.org/drawingml/2006/main" xmlns:r="http://schemas.openxmlformats.org/officeDocument/2006/relationships" xmlns:p="http://schemas.openxmlformats.org/presentationml/2006/main">
+  <p:cSld name="Slide 18">
+    <p:spTree>
+      <p:nvGrpSpPr>
+        <p:cNvPr id="1" name=""/>
+        <p:cNvGrpSpPr/>
+        <p:nvPr/>
+      </p:nvGrpSpPr>
+      <p:grpSpPr>
+        <a:xfrm>
+          <a:off x="0" y="0"/>
+          <a:ext cx="0" cy="0"/>
+          <a:chOff x="0" y="0"/>
+          <a:chExt cx="0" cy="0"/>
+        </a:xfrm>
+      </p:grpSpPr>
+      <p:sp>
+        <p:nvSpPr>
+          <p:cNvPr id="2" name="Text 0"/>
+          <p:cNvSpPr/>
+          <p:nvPr>
+            <p:ph idx="100" type="title" hasCustomPrompt="1"/>
+          </p:nvPr>
+        </p:nvSpPr>
+        <p:spPr>
+          <a:xfrm>
+            <a:off x="548640" y="320040"/>
+            <a:ext cx="11064240" cy="868680"/>
+          </a:xfrm>
+          <a:prstGeom prst="rect">
+            <a:avLst/>
+          </a:prstGeom>
+          <a:noFill/>
+          <a:ln/>
+        </p:spPr>
+        <p:txBody>
+          <a:bodyPr wrap="square" rtlCol="0" anchor="t"/>
+          <a:lstStyle/>
+          <a:p>
+            <a:pPr indent="0" marL="0">
+              <a:buNone/>
+            </a:pPr>
+            <a:r>
+              <a:rPr lang="en-US" sz="3000" b="1" dirty="0">
+                <a:solidFill>
+                  <a:schemeClr val="tx1"/>
+                </a:solidFill>
+                <a:latin typeface="Cambria" pitchFamily="34" charset="0"/>
+                <a:ea typeface="Cambria" pitchFamily="34" charset="-122"/>
+                <a:cs typeface="Cambria" pitchFamily="34" charset="-120"/>
+              </a:rPr>
+              <a:t>Backup: how we would prove cause — and our limits</a:t>
+            </a:r>
+            <a:endParaRPr lang="en-US" sz="3000" dirty="0"/>
+          </a:p>
+        </p:txBody>
+      </p:sp>
+      <p:sp>
+        <p:nvSpPr>
+          <p:cNvPr id="3" name="Shape 1"/>
+          <p:cNvSpPr/>
+          <p:nvPr/>
+        </p:nvSpPr>
+        <p:spPr>
+          <a:xfrm>
+            <a:off x="548640" y="1325880"/>
+            <a:ext cx="5440680" cy="4206240"/>
+          </a:xfrm>
+          <a:prstGeom prst="roundRect">
+            <a:avLst>
+              <a:gd name="adj" fmla="val 1739"/>
+            </a:avLst>
+          </a:prstGeom>
+          <a:solidFill>
+            <a:srgbClr val="EAF2FC"/>
+          </a:solidFill>
+          <a:ln w="12700">
+            <a:solidFill>
+              <a:srgbClr val="EAF2FC"/>
+            </a:solidFill>
+            <a:prstDash val="solid"/>
+          </a:ln>
+        </p:spPr>
+      </p:sp>
+      <p:sp>
+        <p:nvSpPr>
+          <p:cNvPr id="4" name="Text 2"/>
+          <p:cNvSpPr txBox="1"/>
+          <p:nvPr/>
+        </p:nvSpPr>
+        <p:spPr>
+          <a:xfrm>
+            <a:off x="777240" y="1508760"/>
+            <a:ext cx="5029200" cy="3931920"/>
+          </a:xfrm>
+          <a:prstGeom prst="rect">
+            <a:avLst/>
+          </a:prstGeom>
+          <a:noFill/>
+          <a:ln/>
+        </p:spPr>
+        <p:txBody>
+          <a:bodyPr wrap="square" lIns="0" tIns="0" rIns="0" bIns="0" rtlCol="0" anchor="t"/>
+          <a:lstStyle/>
+          <a:p>
+            <a:pPr marL="342900" indent="-342900">
+              <a:spcAft>
+                <a:spcPts val="700"/>
+              </a:spcAft>
+              <a:buSzPct val="100000"/>
+              <a:buChar char="•"/>
+            </a:pPr>
+            <a:r>
+              <a:rPr lang="en-US" sz="1350" dirty="0">
+                <a:solidFill>
+                  <a:srgbClr val="1B1F27"/>
+                </a:solidFill>
+                <a:latin typeface="Calibri" pitchFamily="34" charset="0"/>
+                <a:ea typeface="Calibri" pitchFamily="34" charset="-122"/>
+                <a:cs typeface="Calibri" pitchFamily="34" charset="-120"/>
+              </a:rPr>
+              <a:t>Experiment (needs ethics approval): show 2,400 people the same inflation facts framed four ways — balanced, as a rate, as a price level, as household cost — and measure their sentiment.</a:t>
+            </a:r>
+            <a:endParaRPr lang="en-US" sz="1350" dirty="0"/>
+          </a:p>
+          <a:p>
+            <a:pPr marL="342900" indent="-342900">
+              <a:spcAft>
+                <a:spcPts val="700"/>
+              </a:spcAft>
+              <a:buSzPct val="100000"/>
+              <a:buChar char="•"/>
+            </a:pPr>
+            <a:r>
+              <a:rPr lang="en-US" sz="1350" dirty="0">
+                <a:solidFill>
+                  <a:srgbClr val="1B1F27"/>
+                </a:solidFill>
+                <a:latin typeface="Calibri" pitchFamily="34" charset="0"/>
+                <a:ea typeface="Calibri" pitchFamily="34" charset="-122"/>
+                <a:cs typeface="Calibri" pitchFamily="34" charset="-120"/>
+              </a:rPr>
+              <a:t>Quasi-experiment: compare places that watch different TV channels (channel position is close to random), using survey data with locations.</a:t>
+            </a:r>
+            <a:endParaRPr lang="en-US" sz="1350" dirty="0"/>
+          </a:p>
+          <a:p>
+            <a:pPr marL="342900" indent="-342900">
+              <a:spcAft>
+                <a:spcPts val="700"/>
+              </a:spcAft>
+              <a:buSzPct val="100000"/>
+              <a:buChar char="•"/>
+            </a:pPr>
+            <a:r>
+              <a:rPr lang="en-US" sz="1350" dirty="0">
+                <a:solidFill>
+                  <a:srgbClr val="1B1F27"/>
+                </a:solidFill>
+                <a:latin typeface="Calibri" pitchFamily="34" charset="0"/>
+                <a:ea typeface="Calibri" pitchFamily="34" charset="-122"/>
+                <a:cs typeface="Calibri" pitchFamily="34" charset="-120"/>
+              </a:rPr>
+              <a:t>Linking a lab result to the national number needs exposure data, matching the survey's population, and decay estimates.</a:t>
+            </a:r>
+            <a:endParaRPr lang="en-US" sz="1350" dirty="0"/>
+          </a:p>
+        </p:txBody>
+      </p:sp>
+      <p:sp>
+        <p:nvSpPr>
+          <p:cNvPr id="5" name="Shape 3"/>
+          <p:cNvSpPr/>
+          <p:nvPr/>
+        </p:nvSpPr>
+        <p:spPr>
+          <a:xfrm>
+            <a:off x="6172200" y="1325880"/>
+            <a:ext cx="5440680" cy="4206240"/>
+          </a:xfrm>
+          <a:prstGeom prst="roundRect">
+            <a:avLst>
+              <a:gd name="adj" fmla="val 1739"/>
+            </a:avLst>
+          </a:prstGeom>
+          <a:solidFill>
+            <a:srgbClr val="F2F4F7"/>
+          </a:solidFill>
+          <a:ln w="12700">
+            <a:solidFill>
+              <a:srgbClr val="F2F4F7"/>
+            </a:solidFill>
+            <a:prstDash val="solid"/>
+          </a:ln>
+        </p:spPr>
+      </p:sp>
+      <p:sp>
+        <p:nvSpPr>
+          <p:cNvPr id="6" name="Text 4"/>
+          <p:cNvSpPr txBox="1"/>
+          <p:nvPr/>
+        </p:nvSpPr>
+        <p:spPr>
+          <a:xfrm>
+            <a:off x="6400800" y="1508760"/>
+            <a:ext cx="5029200" cy="3931920"/>
+          </a:xfrm>
+          <a:prstGeom prst="rect">
+            <a:avLst/>
+          </a:prstGeom>
+          <a:noFill/>
+          <a:ln/>
+        </p:spPr>
+        <p:txBody>
+          <a:bodyPr wrap="square" lIns="0" tIns="0" rIns="0" bIns="0" rtlCol="0" anchor="t"/>
+          <a:lstStyle/>
+          <a:p>
+            <a:pPr marL="342900" indent="-342900">
+              <a:spcAft>
+                <a:spcPts val="700"/>
+              </a:spcAft>
+              <a:buSzPct val="100000"/>
+              <a:buChar char="•"/>
+            </a:pPr>
+            <a:r>
+              <a:rPr lang="en-US" sz="1350" dirty="0">
+                <a:solidFill>
+                  <a:srgbClr val="1B1F27"/>
+                </a:solidFill>
+                <a:latin typeface="Calibri" pitchFamily="34" charset="0"/>
+                <a:ea typeface="Calibri" pitchFamily="34" charset="-122"/>
+                <a:cs typeface="Calibri" pitchFamily="34" charset="-120"/>
+              </a:rPr>
+              <a:t>One human labeler (re-check used instead of a second person).</a:t>
+            </a:r>
+            <a:endParaRPr lang="en-US" sz="1350" dirty="0"/>
+          </a:p>
+          <a:p>
+            <a:pPr marL="342900" indent="-342900">
+              <a:spcAft>
+                <a:spcPts val="700"/>
+              </a:spcAft>
+              <a:buSzPct val="100000"/>
+              <a:buChar char="•"/>
+            </a:pPr>
+            <a:r>
+              <a:rPr lang="en-US" sz="1350" dirty="0">
+                <a:solidFill>
+                  <a:srgbClr val="1B1F27"/>
+                </a:solidFill>
+                <a:latin typeface="Calibri" pitchFamily="34" charset="0"/>
+                <a:ea typeface="Calibri" pitchFamily="34" charset="-122"/>
+                <a:cs typeface="Calibri" pitchFamily="34" charset="-120"/>
+              </a:rPr>
+              <a:t>AI coder reacts slightly to party names (7% of labels flip) — reported.</a:t>
+            </a:r>
+            <a:endParaRPr lang="en-US" sz="1350" dirty="0"/>
+          </a:p>
+          <a:p>
+            <a:pPr marL="342900" indent="-342900">
+              <a:spcAft>
+                <a:spcPts val="700"/>
+              </a:spcAft>
+              <a:buSzPct val="100000"/>
+              <a:buChar char="•"/>
+            </a:pPr>
+            <a:r>
+              <a:rPr lang="en-US" sz="1350" dirty="0">
+                <a:solidFill>
+                  <a:srgbClr val="1B1F27"/>
+                </a:solidFill>
+                <a:latin typeface="Calibri" pitchFamily="34" charset="0"/>
+                <a:ea typeface="Calibri" pitchFamily="34" charset="-122"/>
+                <a:cs typeface="Calibri" pitchFamily="34" charset="-120"/>
+              </a:rPr>
+              <a:t>Google News ranking and short social-media history limit the corpus.</a:t>
+            </a:r>
+            <a:endParaRPr lang="en-US" sz="1350" dirty="0"/>
+          </a:p>
+          <a:p>
+            <a:pPr marL="342900" indent="-342900">
+              <a:spcAft>
+                <a:spcPts val="700"/>
+              </a:spcAft>
+              <a:buSzPct val="100000"/>
+              <a:buChar char="•"/>
+            </a:pPr>
+            <a:r>
+              <a:rPr lang="en-US" sz="1350" dirty="0">
+                <a:solidFill>
+                  <a:srgbClr val="1B1F27"/>
+                </a:solidFill>
+                <a:latin typeface="Calibri" pitchFamily="34" charset="0"/>
+                <a:ea typeface="Calibri" pitchFamily="34" charset="-122"/>
+                <a:cs typeface="Calibri" pitchFamily="34" charset="-120"/>
+              </a:rPr>
+              <a:t>No data on what each survey respondent actually read.</a:t>
+            </a:r>
+            <a:endParaRPr lang="en-US" sz="1350" dirty="0"/>
+          </a:p>
+          <a:p>
+            <a:pPr marL="342900" indent="-342900">
+              <a:spcAft>
+                <a:spcPts val="700"/>
+              </a:spcAft>
+              <a:buSzPct val="100000"/>
+              <a:buChar char="•"/>
+            </a:pPr>
+            <a:r>
+              <a:rPr lang="en-US" sz="1350" dirty="0">
+                <a:solidFill>
+                  <a:srgbClr val="1B1F27"/>
+                </a:solidFill>
+                <a:latin typeface="Calibri" pitchFamily="34" charset="0"/>
+                <a:ea typeface="Calibri" pitchFamily="34" charset="-122"/>
+                <a:cs typeface="Calibri" pitchFamily="34" charset="-120"/>
+              </a:rPr>
+              <a:t>About 12 points of the drop remain unexplained.</a:t>
+            </a:r>
+            <a:endParaRPr lang="en-US" sz="1350" dirty="0"/>
+          </a:p>
+        </p:txBody>
+      </p:sp>
+      <p:sp>
+        <p:nvSpPr>
+          <p:cNvPr id="25" name="Slide Number Placeholder 0"/>
+          <p:cNvSpPr>
+            <a:spLocks noGrp="1"/>
+          </p:cNvSpPr>
+          <p:nvPr>
+            <p:ph type="sldNum" sz="quarter" idx="4294967295"/>
+          </p:nvPr>
+        </p:nvSpPr>
+        <p:spPr>
+          <a:xfrm>
+            <a:off x="11247120" y="6400800"/>
+            <a:ext cx="457200" cy="274320"/>
+          </a:xfrm>
+          <a:prstGeom prst="rect">
+            <a:avLst/>
+          </a:prstGeom>
+          <a:extLst>
+            <a:ext uri="{C572A759-6A51-4108-AA02-DFA0A04FC94B}">
+              <ma14:wrappingTextBoxFlag xmlns:ma14="http://schemas.microsoft.com/office/mac/drawingml/2011/main" val="0"/>
+            </a:ext>
+          </a:extLst>
+        </p:spPr>
+        <p:txBody>
+          <a:bodyPr/>
+          <a:lstStyle>
+            <a:lvl1pPr>
+              <a:defRPr sz="900">
+                <a:solidFill>
+                  <a:srgbClr val="7A8392"/>
+                </a:solidFill>
+              </a:defRPr>
+            </a:lvl1pPr>
+          </a:lstStyle>
+          <a:p>
+            <a:pPr algn="l"/>
+            <a:fld id="{F7021451-1387-4CA6-816F-3879F97B5CBC}" type="slidenum">
+              <a:rPr b="0" lang="en-US"/>
+              <a:t>18</a:t>
+            </a:fld>
+            <a:endParaRPr lang="en-US"/>
           </a:p>
         </p:txBody>
       </p:sp>
@@ -7562,21 +11662,453 @@
                 <a:ea typeface="Cambria" pitchFamily="34" charset="-122"/>
                 <a:cs typeface="Cambria" pitchFamily="34" charset="-120"/>
               </a:rPr>
-              <a:t>The economy looks OK. People feel terrible.</a:t>
+              <a:t>On paper the economy is fine. People feel terrible.</a:t>
             </a:r>
             <a:endParaRPr lang="en-US" sz="3000" dirty="0"/>
+          </a:p>
+        </p:txBody>
+      </p:sp>
+      <p:sp>
+        <p:nvSpPr>
+          <p:cNvPr id="3" name="Shape 1"/>
+          <p:cNvSpPr/>
+          <p:nvPr/>
+        </p:nvSpPr>
+        <p:spPr>
+          <a:xfrm>
+            <a:off x="548640" y="1234440"/>
+            <a:ext cx="3520440" cy="1143000"/>
+          </a:xfrm>
+          <a:prstGeom prst="roundRect">
+            <a:avLst>
+              <a:gd name="adj" fmla="val 6400"/>
+            </a:avLst>
+          </a:prstGeom>
+          <a:solidFill>
+            <a:srgbClr val="EAF2FC"/>
+          </a:solidFill>
+          <a:ln w="12700">
+            <a:solidFill>
+              <a:srgbClr val="EAF2FC"/>
+            </a:solidFill>
+            <a:prstDash val="solid"/>
+          </a:ln>
+        </p:spPr>
+      </p:sp>
+      <p:sp>
+        <p:nvSpPr>
+          <p:cNvPr id="4" name="Text 2"/>
+          <p:cNvSpPr txBox="1"/>
+          <p:nvPr/>
+        </p:nvSpPr>
+        <p:spPr>
+          <a:xfrm>
+            <a:off x="777240" y="1298448"/>
+            <a:ext cx="1463040" cy="594360"/>
+          </a:xfrm>
+          <a:prstGeom prst="rect">
+            <a:avLst/>
+          </a:prstGeom>
+          <a:noFill/>
+          <a:ln/>
+        </p:spPr>
+        <p:txBody>
+          <a:bodyPr wrap="square" lIns="0" tIns="0" rIns="0" bIns="0" rtlCol="0" anchor="t"/>
+          <a:lstStyle/>
+          <a:p>
+            <a:pPr indent="0" marL="0">
+              <a:buNone/>
+            </a:pPr>
+            <a:r>
+              <a:rPr lang="en-US" sz="3000" b="1" dirty="0">
+                <a:solidFill>
+                  <a:srgbClr val="2A78D6"/>
+                </a:solidFill>
+                <a:latin typeface="Cambria" pitchFamily="34" charset="0"/>
+                <a:ea typeface="Cambria" pitchFamily="34" charset="-122"/>
+                <a:cs typeface="Cambria" pitchFamily="34" charset="-120"/>
+              </a:rPr>
+              <a:t>4.2%</a:t>
+            </a:r>
+            <a:endParaRPr lang="en-US" sz="3000" dirty="0"/>
+          </a:p>
+        </p:txBody>
+      </p:sp>
+      <p:sp>
+        <p:nvSpPr>
+          <p:cNvPr id="5" name="Text 3"/>
+          <p:cNvSpPr txBox="1"/>
+          <p:nvPr/>
+        </p:nvSpPr>
+        <p:spPr>
+          <a:xfrm>
+            <a:off x="2240280" y="1353312"/>
+            <a:ext cx="1737360" cy="502920"/>
+          </a:xfrm>
+          <a:prstGeom prst="rect">
+            <a:avLst/>
+          </a:prstGeom>
+          <a:noFill/>
+          <a:ln/>
+        </p:spPr>
+        <p:txBody>
+          <a:bodyPr wrap="square" lIns="0" tIns="0" rIns="0" bIns="0" rtlCol="0" anchor="t"/>
+          <a:lstStyle/>
+          <a:p>
+            <a:pPr indent="0" marL="0">
+              <a:buNone/>
+            </a:pPr>
+            <a:r>
+              <a:rPr lang="en-US" sz="1300" b="1" dirty="0">
+                <a:solidFill>
+                  <a:schemeClr val="tx1"/>
+                </a:solidFill>
+                <a:latin typeface="Calibri" pitchFamily="34" charset="0"/>
+                <a:ea typeface="Calibri" pitchFamily="34" charset="-122"/>
+                <a:cs typeface="Calibri" pitchFamily="34" charset="-120"/>
+              </a:rPr>
+              <a:t>Unemployment</a:t>
+            </a:r>
+            <a:endParaRPr lang="en-US" sz="1300" dirty="0"/>
+          </a:p>
+        </p:txBody>
+      </p:sp>
+      <p:sp>
+        <p:nvSpPr>
+          <p:cNvPr id="6" name="Text 4"/>
+          <p:cNvSpPr txBox="1"/>
+          <p:nvPr/>
+        </p:nvSpPr>
+        <p:spPr>
+          <a:xfrm>
+            <a:off x="777240" y="1901952"/>
+            <a:ext cx="3108960" cy="411480"/>
+          </a:xfrm>
+          <a:prstGeom prst="rect">
+            <a:avLst/>
+          </a:prstGeom>
+          <a:noFill/>
+          <a:ln/>
+        </p:spPr>
+        <p:txBody>
+          <a:bodyPr wrap="square" lIns="0" tIns="0" rIns="0" bIns="0" rtlCol="0" anchor="t"/>
+          <a:lstStyle/>
+          <a:p>
+            <a:pPr indent="0" marL="0">
+              <a:buNone/>
+            </a:pPr>
+            <a:r>
+              <a:rPr lang="en-US" sz="1150" dirty="0">
+                <a:solidFill>
+                  <a:srgbClr val="3A4150"/>
+                </a:solidFill>
+                <a:latin typeface="Calibri" pitchFamily="34" charset="0"/>
+                <a:ea typeface="Calibri" pitchFamily="34" charset="-122"/>
+                <a:cs typeface="Calibri" pitchFamily="34" charset="-120"/>
+              </a:rPr>
+              <a:t>Low — the 1978–2019 average was 6.2%</a:t>
+            </a:r>
+            <a:endParaRPr lang="en-US" sz="1150" dirty="0"/>
+          </a:p>
+        </p:txBody>
+      </p:sp>
+      <p:sp>
+        <p:nvSpPr>
+          <p:cNvPr id="7" name="Shape 5"/>
+          <p:cNvSpPr/>
+          <p:nvPr/>
+        </p:nvSpPr>
+        <p:spPr>
+          <a:xfrm>
+            <a:off x="4297680" y="1234440"/>
+            <a:ext cx="3520440" cy="1143000"/>
+          </a:xfrm>
+          <a:prstGeom prst="roundRect">
+            <a:avLst>
+              <a:gd name="adj" fmla="val 6400"/>
+            </a:avLst>
+          </a:prstGeom>
+          <a:solidFill>
+            <a:srgbClr val="EAF2FC"/>
+          </a:solidFill>
+          <a:ln w="12700">
+            <a:solidFill>
+              <a:srgbClr val="EAF2FC"/>
+            </a:solidFill>
+            <a:prstDash val="solid"/>
+          </a:ln>
+        </p:spPr>
+      </p:sp>
+      <p:sp>
+        <p:nvSpPr>
+          <p:cNvPr id="8" name="Text 6"/>
+          <p:cNvSpPr txBox="1"/>
+          <p:nvPr/>
+        </p:nvSpPr>
+        <p:spPr>
+          <a:xfrm>
+            <a:off x="4526280" y="1298448"/>
+            <a:ext cx="1463040" cy="594360"/>
+          </a:xfrm>
+          <a:prstGeom prst="rect">
+            <a:avLst/>
+          </a:prstGeom>
+          <a:noFill/>
+          <a:ln/>
+        </p:spPr>
+        <p:txBody>
+          <a:bodyPr wrap="square" lIns="0" tIns="0" rIns="0" bIns="0" rtlCol="0" anchor="t"/>
+          <a:lstStyle/>
+          <a:p>
+            <a:pPr indent="0" marL="0">
+              <a:buNone/>
+            </a:pPr>
+            <a:r>
+              <a:rPr lang="en-US" sz="3000" b="1" dirty="0">
+                <a:solidFill>
+                  <a:srgbClr val="2A78D6"/>
+                </a:solidFill>
+                <a:latin typeface="Cambria" pitchFamily="34" charset="0"/>
+                <a:ea typeface="Cambria" pitchFamily="34" charset="-122"/>
+                <a:cs typeface="Cambria" pitchFamily="34" charset="-120"/>
+              </a:rPr>
+              <a:t>+2.2%</a:t>
+            </a:r>
+            <a:endParaRPr lang="en-US" sz="3000" dirty="0"/>
+          </a:p>
+        </p:txBody>
+      </p:sp>
+      <p:sp>
+        <p:nvSpPr>
+          <p:cNvPr id="9" name="Text 7"/>
+          <p:cNvSpPr txBox="1"/>
+          <p:nvPr/>
+        </p:nvSpPr>
+        <p:spPr>
+          <a:xfrm>
+            <a:off x="5989320" y="1353312"/>
+            <a:ext cx="1737360" cy="502920"/>
+          </a:xfrm>
+          <a:prstGeom prst="rect">
+            <a:avLst/>
+          </a:prstGeom>
+          <a:noFill/>
+          <a:ln/>
+        </p:spPr>
+        <p:txBody>
+          <a:bodyPr wrap="square" lIns="0" tIns="0" rIns="0" bIns="0" rtlCol="0" anchor="t"/>
+          <a:lstStyle/>
+          <a:p>
+            <a:pPr indent="0" marL="0">
+              <a:buNone/>
+            </a:pPr>
+            <a:r>
+              <a:rPr lang="en-US" sz="1300" b="1" dirty="0">
+                <a:solidFill>
+                  <a:schemeClr val="tx1"/>
+                </a:solidFill>
+                <a:latin typeface="Calibri" pitchFamily="34" charset="0"/>
+                <a:ea typeface="Calibri" pitchFamily="34" charset="-122"/>
+                <a:cs typeface="Calibri" pitchFamily="34" charset="-120"/>
+              </a:rPr>
+              <a:t>Economic growth (GDP, yearly pace)</a:t>
+            </a:r>
+            <a:endParaRPr lang="en-US" sz="1300" dirty="0"/>
+          </a:p>
+        </p:txBody>
+      </p:sp>
+      <p:sp>
+        <p:nvSpPr>
+          <p:cNvPr id="10" name="Text 8"/>
+          <p:cNvSpPr txBox="1"/>
+          <p:nvPr/>
+        </p:nvSpPr>
+        <p:spPr>
+          <a:xfrm>
+            <a:off x="4526280" y="1901952"/>
+            <a:ext cx="3108960" cy="411480"/>
+          </a:xfrm>
+          <a:prstGeom prst="rect">
+            <a:avLst/>
+          </a:prstGeom>
+          <a:noFill/>
+          <a:ln/>
+        </p:spPr>
+        <p:txBody>
+          <a:bodyPr wrap="square" lIns="0" tIns="0" rIns="0" bIns="0" rtlCol="0" anchor="t"/>
+          <a:lstStyle/>
+          <a:p>
+            <a:pPr indent="0" marL="0">
+              <a:buNone/>
+            </a:pPr>
+            <a:r>
+              <a:rPr lang="en-US" sz="1150" dirty="0">
+                <a:solidFill>
+                  <a:srgbClr val="3A4150"/>
+                </a:solidFill>
+                <a:latin typeface="Calibri" pitchFamily="34" charset="0"/>
+                <a:ea typeface="Calibri" pitchFamily="34" charset="-122"/>
+                <a:cs typeface="Calibri" pitchFamily="34" charset="-120"/>
+              </a:rPr>
+              <a:t>Normal, healthy growth — no recession</a:t>
+            </a:r>
+            <a:endParaRPr lang="en-US" sz="1150" dirty="0"/>
+          </a:p>
+        </p:txBody>
+      </p:sp>
+      <p:sp>
+        <p:nvSpPr>
+          <p:cNvPr id="11" name="Shape 9"/>
+          <p:cNvSpPr/>
+          <p:nvPr/>
+        </p:nvSpPr>
+        <p:spPr>
+          <a:xfrm>
+            <a:off x="8046720" y="1234440"/>
+            <a:ext cx="3520440" cy="1143000"/>
+          </a:xfrm>
+          <a:prstGeom prst="roundRect">
+            <a:avLst>
+              <a:gd name="adj" fmla="val 6400"/>
+            </a:avLst>
+          </a:prstGeom>
+          <a:solidFill>
+            <a:srgbClr val="EAF2FC"/>
+          </a:solidFill>
+          <a:ln w="12700">
+            <a:solidFill>
+              <a:srgbClr val="EAF2FC"/>
+            </a:solidFill>
+            <a:prstDash val="solid"/>
+          </a:ln>
+        </p:spPr>
+      </p:sp>
+      <p:sp>
+        <p:nvSpPr>
+          <p:cNvPr id="12" name="Text 10"/>
+          <p:cNvSpPr txBox="1"/>
+          <p:nvPr/>
+        </p:nvSpPr>
+        <p:spPr>
+          <a:xfrm>
+            <a:off x="8275320" y="1298448"/>
+            <a:ext cx="1463040" cy="594360"/>
+          </a:xfrm>
+          <a:prstGeom prst="rect">
+            <a:avLst/>
+          </a:prstGeom>
+          <a:noFill/>
+          <a:ln/>
+        </p:spPr>
+        <p:txBody>
+          <a:bodyPr wrap="square" lIns="0" tIns="0" rIns="0" bIns="0" rtlCol="0" anchor="t"/>
+          <a:lstStyle/>
+          <a:p>
+            <a:pPr indent="0" marL="0">
+              <a:buNone/>
+            </a:pPr>
+            <a:r>
+              <a:rPr lang="en-US" sz="3000" b="1" dirty="0">
+                <a:solidFill>
+                  <a:srgbClr val="2A78D6"/>
+                </a:solidFill>
+                <a:latin typeface="Cambria" pitchFamily="34" charset="0"/>
+                <a:ea typeface="Cambria" pitchFamily="34" charset="-122"/>
+                <a:cs typeface="Cambria" pitchFamily="34" charset="-120"/>
+              </a:rPr>
+              <a:t>3.4%</a:t>
+            </a:r>
+            <a:endParaRPr lang="en-US" sz="3000" dirty="0"/>
+          </a:p>
+        </p:txBody>
+      </p:sp>
+      <p:sp>
+        <p:nvSpPr>
+          <p:cNvPr id="13" name="Text 11"/>
+          <p:cNvSpPr txBox="1"/>
+          <p:nvPr/>
+        </p:nvSpPr>
+        <p:spPr>
+          <a:xfrm>
+            <a:off x="9738360" y="1353312"/>
+            <a:ext cx="1737360" cy="502920"/>
+          </a:xfrm>
+          <a:prstGeom prst="rect">
+            <a:avLst/>
+          </a:prstGeom>
+          <a:noFill/>
+          <a:ln/>
+        </p:spPr>
+        <p:txBody>
+          <a:bodyPr wrap="square" lIns="0" tIns="0" rIns="0" bIns="0" rtlCol="0" anchor="t"/>
+          <a:lstStyle/>
+          <a:p>
+            <a:pPr indent="0" marL="0">
+              <a:buNone/>
+            </a:pPr>
+            <a:r>
+              <a:rPr lang="en-US" sz="1300" b="1" dirty="0">
+                <a:solidFill>
+                  <a:schemeClr val="tx1"/>
+                </a:solidFill>
+                <a:latin typeface="Calibri" pitchFamily="34" charset="0"/>
+                <a:ea typeface="Calibri" pitchFamily="34" charset="-122"/>
+                <a:cs typeface="Calibri" pitchFamily="34" charset="-120"/>
+              </a:rPr>
+              <a:t>Inflation (PCE, latest)</a:t>
+            </a:r>
+            <a:endParaRPr lang="en-US" sz="1300" dirty="0"/>
+          </a:p>
+        </p:txBody>
+      </p:sp>
+      <p:sp>
+        <p:nvSpPr>
+          <p:cNvPr id="14" name="Text 12"/>
+          <p:cNvSpPr txBox="1"/>
+          <p:nvPr/>
+        </p:nvSpPr>
+        <p:spPr>
+          <a:xfrm>
+            <a:off x="8275320" y="1901952"/>
+            <a:ext cx="3108960" cy="411480"/>
+          </a:xfrm>
+          <a:prstGeom prst="rect">
+            <a:avLst/>
+          </a:prstGeom>
+          <a:noFill/>
+          <a:ln/>
+        </p:spPr>
+        <p:txBody>
+          <a:bodyPr wrap="square" lIns="0" tIns="0" rIns="0" bIns="0" rtlCol="0" anchor="t"/>
+          <a:lstStyle/>
+          <a:p>
+            <a:pPr indent="0" marL="0">
+              <a:buNone/>
+            </a:pPr>
+            <a:r>
+              <a:rPr lang="en-US" sz="1150" dirty="0">
+                <a:solidFill>
+                  <a:srgbClr val="3A4150"/>
+                </a:solidFill>
+                <a:latin typeface="Calibri" pitchFamily="34" charset="0"/>
+                <a:ea typeface="Calibri" pitchFamily="34" charset="-122"/>
+                <a:cs typeface="Calibri" pitchFamily="34" charset="-120"/>
+              </a:rPr>
+              <a:t>Above the 2% goal, but far below the 7.2% peak of 2022</a:t>
+            </a:r>
+            <a:endParaRPr lang="en-US" sz="1150" dirty="0"/>
           </a:p>
         </p:txBody>
       </p:sp>
       <p:graphicFrame>
         <p:nvGraphicFramePr>
-          <p:cNvPr id="3" name="Chart 0" descr=""/>
+          <p:cNvPr id="15" name="Chart 0" descr=""/>
           <p:cNvGraphicFramePr/>
           <p:nvPr/>
         </p:nvGraphicFramePr>
         <p:xfrm>
-          <a:off x="548640" y="1234440"/>
-          <a:ext cx="7498080" cy="4343400"/>
+          <a:off x="548640" y="2514600"/>
+          <a:ext cx="7498080" cy="3108960"/>
         </p:xfrm>
         <a:graphic xmlns:a="http://schemas.openxmlformats.org/drawingml/2006/main">
           <a:graphicData uri="http://schemas.openxmlformats.org/drawingml/2006/chart">
@@ -7586,13 +12118,13 @@
       </p:graphicFrame>
       <p:sp>
         <p:nvSpPr>
-          <p:cNvPr id="4" name="Shape 1"/>
+          <p:cNvPr id="16" name="Shape 13"/>
           <p:cNvSpPr/>
           <p:nvPr/>
         </p:nvSpPr>
         <p:spPr>
           <a:xfrm>
-            <a:off x="8412480" y="1325880"/>
+            <a:off x="8412480" y="2560320"/>
             <a:ext cx="3200400" cy="1234440"/>
           </a:xfrm>
           <a:prstGeom prst="roundRect">
@@ -7613,13 +12145,13 @@
       </p:sp>
       <p:sp>
         <p:nvSpPr>
-          <p:cNvPr id="5" name="Text 2"/>
+          <p:cNvPr id="17" name="Text 14"/>
           <p:cNvSpPr txBox="1"/>
           <p:nvPr/>
         </p:nvSpPr>
         <p:spPr>
           <a:xfrm>
-            <a:off x="8641080" y="1417320"/>
+            <a:off x="8641080" y="2651760"/>
             <a:ext cx="2743200" cy="594360"/>
           </a:xfrm>
           <a:prstGeom prst="rect">
@@ -7652,13 +12184,13 @@
       </p:sp>
       <p:sp>
         <p:nvSpPr>
-          <p:cNvPr id="6" name="Text 3"/>
+          <p:cNvPr id="18" name="Text 15"/>
           <p:cNvSpPr txBox="1"/>
           <p:nvPr/>
         </p:nvSpPr>
         <p:spPr>
           <a:xfrm>
-            <a:off x="8641080" y="2039112"/>
+            <a:off x="8641080" y="3273552"/>
             <a:ext cx="2743200" cy="475488"/>
           </a:xfrm>
           <a:prstGeom prst="rect">
@@ -7683,7 +12215,7 @@
                 <a:ea typeface="Calibri" pitchFamily="34" charset="-122"/>
                 <a:cs typeface="Calibri" pitchFamily="34" charset="-120"/>
               </a:rPr>
-              <a:t>'Should be' vs actual, October 2026</a:t>
+              <a:t>'Should feel' vs actually feel, October 2026</a:t>
             </a:r>
             <a:endParaRPr lang="en-US" sz="1200" dirty="0"/>
           </a:p>
@@ -7691,13 +12223,13 @@
       </p:sp>
       <p:sp>
         <p:nvSpPr>
-          <p:cNvPr id="7" name="Shape 4"/>
+          <p:cNvPr id="19" name="Shape 16"/>
           <p:cNvSpPr/>
           <p:nvPr/>
         </p:nvSpPr>
         <p:spPr>
           <a:xfrm>
-            <a:off x="8412480" y="2697480"/>
+            <a:off x="8412480" y="3977640"/>
             <a:ext cx="3200400" cy="1234440"/>
           </a:xfrm>
           <a:prstGeom prst="roundRect">
@@ -7718,13 +12250,13 @@
       </p:sp>
       <p:sp>
         <p:nvSpPr>
-          <p:cNvPr id="8" name="Text 5"/>
+          <p:cNvPr id="20" name="Text 17"/>
           <p:cNvSpPr txBox="1"/>
           <p:nvPr/>
         </p:nvSpPr>
         <p:spPr>
           <a:xfrm>
-            <a:off x="8641080" y="2788920"/>
+            <a:off x="8641080" y="4069080"/>
             <a:ext cx="2743200" cy="594360"/>
           </a:xfrm>
           <a:prstGeom prst="rect">
@@ -7757,13 +12289,13 @@
       </p:sp>
       <p:sp>
         <p:nvSpPr>
-          <p:cNvPr id="9" name="Text 6"/>
+          <p:cNvPr id="21" name="Text 18"/>
           <p:cNvSpPr txBox="1"/>
           <p:nvPr/>
         </p:nvSpPr>
         <p:spPr>
           <a:xfrm>
-            <a:off x="8641080" y="3410712"/>
+            <a:off x="8641080" y="4690872"/>
             <a:ext cx="2743200" cy="475488"/>
           </a:xfrm>
           <a:prstGeom prst="rect">
@@ -7788,7 +12320,7 @@
                 <a:ea typeface="Calibri" pitchFamily="34" charset="-122"/>
                 <a:cs typeface="Calibri" pitchFamily="34" charset="-120"/>
               </a:rPr>
-              <a:t>the gap is twice as big as in the 2008 financial crisis</a:t>
+              <a:t>the gap is twice as big as in the 2008 crisis; May 2026 (44.8) was the lowest ever</a:t>
             </a:r>
             <a:endParaRPr lang="en-US" sz="1200" dirty="0"/>
           </a:p>
@@ -7796,112 +12328,7 @@
       </p:sp>
       <p:sp>
         <p:nvSpPr>
-          <p:cNvPr id="10" name="Shape 7"/>
-          <p:cNvSpPr/>
-          <p:nvPr/>
-        </p:nvSpPr>
-        <p:spPr>
-          <a:xfrm>
-            <a:off x="8412480" y="4069080"/>
-            <a:ext cx="3200400" cy="1234440"/>
-          </a:xfrm>
-          <a:prstGeom prst="roundRect">
-            <a:avLst>
-              <a:gd name="adj" fmla="val 5926"/>
-            </a:avLst>
-          </a:prstGeom>
-          <a:solidFill>
-            <a:srgbClr val="F2F4F7"/>
-          </a:solidFill>
-          <a:ln w="12700">
-            <a:solidFill>
-              <a:srgbClr val="F2F4F7"/>
-            </a:solidFill>
-            <a:prstDash val="solid"/>
-          </a:ln>
-        </p:spPr>
-      </p:sp>
-      <p:sp>
-        <p:nvSpPr>
-          <p:cNvPr id="11" name="Text 8"/>
-          <p:cNvSpPr txBox="1"/>
-          <p:nvPr/>
-        </p:nvSpPr>
-        <p:spPr>
-          <a:xfrm>
-            <a:off x="8641080" y="4160520"/>
-            <a:ext cx="2743200" cy="594360"/>
-          </a:xfrm>
-          <a:prstGeom prst="rect">
-            <a:avLst/>
-          </a:prstGeom>
-          <a:noFill/>
-          <a:ln/>
-        </p:spPr>
-        <p:txBody>
-          <a:bodyPr wrap="square" lIns="0" tIns="0" rIns="0" bIns="0" rtlCol="0" anchor="t"/>
-          <a:lstStyle/>
-          <a:p>
-            <a:pPr indent="0" marL="0">
-              <a:buNone/>
-            </a:pPr>
-            <a:r>
-              <a:rPr lang="en-US" sz="3200" b="1" dirty="0">
-                <a:solidFill>
-                  <a:srgbClr val="3A4150"/>
-                </a:solidFill>
-                <a:latin typeface="Cambria" pitchFamily="34" charset="0"/>
-                <a:ea typeface="Cambria" pitchFamily="34" charset="-122"/>
-                <a:cs typeface="Cambria" pitchFamily="34" charset="-120"/>
-              </a:rPr>
-              <a:t>44.8</a:t>
-            </a:r>
-            <a:endParaRPr lang="en-US" sz="3200" dirty="0"/>
-          </a:p>
-        </p:txBody>
-      </p:sp>
-      <p:sp>
-        <p:nvSpPr>
-          <p:cNvPr id="12" name="Text 9"/>
-          <p:cNvSpPr txBox="1"/>
-          <p:nvPr/>
-        </p:nvSpPr>
-        <p:spPr>
-          <a:xfrm>
-            <a:off x="8641080" y="4782312"/>
-            <a:ext cx="2743200" cy="475488"/>
-          </a:xfrm>
-          <a:prstGeom prst="rect">
-            <a:avLst/>
-          </a:prstGeom>
-          <a:noFill/>
-          <a:ln/>
-        </p:spPr>
-        <p:txBody>
-          <a:bodyPr wrap="square" lIns="0" tIns="0" rIns="0" bIns="0" rtlCol="0" anchor="t"/>
-          <a:lstStyle/>
-          <a:p>
-            <a:pPr indent="0" marL="0">
-              <a:buNone/>
-            </a:pPr>
-            <a:r>
-              <a:rPr lang="en-US" sz="1200" dirty="0">
-                <a:solidFill>
-                  <a:srgbClr val="3A4150"/>
-                </a:solidFill>
-                <a:latin typeface="Calibri" pitchFamily="34" charset="0"/>
-                <a:ea typeface="Calibri" pitchFamily="34" charset="-122"/>
-                <a:cs typeface="Calibri" pitchFamily="34" charset="-120"/>
-              </a:rPr>
-              <a:t>May 2026: lowest reading since the survey began in 1952</a:t>
-            </a:r>
-            <a:endParaRPr lang="en-US" sz="1200" dirty="0"/>
-          </a:p>
-        </p:txBody>
-      </p:sp>
-      <p:sp>
-        <p:nvSpPr>
-          <p:cNvPr id="13" name="Shape 10"/>
+          <p:cNvPr id="22" name="Shape 19"/>
           <p:cNvSpPr/>
           <p:nvPr/>
         </p:nvSpPr>
@@ -7928,7 +12355,7 @@
       </p:sp>
       <p:sp>
         <p:nvSpPr>
-          <p:cNvPr id="14" name="Text 11"/>
+          <p:cNvPr id="23" name="Text 20"/>
           <p:cNvSpPr txBox="1"/>
           <p:nvPr/>
         </p:nvSpPr>
@@ -7973,7 +12400,7 @@
                 <a:ea typeface="Calibri" pitchFamily="34" charset="-122"/>
                 <a:cs typeface="Calibri" pitchFamily="34" charset="-120"/>
               </a:rPr>
-              <a:t>Official numbers say people should feel fine (~83). They feel near the worst ever (~46).</a:t>
+              <a:t>These numbers say people should feel fine (~83). They feel near the worst ever recorded (~46).</a:t>
             </a:r>
             <a:endParaRPr lang="en-US" sz="1500" dirty="0"/>
           </a:p>
@@ -10592,187 +15019,21 @@
                 <a:ea typeface="Cambria" pitchFamily="34" charset="-122"/>
                 <a:cs typeface="Cambria" pitchFamily="34" charset="-120"/>
               </a:rPr>
-              <a:t>Why 'inflation is down' doesn't feel like it</a:t>
+              <a:t>In their own words: people say it's prices and borrowing costs</a:t>
             </a:r>
             <a:endParaRPr lang="en-US" sz="3000" dirty="0"/>
-          </a:p>
-        </p:txBody>
-      </p:sp>
-      <p:sp>
-        <p:nvSpPr>
-          <p:cNvPr id="3" name="Shape 1"/>
-          <p:cNvSpPr/>
-          <p:nvPr/>
-        </p:nvSpPr>
-        <p:spPr>
-          <a:xfrm>
-            <a:off x="548640" y="1325880"/>
-            <a:ext cx="5120640" cy="4206240"/>
-          </a:xfrm>
-          <a:prstGeom prst="roundRect">
-            <a:avLst>
-              <a:gd name="adj" fmla="val 1739"/>
-            </a:avLst>
-          </a:prstGeom>
-          <a:solidFill>
-            <a:srgbClr val="EAF2FC"/>
-          </a:solidFill>
-          <a:ln w="12700">
-            <a:solidFill>
-              <a:srgbClr val="EAF2FC"/>
-            </a:solidFill>
-            <a:prstDash val="solid"/>
-          </a:ln>
-        </p:spPr>
-      </p:sp>
-      <p:sp>
-        <p:nvSpPr>
-          <p:cNvPr id="4" name="Text 2"/>
-          <p:cNvSpPr txBox="1"/>
-          <p:nvPr/>
-        </p:nvSpPr>
-        <p:spPr>
-          <a:xfrm>
-            <a:off x="777240" y="1508760"/>
-            <a:ext cx="4663440" cy="3931920"/>
-          </a:xfrm>
-          <a:prstGeom prst="rect">
-            <a:avLst/>
-          </a:prstGeom>
-          <a:noFill/>
-          <a:ln/>
-        </p:spPr>
-        <p:txBody>
-          <a:bodyPr wrap="square" lIns="0" tIns="0" rIns="0" bIns="0" rtlCol="0" anchor="t"/>
-          <a:lstStyle/>
-          <a:p>
-            <a:pPr indent="0" marL="0">
-              <a:spcAft>
-                <a:spcPts val="800"/>
-              </a:spcAft>
-              <a:buNone/>
-            </a:pPr>
-            <a:r>
-              <a:rPr lang="en-US" sz="1800" b="1" dirty="0">
-                <a:solidFill>
-                  <a:srgbClr val="2A78D6"/>
-                </a:solidFill>
-                <a:latin typeface="Calibri" pitchFamily="34" charset="0"/>
-                <a:ea typeface="Calibri" pitchFamily="34" charset="-122"/>
-                <a:cs typeface="Calibri" pitchFamily="34" charset="-120"/>
-              </a:rPr>
-              <a:t>The egg example</a:t>
-            </a:r>
-            <a:endParaRPr lang="en-US" sz="1800" dirty="0"/>
-          </a:p>
-          <a:p>
-            <a:pPr indent="0" marL="0">
-              <a:spcAft>
-                <a:spcPts val="400"/>
-              </a:spcAft>
-              <a:buNone/>
-            </a:pPr>
-            <a:r>
-              <a:rPr lang="en-US" sz="1500" dirty="0">
-                <a:solidFill>
-                  <a:schemeClr val="tx1"/>
-                </a:solidFill>
-                <a:latin typeface="Calibri" pitchFamily="34" charset="0"/>
-                <a:ea typeface="Calibri" pitchFamily="34" charset="-122"/>
-                <a:cs typeface="Calibri" pitchFamily="34" charset="-120"/>
-              </a:rPr>
-              <a:t>2021: eggs cost $2.</a:t>
-            </a:r>
-            <a:endParaRPr lang="en-US" sz="1800" dirty="0"/>
-          </a:p>
-          <a:p>
-            <a:pPr indent="0" marL="0">
-              <a:spcAft>
-                <a:spcPts val="400"/>
-              </a:spcAft>
-              <a:buNone/>
-            </a:pPr>
-            <a:r>
-              <a:rPr lang="en-US" sz="1500" dirty="0">
-                <a:solidFill>
-                  <a:schemeClr val="tx1"/>
-                </a:solidFill>
-                <a:latin typeface="Calibri" pitchFamily="34" charset="0"/>
-                <a:ea typeface="Calibri" pitchFamily="34" charset="-122"/>
-                <a:cs typeface="Calibri" pitchFamily="34" charset="-120"/>
-              </a:rPr>
-              <a:t>2023: eggs cost $4. Inflation was high.</a:t>
-            </a:r>
-            <a:endParaRPr lang="en-US" sz="1800" dirty="0"/>
-          </a:p>
-          <a:p>
-            <a:pPr indent="0" marL="0">
-              <a:spcAft>
-                <a:spcPts val="1200"/>
-              </a:spcAft>
-              <a:buNone/>
-            </a:pPr>
-            <a:r>
-              <a:rPr lang="en-US" sz="1500" dirty="0">
-                <a:solidFill>
-                  <a:schemeClr val="tx1"/>
-                </a:solidFill>
-                <a:latin typeface="Calibri" pitchFamily="34" charset="0"/>
-                <a:ea typeface="Calibri" pitchFamily="34" charset="-122"/>
-                <a:cs typeface="Calibri" pitchFamily="34" charset="-120"/>
-              </a:rPr>
-              <a:t>2026: eggs cost $4.12. The government says inflation is 'low' (3%).</a:t>
-            </a:r>
-            <a:endParaRPr lang="en-US" sz="1800" dirty="0"/>
-          </a:p>
-          <a:p>
-            <a:pPr indent="0" marL="0">
-              <a:spcAft>
-                <a:spcPts val="1200"/>
-              </a:spcAft>
-              <a:buNone/>
-            </a:pPr>
-            <a:r>
-              <a:rPr lang="en-US" sz="1500" b="1" dirty="0">
-                <a:solidFill>
-                  <a:schemeClr val="tx1"/>
-                </a:solidFill>
-                <a:latin typeface="Calibri" pitchFamily="34" charset="0"/>
-                <a:ea typeface="Calibri" pitchFamily="34" charset="-122"/>
-                <a:cs typeface="Calibri" pitchFamily="34" charset="-120"/>
-              </a:rPr>
-              <a:t>Official inflation measures how fast prices are rising now — not whether they came back down. People remember $2.</a:t>
-            </a:r>
-            <a:endParaRPr lang="en-US" sz="1800" dirty="0"/>
-          </a:p>
-          <a:p>
-            <a:pPr indent="0" marL="0">
-              <a:buNone/>
-            </a:pPr>
-            <a:r>
-              <a:rPr lang="en-US" sz="1400" dirty="0">
-                <a:solidFill>
-                  <a:srgbClr val="3A4150"/>
-                </a:solidFill>
-                <a:latin typeface="Calibri" pitchFamily="34" charset="0"/>
-                <a:ea typeface="Calibri" pitchFamily="34" charset="-122"/>
-                <a:cs typeface="Calibri" pitchFamily="34" charset="-120"/>
-              </a:rPr>
-              <a:t>It also leaves out loan costs: a 7% mortgage instead of 3% doesn't count as 'inflation'.</a:t>
-            </a:r>
-            <a:endParaRPr lang="en-US" sz="1800" dirty="0"/>
           </a:p>
         </p:txBody>
       </p:sp>
       <p:graphicFrame>
         <p:nvGraphicFramePr>
-          <p:cNvPr id="5" name="Chart 0" descr=""/>
+          <p:cNvPr id="3" name="Chart 0" descr=""/>
           <p:cNvGraphicFramePr/>
           <p:nvPr/>
         </p:nvGraphicFramePr>
         <p:xfrm>
-          <a:off x="5943600" y="1234440"/>
-          <a:ext cx="5669280" cy="4343400"/>
+          <a:off x="548640" y="1234440"/>
+          <a:ext cx="6949440" cy="4343400"/>
         </p:xfrm>
         <a:graphic xmlns:a="http://schemas.openxmlformats.org/drawingml/2006/main">
           <a:graphicData uri="http://schemas.openxmlformats.org/drawingml/2006/chart">
@@ -10780,6 +15041,132 @@
           </a:graphicData>
         </a:graphic>
       </p:graphicFrame>
+      <p:sp>
+        <p:nvSpPr>
+          <p:cNvPr id="4" name="Shape 1"/>
+          <p:cNvSpPr/>
+          <p:nvPr/>
+        </p:nvSpPr>
+        <p:spPr>
+          <a:xfrm>
+            <a:off x="7772400" y="1325880"/>
+            <a:ext cx="3840480" cy="4206240"/>
+          </a:xfrm>
+          <a:prstGeom prst="roundRect">
+            <a:avLst>
+              <a:gd name="adj" fmla="val 1905"/>
+            </a:avLst>
+          </a:prstGeom>
+          <a:solidFill>
+            <a:srgbClr val="F2F4F7"/>
+          </a:solidFill>
+          <a:ln w="12700">
+            <a:solidFill>
+              <a:srgbClr val="F2F4F7"/>
+            </a:solidFill>
+            <a:prstDash val="solid"/>
+          </a:ln>
+        </p:spPr>
+      </p:sp>
+      <p:sp>
+        <p:nvSpPr>
+          <p:cNvPr id="5" name="Text 2"/>
+          <p:cNvSpPr txBox="1"/>
+          <p:nvPr/>
+        </p:nvSpPr>
+        <p:spPr>
+          <a:xfrm>
+            <a:off x="8001000" y="1508760"/>
+            <a:ext cx="3429000" cy="3931920"/>
+          </a:xfrm>
+          <a:prstGeom prst="rect">
+            <a:avLst/>
+          </a:prstGeom>
+          <a:noFill/>
+          <a:ln/>
+        </p:spPr>
+        <p:txBody>
+          <a:bodyPr wrap="square" lIns="0" tIns="0" rIns="0" bIns="0" rtlCol="0" anchor="t"/>
+          <a:lstStyle/>
+          <a:p>
+            <a:pPr indent="0" marL="0">
+              <a:spcAft>
+                <a:spcPts val="600"/>
+              </a:spcAft>
+              <a:buNone/>
+            </a:pPr>
+            <a:r>
+              <a:rPr lang="en-US" sz="1600" b="1" dirty="0">
+                <a:solidFill>
+                  <a:srgbClr val="1B1F27"/>
+                </a:solidFill>
+                <a:latin typeface="Calibri" pitchFamily="34" charset="0"/>
+                <a:ea typeface="Calibri" pitchFamily="34" charset="-122"/>
+                <a:cs typeface="Calibri" pitchFamily="34" charset="-120"/>
+              </a:rPr>
+              <a:t>It's about today, not the future</a:t>
+            </a:r>
+            <a:endParaRPr lang="en-US" sz="1600" dirty="0"/>
+          </a:p>
+          <a:p>
+            <a:pPr indent="0" marL="0">
+              <a:spcAft>
+                <a:spcPts val="1200"/>
+              </a:spcAft>
+              <a:buNone/>
+            </a:pPr>
+            <a:r>
+              <a:rPr lang="en-US" sz="1350" dirty="0">
+                <a:solidFill>
+                  <a:srgbClr val="1B1F27"/>
+                </a:solidFill>
+                <a:latin typeface="Calibri" pitchFamily="34" charset="0"/>
+                <a:ea typeface="Calibri" pitchFamily="34" charset="-122"/>
+                <a:cs typeface="Calibri" pitchFamily="34" charset="-120"/>
+              </a:rPr>
+              <a:t>The gap in how people rate their situation right now (-43.7 points) is much bigger than in what they expect for the future (-25.8).</a:t>
+            </a:r>
+            <a:endParaRPr lang="en-US" sz="1600" dirty="0"/>
+          </a:p>
+          <a:p>
+            <a:pPr indent="0" marL="0">
+              <a:spcAft>
+                <a:spcPts val="600"/>
+              </a:spcAft>
+              <a:buNone/>
+            </a:pPr>
+            <a:r>
+              <a:rPr lang="en-US" sz="1600" b="1" dirty="0">
+                <a:solidFill>
+                  <a:srgbClr val="1B1F27"/>
+                </a:solidFill>
+                <a:latin typeface="Calibri" pitchFamily="34" charset="0"/>
+                <a:ea typeface="Calibri" pitchFamily="34" charset="-122"/>
+                <a:cs typeface="Calibri" pitchFamily="34" charset="-120"/>
+              </a:rPr>
+              <a:t>Worse than 2022 — even though inflation was higher then</a:t>
+            </a:r>
+            <a:endParaRPr lang="en-US" sz="1600" dirty="0"/>
+          </a:p>
+          <a:p>
+            <a:pPr indent="0" marL="0">
+              <a:buNone/>
+            </a:pPr>
+            <a:r>
+              <a:rPr lang="en-US" sz="1350" dirty="0">
+                <a:solidFill>
+                  <a:srgbClr val="1B1F27"/>
+                </a:solidFill>
+                <a:latin typeface="Calibri" pitchFamily="34" charset="0"/>
+                <a:ea typeface="Calibri" pitchFamily="34" charset="-122"/>
+                <a:cs typeface="Calibri" pitchFamily="34" charset="-120"/>
+              </a:rPr>
+              <a:t>45% now blame higher prices vs 40% at the 2022 peak. Expected inflation is 4.6% (2019: 2.6%).</a:t>
+            </a:r>
+            <a:endParaRPr lang="en-US" sz="1600" dirty="0"/>
+          </a:p>
+        </p:txBody>
+      </p:sp>
       <p:sp>
         <p:nvSpPr>
           <p:cNvPr id="6" name="Shape 3"/>
@@ -10854,7 +15241,7 @@
                 <a:ea typeface="Calibri" pitchFamily="34" charset="-122"/>
                 <a:cs typeface="Calibri" pitchFamily="34" charset="-120"/>
               </a:rPr>
-              <a:t>Prices up 28%, paychecks up 26% — people aren't imagining it.</a:t>
+              <a:t>People tell us directly what hurts: the cost of living today — and it hurts more now than at the 2022 peak.</a:t>
             </a:r>
             <a:endParaRPr lang="en-US" sz="1500" dirty="0"/>
           </a:p>
@@ -10965,21 +15352,187 @@
                 <a:ea typeface="Cambria" pitchFamily="34" charset="-122"/>
                 <a:cs typeface="Cambria" pitchFamily="34" charset="-120"/>
               </a:rPr>
-              <a:t>So what explains the 41-point drop since 2019?</a:t>
+              <a:t>Why 'inflation is down' doesn't feel like it</a:t>
             </a:r>
             <a:endParaRPr lang="en-US" sz="3000" dirty="0"/>
+          </a:p>
+        </p:txBody>
+      </p:sp>
+      <p:sp>
+        <p:nvSpPr>
+          <p:cNvPr id="3" name="Shape 1"/>
+          <p:cNvSpPr/>
+          <p:nvPr/>
+        </p:nvSpPr>
+        <p:spPr>
+          <a:xfrm>
+            <a:off x="548640" y="1325880"/>
+            <a:ext cx="5120640" cy="4206240"/>
+          </a:xfrm>
+          <a:prstGeom prst="roundRect">
+            <a:avLst>
+              <a:gd name="adj" fmla="val 1739"/>
+            </a:avLst>
+          </a:prstGeom>
+          <a:solidFill>
+            <a:srgbClr val="EAF2FC"/>
+          </a:solidFill>
+          <a:ln w="12700">
+            <a:solidFill>
+              <a:srgbClr val="EAF2FC"/>
+            </a:solidFill>
+            <a:prstDash val="solid"/>
+          </a:ln>
+        </p:spPr>
+      </p:sp>
+      <p:sp>
+        <p:nvSpPr>
+          <p:cNvPr id="4" name="Text 2"/>
+          <p:cNvSpPr txBox="1"/>
+          <p:nvPr/>
+        </p:nvSpPr>
+        <p:spPr>
+          <a:xfrm>
+            <a:off x="777240" y="1508760"/>
+            <a:ext cx="4663440" cy="3931920"/>
+          </a:xfrm>
+          <a:prstGeom prst="rect">
+            <a:avLst/>
+          </a:prstGeom>
+          <a:noFill/>
+          <a:ln/>
+        </p:spPr>
+        <p:txBody>
+          <a:bodyPr wrap="square" lIns="0" tIns="0" rIns="0" bIns="0" rtlCol="0" anchor="t"/>
+          <a:lstStyle/>
+          <a:p>
+            <a:pPr indent="0" marL="0">
+              <a:spcAft>
+                <a:spcPts val="800"/>
+              </a:spcAft>
+              <a:buNone/>
+            </a:pPr>
+            <a:r>
+              <a:rPr lang="en-US" sz="1800" b="1" dirty="0">
+                <a:solidFill>
+                  <a:srgbClr val="2A78D6"/>
+                </a:solidFill>
+                <a:latin typeface="Calibri" pitchFamily="34" charset="0"/>
+                <a:ea typeface="Calibri" pitchFamily="34" charset="-122"/>
+                <a:cs typeface="Calibri" pitchFamily="34" charset="-120"/>
+              </a:rPr>
+              <a:t>The egg example</a:t>
+            </a:r>
+            <a:endParaRPr lang="en-US" sz="1800" dirty="0"/>
+          </a:p>
+          <a:p>
+            <a:pPr indent="0" marL="0">
+              <a:spcAft>
+                <a:spcPts val="400"/>
+              </a:spcAft>
+              <a:buNone/>
+            </a:pPr>
+            <a:r>
+              <a:rPr lang="en-US" sz="1500" dirty="0">
+                <a:solidFill>
+                  <a:schemeClr val="tx1"/>
+                </a:solidFill>
+                <a:latin typeface="Calibri" pitchFamily="34" charset="0"/>
+                <a:ea typeface="Calibri" pitchFamily="34" charset="-122"/>
+                <a:cs typeface="Calibri" pitchFamily="34" charset="-120"/>
+              </a:rPr>
+              <a:t>2021: eggs cost $2.</a:t>
+            </a:r>
+            <a:endParaRPr lang="en-US" sz="1800" dirty="0"/>
+          </a:p>
+          <a:p>
+            <a:pPr indent="0" marL="0">
+              <a:spcAft>
+                <a:spcPts val="400"/>
+              </a:spcAft>
+              <a:buNone/>
+            </a:pPr>
+            <a:r>
+              <a:rPr lang="en-US" sz="1500" dirty="0">
+                <a:solidFill>
+                  <a:schemeClr val="tx1"/>
+                </a:solidFill>
+                <a:latin typeface="Calibri" pitchFamily="34" charset="0"/>
+                <a:ea typeface="Calibri" pitchFamily="34" charset="-122"/>
+                <a:cs typeface="Calibri" pitchFamily="34" charset="-120"/>
+              </a:rPr>
+              <a:t>2023: eggs cost $4. Inflation was high.</a:t>
+            </a:r>
+            <a:endParaRPr lang="en-US" sz="1800" dirty="0"/>
+          </a:p>
+          <a:p>
+            <a:pPr indent="0" marL="0">
+              <a:spcAft>
+                <a:spcPts val="1200"/>
+              </a:spcAft>
+              <a:buNone/>
+            </a:pPr>
+            <a:r>
+              <a:rPr lang="en-US" sz="1500" dirty="0">
+                <a:solidFill>
+                  <a:schemeClr val="tx1"/>
+                </a:solidFill>
+                <a:latin typeface="Calibri" pitchFamily="34" charset="0"/>
+                <a:ea typeface="Calibri" pitchFamily="34" charset="-122"/>
+                <a:cs typeface="Calibri" pitchFamily="34" charset="-120"/>
+              </a:rPr>
+              <a:t>2026: eggs cost $4.12. The government says inflation is 'low' (3%).</a:t>
+            </a:r>
+            <a:endParaRPr lang="en-US" sz="1800" dirty="0"/>
+          </a:p>
+          <a:p>
+            <a:pPr indent="0" marL="0">
+              <a:spcAft>
+                <a:spcPts val="1200"/>
+              </a:spcAft>
+              <a:buNone/>
+            </a:pPr>
+            <a:r>
+              <a:rPr lang="en-US" sz="1500" b="1" dirty="0">
+                <a:solidFill>
+                  <a:schemeClr val="tx1"/>
+                </a:solidFill>
+                <a:latin typeface="Calibri" pitchFamily="34" charset="0"/>
+                <a:ea typeface="Calibri" pitchFamily="34" charset="-122"/>
+                <a:cs typeface="Calibri" pitchFamily="34" charset="-120"/>
+              </a:rPr>
+              <a:t>Official inflation measures how fast prices are rising now — not whether they came back down. People remember $2.</a:t>
+            </a:r>
+            <a:endParaRPr lang="en-US" sz="1800" dirty="0"/>
+          </a:p>
+          <a:p>
+            <a:pPr indent="0" marL="0">
+              <a:buNone/>
+            </a:pPr>
+            <a:r>
+              <a:rPr lang="en-US" sz="1400" dirty="0">
+                <a:solidFill>
+                  <a:srgbClr val="3A4150"/>
+                </a:solidFill>
+                <a:latin typeface="Calibri" pitchFamily="34" charset="0"/>
+                <a:ea typeface="Calibri" pitchFamily="34" charset="-122"/>
+                <a:cs typeface="Calibri" pitchFamily="34" charset="-120"/>
+              </a:rPr>
+              <a:t>It also leaves out loan costs: a 7% mortgage instead of 3% doesn't count as 'inflation'.</a:t>
+            </a:r>
+            <a:endParaRPr lang="en-US" sz="1800" dirty="0"/>
           </a:p>
         </p:txBody>
       </p:sp>
       <p:graphicFrame>
         <p:nvGraphicFramePr>
-          <p:cNvPr id="3" name="Chart 0" descr=""/>
+          <p:cNvPr id="5" name="Chart 0" descr=""/>
           <p:cNvGraphicFramePr/>
           <p:nvPr/>
         </p:nvGraphicFramePr>
         <p:xfrm>
-          <a:off x="548640" y="1234440"/>
-          <a:ext cx="7223760" cy="4343400"/>
+          <a:off x="5943600" y="1234440"/>
+          <a:ext cx="5669280" cy="4343400"/>
         </p:xfrm>
         <a:graphic xmlns:a="http://schemas.openxmlformats.org/drawingml/2006/main">
           <a:graphicData uri="http://schemas.openxmlformats.org/drawingml/2006/chart">
@@ -10987,139 +15540,6 @@
           </a:graphicData>
         </a:graphic>
       </p:graphicFrame>
-      <p:sp>
-        <p:nvSpPr>
-          <p:cNvPr id="4" name="Shape 1"/>
-          <p:cNvSpPr/>
-          <p:nvPr/>
-        </p:nvSpPr>
-        <p:spPr>
-          <a:xfrm>
-            <a:off x="8046720" y="1325880"/>
-            <a:ext cx="3566160" cy="4206240"/>
-          </a:xfrm>
-          <a:prstGeom prst="roundRect">
-            <a:avLst>
-              <a:gd name="adj" fmla="val 2051"/>
-            </a:avLst>
-          </a:prstGeom>
-          <a:solidFill>
-            <a:srgbClr val="F2F4F7"/>
-          </a:solidFill>
-          <a:ln w="12700">
-            <a:solidFill>
-              <a:srgbClr val="F2F4F7"/>
-            </a:solidFill>
-            <a:prstDash val="solid"/>
-          </a:ln>
-        </p:spPr>
-      </p:sp>
-      <p:sp>
-        <p:nvSpPr>
-          <p:cNvPr id="5" name="Text 2"/>
-          <p:cNvSpPr txBox="1"/>
-          <p:nvPr/>
-        </p:nvSpPr>
-        <p:spPr>
-          <a:xfrm>
-            <a:off x="8275320" y="1508760"/>
-            <a:ext cx="3154680" cy="3931920"/>
-          </a:xfrm>
-          <a:prstGeom prst="rect">
-            <a:avLst/>
-          </a:prstGeom>
-          <a:noFill/>
-          <a:ln/>
-        </p:spPr>
-        <p:txBody>
-          <a:bodyPr wrap="square" lIns="0" tIns="0" rIns="0" bIns="0" rtlCol="0" anchor="t"/>
-          <a:lstStyle/>
-          <a:p>
-            <a:pPr marL="342900" indent="-342900">
-              <a:spcAft>
-                <a:spcPts val="700"/>
-              </a:spcAft>
-              <a:buSzPct val="100000"/>
-              <a:buChar char="•"/>
-            </a:pPr>
-            <a:r>
-              <a:rPr lang="en-US" sz="1400" dirty="0">
-                <a:solidFill>
-                  <a:srgbClr val="1B1F27"/>
-                </a:solidFill>
-                <a:latin typeface="Calibri" pitchFamily="34" charset="0"/>
-                <a:ea typeface="Calibri" pitchFamily="34" charset="-122"/>
-                <a:cs typeface="Calibri" pitchFamily="34" charset="-120"/>
-              </a:rPr>
-              <a:t>Official numbers: only 13% of the drop.</a:t>
-            </a:r>
-            <a:endParaRPr lang="en-US" sz="1400" dirty="0"/>
-          </a:p>
-          <a:p>
-            <a:pPr marL="342900" indent="-342900">
-              <a:spcAft>
-                <a:spcPts val="700"/>
-              </a:spcAft>
-              <a:buSzPct val="100000"/>
-              <a:buChar char="•"/>
-            </a:pPr>
-            <a:r>
-              <a:rPr lang="en-US" sz="1400" dirty="0">
-                <a:solidFill>
-                  <a:srgbClr val="1B1F27"/>
-                </a:solidFill>
-                <a:latin typeface="Calibri" pitchFamily="34" charset="0"/>
-                <a:ea typeface="Calibri" pitchFamily="34" charset="-122"/>
-                <a:cs typeface="Calibri" pitchFamily="34" charset="-120"/>
-              </a:rPr>
-              <a:t>Everyday costs: the biggest piece (36%).</a:t>
-            </a:r>
-            <a:endParaRPr lang="en-US" sz="1400" dirty="0"/>
-          </a:p>
-          <a:p>
-            <a:pPr marL="342900" indent="-342900">
-              <a:spcAft>
-                <a:spcPts val="700"/>
-              </a:spcAft>
-              <a:buSzPct val="100000"/>
-              <a:buChar char="•"/>
-            </a:pPr>
-            <a:r>
-              <a:rPr lang="en-US" sz="1400" dirty="0">
-                <a:solidFill>
-                  <a:srgbClr val="1B1F27"/>
-                </a:solidFill>
-                <a:latin typeface="Calibri" pitchFamily="34" charset="0"/>
-                <a:ea typeface="Calibri" pitchFamily="34" charset="-122"/>
-                <a:cs typeface="Calibri" pitchFamily="34" charset="-120"/>
-              </a:rPr>
-              <a:t>Survey change: 16%.</a:t>
-            </a:r>
-            <a:endParaRPr lang="en-US" sz="1400" dirty="0"/>
-          </a:p>
-          <a:p>
-            <a:pPr marL="342900" indent="-342900">
-              <a:spcAft>
-                <a:spcPts val="700"/>
-              </a:spcAft>
-              <a:buSzPct val="100000"/>
-              <a:buChar char="•"/>
-            </a:pPr>
-            <a:r>
-              <a:rPr lang="en-US" sz="1400" dirty="0">
-                <a:solidFill>
-                  <a:srgbClr val="1B1F27"/>
-                </a:solidFill>
-                <a:latin typeface="Calibri" pitchFamily="34" charset="0"/>
-                <a:ea typeface="Calibri" pitchFamily="34" charset="-122"/>
-                <a:cs typeface="Calibri" pitchFamily="34" charset="-120"/>
-              </a:rPr>
-              <a:t>The rest (~12 points) is the most the media could possibly explain.</a:t>
-            </a:r>
-            <a:endParaRPr lang="en-US" sz="1400" dirty="0"/>
-          </a:p>
-        </p:txBody>
-      </p:sp>
       <p:sp>
         <p:nvSpPr>
           <p:cNvPr id="6" name="Shape 3"/>
@@ -11194,7 +15614,7 @@
                 <a:ea typeface="Calibri" pitchFamily="34" charset="-122"/>
                 <a:cs typeface="Calibri" pitchFamily="34" charset="-120"/>
               </a:rPr>
-              <a:t>Most of the drop is real everyday pain plus a change in how the survey is done.</a:t>
+              <a:t>Prices up 28%, paychecks up 26% — people aren't imagining it.</a:t>
             </a:r>
             <a:endParaRPr lang="en-US" sz="1500" dirty="0"/>
           </a:p>
@@ -11305,7 +15725,7 @@
                 <a:ea typeface="Cambria" pitchFamily="34" charset="-122"/>
                 <a:cs typeface="Cambria" pitchFamily="34" charset="-120"/>
               </a:rPr>
-              <a:t>Why young adults fell furthest: it was their first big inflation</a:t>
+              <a:t>What's causing the 41-point drop, ranked</a:t>
             </a:r>
             <a:endParaRPr lang="en-US" sz="3000" dirty="0"/>
           </a:p>
@@ -11319,7 +15739,7 @@
         </p:nvGraphicFramePr>
         <p:xfrm>
           <a:off x="548640" y="1234440"/>
-          <a:ext cx="4937760" cy="4343400"/>
+          <a:ext cx="7223760" cy="4343400"/>
         </p:xfrm>
         <a:graphic xmlns:a="http://schemas.openxmlformats.org/drawingml/2006/main">
           <a:graphicData uri="http://schemas.openxmlformats.org/drawingml/2006/chart">
@@ -11335,12 +15755,12 @@
         </p:nvSpPr>
         <p:spPr>
           <a:xfrm>
-            <a:off x="5852160" y="1325880"/>
-            <a:ext cx="5760720" cy="4206240"/>
+            <a:off x="8046720" y="1325880"/>
+            <a:ext cx="3566160" cy="4206240"/>
           </a:xfrm>
           <a:prstGeom prst="roundRect">
             <a:avLst>
-              <a:gd name="adj" fmla="val 1739"/>
+              <a:gd name="adj" fmla="val 2051"/>
             </a:avLst>
           </a:prstGeom>
           <a:solidFill>
@@ -11362,8 +15782,8 @@
         </p:nvSpPr>
         <p:spPr>
           <a:xfrm>
-            <a:off x="6080760" y="1508760"/>
-            <a:ext cx="5349240" cy="3931920"/>
+            <a:off x="8275320" y="1463040"/>
+            <a:ext cx="3154680" cy="4023360"/>
           </a:xfrm>
           <a:prstGeom prst="rect">
             <a:avLst/>
@@ -11375,14 +15795,15 @@
           <a:bodyPr wrap="square" lIns="0" tIns="0" rIns="0" bIns="0" rtlCol="0" anchor="t"/>
           <a:lstStyle/>
           <a:p>
-            <a:pPr indent="0" marL="0">
+            <a:pPr marL="342900" indent="-342900">
               <a:spcAft>
-                <a:spcPts val="600"/>
+                <a:spcPts val="700"/>
               </a:spcAft>
-              <a:buNone/>
-            </a:pPr>
-            <a:r>
-              <a:rPr lang="en-US" sz="1700" b="1" dirty="0">
+              <a:buSzPct val="100000"/>
+              <a:buChar char="•"/>
+            </a:pPr>
+            <a:r>
+              <a:rPr lang="en-US" sz="1300" dirty="0">
                 <a:solidFill>
                   <a:srgbClr val="1B1F27"/>
                 </a:solidFill>
@@ -11390,19 +15811,20 @@
                 <a:ea typeface="Calibri" pitchFamily="34" charset="-122"/>
                 <a:cs typeface="Calibri" pitchFamily="34" charset="-120"/>
               </a:rPr>
-              <a:t>The idea</a:t>
-            </a:r>
-            <a:endParaRPr lang="en-US" sz="1700" dirty="0"/>
-          </a:p>
-          <a:p>
-            <a:pPr indent="0" marL="0">
+              <a:t>Prices &amp; cost of living: the #1 cause (28% of the drop) — prices ~11% above normal, food, gas.</a:t>
+            </a:r>
+            <a:endParaRPr lang="en-US" sz="1300" dirty="0"/>
+          </a:p>
+          <a:p>
+            <a:pPr marL="342900" indent="-342900">
               <a:spcAft>
-                <a:spcPts val="1200"/>
+                <a:spcPts val="700"/>
               </a:spcAft>
-              <a:buNone/>
-            </a:pPr>
-            <a:r>
-              <a:rPr lang="en-US" sz="1400" dirty="0">
+              <a:buSzPct val="100000"/>
+              <a:buChar char="•"/>
+            </a:pPr>
+            <a:r>
+              <a:rPr lang="en-US" sz="1300" dirty="0">
                 <a:solidFill>
                   <a:srgbClr val="1B1F27"/>
                 </a:solidFill>
@@ -11410,19 +15832,20 @@
                 <a:ea typeface="Calibri" pitchFamily="34" charset="-122"/>
                 <a:cs typeface="Calibri" pitchFamily="34" charset="-120"/>
               </a:rPr>
-              <a:t>People learn about inflation from what they have lived through. For a 26-year-old, two years of high inflation is a big share of their whole life. For a 66-year-old who lived through the 1970s, it's a small blip.</a:t>
-            </a:r>
-            <a:endParaRPr lang="en-US" sz="1700" dirty="0"/>
-          </a:p>
-          <a:p>
-            <a:pPr indent="0" marL="0">
+              <a:t>The survey moving online: 16%.</a:t>
+            </a:r>
+            <a:endParaRPr lang="en-US" sz="1300" dirty="0"/>
+          </a:p>
+          <a:p>
+            <a:pPr marL="342900" indent="-342900">
               <a:spcAft>
-                <a:spcPts val="600"/>
+                <a:spcPts val="700"/>
               </a:spcAft>
-              <a:buNone/>
-            </a:pPr>
-            <a:r>
-              <a:rPr lang="en-US" sz="1700" b="1" dirty="0">
+              <a:buSzPct val="100000"/>
+              <a:buChar char="•"/>
+            </a:pPr>
+            <a:r>
+              <a:rPr lang="en-US" sz="1300" dirty="0">
                 <a:solidFill>
                   <a:srgbClr val="1B1F27"/>
                 </a:solidFill>
@@ -11430,19 +15853,20 @@
                 <a:ea typeface="Calibri" pitchFamily="34" charset="-122"/>
                 <a:cs typeface="Calibri" pitchFamily="34" charset="-120"/>
               </a:rPr>
-              <a:t>What we found</a:t>
-            </a:r>
-            <a:endParaRPr lang="en-US" sz="1700" dirty="0"/>
-          </a:p>
-          <a:p>
-            <a:pPr indent="0" marL="0">
+              <a:t>Tariff and shutdown uncertainty: 15%.</a:t>
+            </a:r>
+            <a:endParaRPr lang="en-US" sz="1300" dirty="0"/>
+          </a:p>
+          <a:p>
+            <a:pPr marL="342900" indent="-342900">
               <a:spcAft>
-                <a:spcPts val="600"/>
+                <a:spcPts val="700"/>
               </a:spcAft>
-              <a:buNone/>
-            </a:pPr>
-            <a:r>
-              <a:rPr lang="en-US" sz="1400" dirty="0">
+              <a:buSzPct val="100000"/>
+              <a:buChar char="•"/>
+            </a:pPr>
+            <a:r>
+              <a:rPr lang="en-US" sz="1300" dirty="0">
                 <a:solidFill>
                   <a:srgbClr val="1B1F27"/>
                 </a:solidFill>
@@ -11450,16 +15874,20 @@
                 <a:ea typeface="Calibri" pitchFamily="34" charset="-122"/>
                 <a:cs typeface="Calibri" pitchFamily="34" charset="-120"/>
               </a:rPr>
-              <a:t>The 2021–23 shock raised young adults' inflation memory about 10× more than older adults'.</a:t>
-            </a:r>
-            <a:endParaRPr lang="en-US" sz="1700" dirty="0"/>
-          </a:p>
-          <a:p>
-            <a:pPr indent="0" marL="0">
-              <a:buNone/>
-            </a:pPr>
-            <a:r>
-              <a:rPr lang="en-US" sz="1400" b="1" dirty="0">
+              <a:t>The official 'headline' numbers (jobs, growth) explain very little.</a:t>
+            </a:r>
+            <a:endParaRPr lang="en-US" sz="1300" dirty="0"/>
+          </a:p>
+          <a:p>
+            <a:pPr marL="342900" indent="-342900">
+              <a:spcAft>
+                <a:spcPts val="700"/>
+              </a:spcAft>
+              <a:buSzPct val="100000"/>
+              <a:buChar char="•"/>
+            </a:pPr>
+            <a:r>
+              <a:rPr lang="en-US" sz="1300" dirty="0">
                 <a:solidFill>
                   <a:srgbClr val="1B1F27"/>
                 </a:solidFill>
@@ -11467,9 +15895,9 @@
                 <a:ea typeface="Calibri" pitchFamily="34" charset="-122"/>
                 <a:cs typeface="Calibri" pitchFamily="34" charset="-120"/>
               </a:rPr>
-              <a:t>Young adults fell 10.4 points more than 55+. This effect explains about 8.2 of those 10.4 points.</a:t>
-            </a:r>
-            <a:endParaRPr lang="en-US" sz="1700" dirty="0"/>
+              <a:t>About 12 points remain unexplained — we say so honestly.</a:t>
+            </a:r>
+            <a:endParaRPr lang="en-US" sz="1300" dirty="0"/>
           </a:p>
         </p:txBody>
       </p:sp>
@@ -11547,7 +15975,7 @@
                 <a:ea typeface="Calibri" pitchFamily="34" charset="-122"/>
                 <a:cs typeface="Calibri" pitchFamily="34" charset="-120"/>
               </a:rPr>
-              <a:t>Young people aren't irrational — they're learning from the only big inflation they've ever seen.</a:t>
+              <a:t>High prices, the survey change and policy uncertainty: 24 of the 29 points we can explain.</a:t>
             </a:r>
             <a:endParaRPr lang="en-US" sz="1500" dirty="0"/>
           </a:p>

--- a/presentation/Sentiment_Midterms_Summary.pptx
+++ b/presentation/Sentiment_Midterms_Summary.pptx
@@ -124,25 +124,25 @@
   <p:extLst>
     <p:ext uri="{521415D9-36F7-43E2-AB2F-B90AF26B5E84}">
       <p14:sectionLst xmlns:p14="http://schemas.microsoft.com/office/powerpoint/2010/main">
-        <p14:section name="Question" id="{a921950d-5b00-f043-f4db-1dc3c42b499c}">
+        <p14:section name="Question" id="{33d14c0f-1c42-7557-f86d-a3316a21de77}">
           <p14:sldIdLst>
             <p14:sldId id="256"/>
             <p14:sldId id="257"/>
           </p14:sldIdLst>
         </p14:section>
-        <p14:section name="Approach" id="{4577d273-ab55-177f-2221-76f9a86dace1}">
+        <p14:section name="Approach" id="{40c31b20-55e2-ba54-1fd8-08816e4a828c}">
           <p14:sldIdLst>
             <p14:sldId id="258"/>
             <p14:sldId id="259"/>
           </p14:sldIdLst>
         </p14:section>
-        <p14:section name="Who" id="{acfe78a5-6545-e3a7-2854-288f04aa42b4}">
+        <p14:section name="Who" id="{98ed16e2-d2a7-36cb-84b1-dab3a2b4aa9c}">
           <p14:sldIdLst>
             <p14:sldId id="260"/>
             <p14:sldId id="261"/>
           </p14:sldIdLst>
         </p14:section>
-        <p14:section name="Why" id="{890d6445-3554-14d1-c2e1-6175ed3575d6}">
+        <p14:section name="Why" id="{49f7c477-89aa-9654-fd04-04f0ac526b93}">
           <p14:sldIdLst>
             <p14:sldId id="262"/>
             <p14:sldId id="263"/>
@@ -151,20 +151,20 @@
             <p14:sldId id="266"/>
           </p14:sldIdLst>
         </p14:section>
-        <p14:section name="Media" id="{9a02d32f-fa5b-05f3-3153-88314ee6538f}">
+        <p14:section name="Media" id="{15929bcb-7e83-e698-993c-800b350da609}">
           <p14:sldIdLst>
             <p14:sldId id="267"/>
             <p14:sldId id="268"/>
           </p14:sldIdLst>
         </p14:section>
-        <p14:section name="So what" id="{373b5f86-1532-b554-a66a-9b0f7b0f09a2}">
+        <p14:section name="So what" id="{a250556c-cc8b-9e25-dd40-3f4b627df8f9}">
           <p14:sldIdLst>
             <p14:sldId id="269"/>
             <p14:sldId id="270"/>
             <p14:sldId id="271"/>
           </p14:sldIdLst>
         </p14:section>
-        <p14:section name="Backup" id="{e238ce31-07b2-1049-4eb2-ca45cf44465c}">
+        <p14:section name="Extra clarification" id="{90d066b1-77fe-d172-2c6f-97ddf97271ac}">
           <p14:sldIdLst>
             <p14:sldId id="272"/>
             <p14:sldId id="273"/>
@@ -5650,7 +5650,7 @@
           <a:p>
             <a:r>
               <a:rPr lang="en-US" dirty="0"/>
-              <a:t>Backup for questions: one-line answers to the six research questions the brief requires.</a:t>
+              <a:t>Extra clarification for questions: one-line answers to the six research questions the brief requires.</a:t>
             </a:r>
             <a:endParaRPr lang="en-US" dirty="0"/>
           </a:p>
@@ -5738,7 +5738,7 @@
           <a:p>
             <a:r>
               <a:rPr lang="en-US" dirty="0"/>
-              <a:t>Backup for questions: our causal-design proposal (the brief's third option) and the honest limits of the study.</a:t>
+              <a:t>Extra clarification for questions: our causal-design proposal (the brief's third option) and the honest limits of the study.</a:t>
             </a:r>
             <a:endParaRPr lang="en-US" dirty="0"/>
           </a:p>
@@ -10352,7 +10352,7 @@
                 <a:ea typeface="Cambria" pitchFamily="34" charset="-122"/>
                 <a:cs typeface="Cambria" pitchFamily="34" charset="-120"/>
               </a:rPr>
-              <a:t>Backup: answers to the six required questions</a:t>
+              <a:t>Extra clarification: answers to the six required questions</a:t>
             </a:r>
             <a:endParaRPr lang="en-US" sz="3000" dirty="0"/>
           </a:p>
@@ -11285,7 +11285,7 @@
                 <a:ea typeface="Cambria" pitchFamily="34" charset="-122"/>
                 <a:cs typeface="Cambria" pitchFamily="34" charset="-120"/>
               </a:rPr>
-              <a:t>Backup: how we would prove cause — and our limits</a:t>
+              <a:t>Extra clarification: how we would prove cause — and our limits</a:t>
             </a:r>
             <a:endParaRPr lang="en-US" sz="3000" dirty="0"/>
           </a:p>

--- a/presentation/Sentiment_Midterms_Summary.pptx
+++ b/presentation/Sentiment_Midterms_Summary.pptx
@@ -124,25 +124,25 @@
   <p:extLst>
     <p:ext uri="{521415D9-36F7-43E2-AB2F-B90AF26B5E84}">
       <p14:sectionLst xmlns:p14="http://schemas.microsoft.com/office/powerpoint/2010/main">
-        <p14:section name="Question" id="{33d14c0f-1c42-7557-f86d-a3316a21de77}">
+        <p14:section name="Question" id="{36a789dd-e9de-a9b7-b2d2-844930be87b5}">
           <p14:sldIdLst>
             <p14:sldId id="256"/>
             <p14:sldId id="257"/>
           </p14:sldIdLst>
         </p14:section>
-        <p14:section name="Approach" id="{40c31b20-55e2-ba54-1fd8-08816e4a828c}">
+        <p14:section name="Approach" id="{3625bff1-aedb-5221-dc3b-5219b236a836}">
           <p14:sldIdLst>
             <p14:sldId id="258"/>
             <p14:sldId id="259"/>
           </p14:sldIdLst>
         </p14:section>
-        <p14:section name="Who" id="{98ed16e2-d2a7-36cb-84b1-dab3a2b4aa9c}">
+        <p14:section name="Who" id="{4418e372-bfac-944d-87ec-be83591b55a1}">
           <p14:sldIdLst>
             <p14:sldId id="260"/>
             <p14:sldId id="261"/>
           </p14:sldIdLst>
         </p14:section>
-        <p14:section name="Why" id="{49f7c477-89aa-9654-fd04-04f0ac526b93}">
+        <p14:section name="Why" id="{218aec60-db49-84b7-666b-b50bc6ed1cbd}">
           <p14:sldIdLst>
             <p14:sldId id="262"/>
             <p14:sldId id="263"/>
@@ -151,20 +151,20 @@
             <p14:sldId id="266"/>
           </p14:sldIdLst>
         </p14:section>
-        <p14:section name="Media" id="{15929bcb-7e83-e698-993c-800b350da609}">
+        <p14:section name="Media" id="{5de7b180-e585-7992-0e3e-251d019c90fe}">
           <p14:sldIdLst>
             <p14:sldId id="267"/>
             <p14:sldId id="268"/>
           </p14:sldIdLst>
         </p14:section>
-        <p14:section name="So what" id="{a250556c-cc8b-9e25-dd40-3f4b627df8f9}">
+        <p14:section name="So what" id="{2c0db3ab-87bc-f4e8-ac92-0304ce89a299}">
           <p14:sldIdLst>
             <p14:sldId id="269"/>
             <p14:sldId id="270"/>
             <p14:sldId id="271"/>
           </p14:sldIdLst>
         </p14:section>
-        <p14:section name="Extra clarification" id="{90d066b1-77fe-d172-2c6f-97ddf97271ac}">
+        <p14:section name="Extra clarification" id="{c9239acd-8028-ee87-db36-4f1f7d03e35b}">
           <p14:sldIdLst>
             <p14:sldId id="272"/>
             <p14:sldId id="273"/>
@@ -11285,7 +11285,7 @@
                 <a:ea typeface="Cambria" pitchFamily="34" charset="-122"/>
                 <a:cs typeface="Cambria" pitchFamily="34" charset="-120"/>
               </a:rPr>
-              <a:t>Extra clarification: how we would prove cause — and our limits</a:t>
+              <a:t>Extra clarification: proving cause, and our limits</a:t>
             </a:r>
             <a:endParaRPr lang="en-US" sz="3000" dirty="0"/>
           </a:p>

--- a/presentation/Sentiment_Midterms_Summary.pptx
+++ b/presentation/Sentiment_Midterms_Summary.pptx
@@ -124,25 +124,25 @@
   <p:extLst>
     <p:ext uri="{521415D9-36F7-43E2-AB2F-B90AF26B5E84}">
       <p14:sectionLst xmlns:p14="http://schemas.microsoft.com/office/powerpoint/2010/main">
-        <p14:section name="Question" id="{36a789dd-e9de-a9b7-b2d2-844930be87b5}">
+        <p14:section name="Question" id="{4f6d6fa3-3d15-0d4b-47a6-317f1fd34761}">
           <p14:sldIdLst>
             <p14:sldId id="256"/>
             <p14:sldId id="257"/>
           </p14:sldIdLst>
         </p14:section>
-        <p14:section name="Approach" id="{3625bff1-aedb-5221-dc3b-5219b236a836}">
+        <p14:section name="Approach" id="{9798c8e5-13db-d484-1e6f-6ae432546b71}">
           <p14:sldIdLst>
             <p14:sldId id="258"/>
             <p14:sldId id="259"/>
           </p14:sldIdLst>
         </p14:section>
-        <p14:section name="Who" id="{4418e372-bfac-944d-87ec-be83591b55a1}">
+        <p14:section name="Who" id="{b5a56596-e12d-a3c7-71d3-fecfd552f89c}">
           <p14:sldIdLst>
             <p14:sldId id="260"/>
             <p14:sldId id="261"/>
           </p14:sldIdLst>
         </p14:section>
-        <p14:section name="Why" id="{218aec60-db49-84b7-666b-b50bc6ed1cbd}">
+        <p14:section name="Why" id="{a0672b59-8a78-24d7-0078-83b4f2424f3f}">
           <p14:sldIdLst>
             <p14:sldId id="262"/>
             <p14:sldId id="263"/>
@@ -151,20 +151,20 @@
             <p14:sldId id="266"/>
           </p14:sldIdLst>
         </p14:section>
-        <p14:section name="Media" id="{5de7b180-e585-7992-0e3e-251d019c90fe}">
+        <p14:section name="Media" id="{dd5d10db-f242-bfc2-4d29-93e08b88c197}">
           <p14:sldIdLst>
             <p14:sldId id="267"/>
             <p14:sldId id="268"/>
           </p14:sldIdLst>
         </p14:section>
-        <p14:section name="So what" id="{2c0db3ab-87bc-f4e8-ac92-0304ce89a299}">
+        <p14:section name="So what" id="{4fe285ab-3c70-b78c-608e-a71672f26355}">
           <p14:sldIdLst>
             <p14:sldId id="269"/>
             <p14:sldId id="270"/>
             <p14:sldId id="271"/>
           </p14:sldIdLst>
         </p14:section>
-        <p14:section name="Extra clarification" id="{c9239acd-8028-ee87-db36-4f1f7d03e35b}">
+        <p14:section name="Extra clarification" id="{18fbd0e5-d3ba-1b63-78b5-9d474a3c7815}">
           <p14:sldIdLst>
             <p14:sldId id="272"/>
             <p14:sldId id="273"/>
@@ -6178,7 +6178,7 @@
           <a:p>
             <a:r>
               <a:rPr lang="en-US" dirty="0"/>
-              <a:t>(30 s) Next we asked: is one region or one income group driving this? No. The Northeast, Midwest, South and West all fell by about 40 points. Low, middle and high earners all fell by about 40 points too. Since everyone fell together, the cause must be something national that hit everyone — which brings us to prices.</a:t>
+              <a:t>(30 s) Next we asked: is one region or one income group driving this? No. The Northeast, Midwest, South and West all fell by about 40 points. Low, middle and high earners all fell by about 40 points too. Since everyone fell together, the cause must be something national that hit everyone — which brings us to prices. And party doesn't skew this: 2019 and now are both under the same president. Comparing Biden years with Trump years, the Republican-leaning South fell about 7 points less than the coasts — the same flip happened in 2017 — but every region still fell.</a:t>
             </a:r>
             <a:endParaRPr lang="en-US" dirty="0"/>
           </a:p>
@@ -14810,7 +14810,7 @@
         </p:nvGraphicFramePr>
         <p:xfrm>
           <a:off x="548640" y="1234440"/>
-          <a:ext cx="5486400" cy="4343400"/>
+          <a:ext cx="5486400" cy="3931920"/>
         </p:xfrm>
         <a:graphic xmlns:a="http://schemas.openxmlformats.org/drawingml/2006/main">
           <a:graphicData uri="http://schemas.openxmlformats.org/drawingml/2006/chart">
@@ -14826,7 +14826,7 @@
         </p:nvGraphicFramePr>
         <p:xfrm>
           <a:off x="6217920" y="1234440"/>
-          <a:ext cx="5394960" cy="4343400"/>
+          <a:ext cx="5394960" cy="3931920"/>
         </p:xfrm>
         <a:graphic xmlns:a="http://schemas.openxmlformats.org/drawingml/2006/main">
           <a:graphicData uri="http://schemas.openxmlformats.org/drawingml/2006/chart">
@@ -14836,7 +14836,60 @@
       </p:graphicFrame>
       <p:sp>
         <p:nvSpPr>
-          <p:cNvPr id="5" name="Shape 1"/>
+          <p:cNvPr id="5" name="Text 1"/>
+          <p:cNvSpPr txBox="1"/>
+          <p:nvPr/>
+        </p:nvSpPr>
+        <p:spPr>
+          <a:xfrm>
+            <a:off x="548640" y="5193792"/>
+            <a:ext cx="11064240" cy="411480"/>
+          </a:xfrm>
+          <a:prstGeom prst="rect">
+            <a:avLst/>
+          </a:prstGeom>
+          <a:noFill/>
+          <a:ln/>
+        </p:spPr>
+        <p:txBody>
+          <a:bodyPr wrap="square" lIns="0" tIns="0" rIns="0" bIns="0" rtlCol="0" anchor="t"/>
+          <a:lstStyle/>
+          <a:p>
+            <a:pPr indent="0" marL="0">
+              <a:buNone/>
+            </a:pPr>
+            <a:r>
+              <a:rPr lang="en-US" sz="1200" b="1" i="1" dirty="0">
+                <a:solidFill>
+                  <a:srgbClr val="3A4150"/>
+                </a:solidFill>
+                <a:latin typeface="Calibri" pitchFamily="34" charset="0"/>
+                <a:ea typeface="Calibri" pitchFamily="34" charset="-122"/>
+                <a:cs typeface="Calibri" pitchFamily="34" charset="-120"/>
+              </a:rPr>
+              <a:t>Does party skew this? </a:t>
+            </a:r>
+            <a:pPr indent="0" marL="0">
+              <a:buNone/>
+            </a:pPr>
+            <a:r>
+              <a:rPr lang="en-US" sz="1200" i="1" dirty="0">
+                <a:solidFill>
+                  <a:srgbClr val="3A4150"/>
+                </a:solidFill>
+                <a:latin typeface="Calibri" pitchFamily="34" charset="0"/>
+                <a:ea typeface="Calibri" pitchFamily="34" charset="-122"/>
+                <a:cs typeface="Calibri" pitchFamily="34" charset="-120"/>
+              </a:rPr>
+              <a:t>No — 2019 and 2025–26 are both under the same president, so party cancels out. (Biden vs Trump years: the Republican-leaning South fell ~7 points less — a small tilt, the same flip seen in 2017.)</a:t>
+            </a:r>
+            <a:endParaRPr lang="en-US" sz="1200" dirty="0"/>
+          </a:p>
+        </p:txBody>
+      </p:sp>
+      <p:sp>
+        <p:nvSpPr>
+          <p:cNvPr id="6" name="Shape 2"/>
           <p:cNvSpPr/>
           <p:nvPr/>
         </p:nvSpPr>
@@ -14863,7 +14916,7 @@
       </p:sp>
       <p:sp>
         <p:nvSpPr>
-          <p:cNvPr id="6" name="Text 2"/>
+          <p:cNvPr id="7" name="Text 3"/>
           <p:cNvSpPr txBox="1"/>
           <p:nvPr/>
         </p:nvSpPr>
